--- a/docs/silicon-agent-pitch.pptx
+++ b/docs/silicon-agent-pitch.pptx
@@ -3949,7 +3949,7 @@
                 <a:latin typeface="PingFang SC"/>
               </a:rPr>
               <a:t>自然语言 → 架构 IR → RTL → 仿真 → 综合 → 布局布线 → 诊断 → 下一轮，直到时序和资源约束全部满足。
-真实 EDA 工具是唯一的 ground truth：没有一个数字是估出来的。4 种器件 · 4 类生成器 · 已部署。</a:t>
+真实 EDA 工具是唯一的 ground truth：没有一个数字是估出来的。5 种器件 · 7 类生成器 · 形式等价 · 每晚回归 · 已部署。</a:t>
             </a:r>
           </a:p>
         </p:txBody>
@@ -4565,8 +4565,8 @@
         </p:nvSpPr>
         <p:spPr>
           <a:xfrm>
-            <a:off x="3017520" y="1691640"/>
-            <a:ext cx="2057400" cy="685800"/>
+            <a:off x="3017520" y="1554480"/>
+            <a:ext cx="1645920" cy="640080"/>
           </a:xfrm>
           <a:prstGeom prst="roundRect">
             <a:avLst>
@@ -4613,27 +4613,27 @@
         </p:nvSpPr>
         <p:spPr>
           <a:xfrm>
-            <a:off x="3127248" y="1764792"/>
-            <a:ext cx="1874520" cy="274320"/>
-          </a:xfrm>
-          <a:prstGeom prst="rect">
-            <a:avLst/>
-          </a:prstGeom>
-          <a:noFill/>
-        </p:spPr>
-        <p:txBody>
-          <a:bodyPr wrap="square" anchor="t" lIns="0" rIns="0" tIns="0" bIns="0">
-            <a:spAutoFit/>
-          </a:bodyPr>
-          <a:lstStyle/>
-          <a:p>
-            <a:pPr algn="l">
-              <a:lnSpc>
-                <a:spcPct val="115000"/>
-              </a:lnSpc>
-            </a:pPr>
-            <a:r>
-              <a:rPr sz="1300" b="1">
+            <a:off x="3108960" y="1609344"/>
+            <a:ext cx="1508760" cy="274320"/>
+          </a:xfrm>
+          <a:prstGeom prst="rect">
+            <a:avLst/>
+          </a:prstGeom>
+          <a:noFill/>
+        </p:spPr>
+        <p:txBody>
+          <a:bodyPr wrap="square" anchor="t" lIns="0" rIns="0" tIns="0" bIns="0">
+            <a:spAutoFit/>
+          </a:bodyPr>
+          <a:lstStyle/>
+          <a:p>
+            <a:pPr algn="l">
+              <a:lnSpc>
+                <a:spcPct val="115000"/>
+              </a:lnSpc>
+            </a:pPr>
+            <a:r>
+              <a:rPr sz="1200" b="1">
                 <a:solidFill>
                   <a:srgbClr val="ECECE6"/>
                 </a:solidFill>
@@ -4652,33 +4652,33 @@
         </p:nvSpPr>
         <p:spPr>
           <a:xfrm>
-            <a:off x="3127248" y="2020824"/>
-            <a:ext cx="1874520" cy="365760"/>
-          </a:xfrm>
-          <a:prstGeom prst="rect">
-            <a:avLst/>
-          </a:prstGeom>
-          <a:noFill/>
-        </p:spPr>
-        <p:txBody>
-          <a:bodyPr wrap="square" anchor="t" lIns="0" rIns="0" tIns="0" bIns="0">
-            <a:spAutoFit/>
-          </a:bodyPr>
-          <a:lstStyle/>
-          <a:p>
-            <a:pPr algn="l">
-              <a:lnSpc>
-                <a:spcPct val="115000"/>
-              </a:lnSpc>
-            </a:pPr>
-            <a:r>
-              <a:rPr sz="900" b="0">
+            <a:off x="3108960" y="1865376"/>
+            <a:ext cx="1508760" cy="329184"/>
+          </a:xfrm>
+          <a:prstGeom prst="rect">
+            <a:avLst/>
+          </a:prstGeom>
+          <a:noFill/>
+        </p:spPr>
+        <p:txBody>
+          <a:bodyPr wrap="square" anchor="t" lIns="0" rIns="0" tIns="0" bIns="0">
+            <a:spAutoFit/>
+          </a:bodyPr>
+          <a:lstStyle/>
+          <a:p>
+            <a:pPr algn="l">
+              <a:lnSpc>
+                <a:spcPct val="115000"/>
+              </a:lnSpc>
+            </a:pPr>
+            <a:r>
+              <a:rPr sz="800" b="0">
                 <a:solidFill>
                   <a:srgbClr val="6F6E67"/>
                 </a:solidFill>
                 <a:latin typeface="Menlo"/>
               </a:rPr>
-              <a:t>LFE5U-45F · yosys + nextpnr · 15–60 s</a:t>
+              <a:t>LFE5U-45F · nextpnr · 15–60 s</a:t>
             </a:r>
           </a:p>
         </p:txBody>
@@ -4691,8 +4691,8 @@
         </p:nvSpPr>
         <p:spPr>
           <a:xfrm>
-            <a:off x="5166360" y="1691640"/>
-            <a:ext cx="2057400" cy="685800"/>
+            <a:off x="4754880" y="1554480"/>
+            <a:ext cx="1645920" cy="640080"/>
           </a:xfrm>
           <a:prstGeom prst="roundRect">
             <a:avLst>
@@ -4739,27 +4739,27 @@
         </p:nvSpPr>
         <p:spPr>
           <a:xfrm>
-            <a:off x="5276088" y="1764792"/>
-            <a:ext cx="1874520" cy="274320"/>
-          </a:xfrm>
-          <a:prstGeom prst="rect">
-            <a:avLst/>
-          </a:prstGeom>
-          <a:noFill/>
-        </p:spPr>
-        <p:txBody>
-          <a:bodyPr wrap="square" anchor="t" lIns="0" rIns="0" tIns="0" bIns="0">
-            <a:spAutoFit/>
-          </a:bodyPr>
-          <a:lstStyle/>
-          <a:p>
-            <a:pPr algn="l">
-              <a:lnSpc>
-                <a:spcPct val="115000"/>
-              </a:lnSpc>
-            </a:pPr>
-            <a:r>
-              <a:rPr sz="1300" b="1">
+            <a:off x="4846320" y="1609344"/>
+            <a:ext cx="1508760" cy="274320"/>
+          </a:xfrm>
+          <a:prstGeom prst="rect">
+            <a:avLst/>
+          </a:prstGeom>
+          <a:noFill/>
+        </p:spPr>
+        <p:txBody>
+          <a:bodyPr wrap="square" anchor="t" lIns="0" rIns="0" tIns="0" bIns="0">
+            <a:spAutoFit/>
+          </a:bodyPr>
+          <a:lstStyle/>
+          <a:p>
+            <a:pPr algn="l">
+              <a:lnSpc>
+                <a:spcPct val="115000"/>
+              </a:lnSpc>
+            </a:pPr>
+            <a:r>
+              <a:rPr sz="1200" b="1">
                 <a:solidFill>
                   <a:srgbClr val="ECECE6"/>
                 </a:solidFill>
@@ -4778,33 +4778,33 @@
         </p:nvSpPr>
         <p:spPr>
           <a:xfrm>
-            <a:off x="5276088" y="2020824"/>
-            <a:ext cx="1874520" cy="365760"/>
-          </a:xfrm>
-          <a:prstGeom prst="rect">
-            <a:avLst/>
-          </a:prstGeom>
-          <a:noFill/>
-        </p:spPr>
-        <p:txBody>
-          <a:bodyPr wrap="square" anchor="t" lIns="0" rIns="0" tIns="0" bIns="0">
-            <a:spAutoFit/>
-          </a:bodyPr>
-          <a:lstStyle/>
-          <a:p>
-            <a:pPr algn="l">
-              <a:lnSpc>
-                <a:spcPct val="115000"/>
-              </a:lnSpc>
-            </a:pPr>
-            <a:r>
-              <a:rPr sz="900" b="0">
+            <a:off x="4846320" y="1865376"/>
+            <a:ext cx="1508760" cy="329184"/>
+          </a:xfrm>
+          <a:prstGeom prst="rect">
+            <a:avLst/>
+          </a:prstGeom>
+          <a:noFill/>
+        </p:spPr>
+        <p:txBody>
+          <a:bodyPr wrap="square" anchor="t" lIns="0" rIns="0" tIns="0" bIns="0">
+            <a:spAutoFit/>
+          </a:bodyPr>
+          <a:lstStyle/>
+          <a:p>
+            <a:pPr algn="l">
+              <a:lnSpc>
+                <a:spcPct val="115000"/>
+              </a:lnSpc>
+            </a:pPr>
+            <a:r>
+              <a:rPr sz="800" b="0">
                 <a:solidFill>
                   <a:srgbClr val="6F6E67"/>
                 </a:solidFill>
                 <a:latin typeface="Menlo"/>
               </a:rPr>
-              <a:t>XC7S50 · Vivado 2025.2 · 五级仿真 · 1.5–4 min</a:t>
+              <a:t>XC7S50 · Vivado · 五级仿真 · 1.5–4 min</a:t>
             </a:r>
           </a:p>
         </p:txBody>
@@ -4817,8 +4817,8 @@
         </p:nvSpPr>
         <p:spPr>
           <a:xfrm>
-            <a:off x="7315200" y="1691640"/>
-            <a:ext cx="2057400" cy="685800"/>
+            <a:off x="6492240" y="1554480"/>
+            <a:ext cx="1645920" cy="640080"/>
           </a:xfrm>
           <a:prstGeom prst="roundRect">
             <a:avLst>
@@ -4865,27 +4865,27 @@
         </p:nvSpPr>
         <p:spPr>
           <a:xfrm>
-            <a:off x="7424928" y="1764792"/>
-            <a:ext cx="1874520" cy="274320"/>
-          </a:xfrm>
-          <a:prstGeom prst="rect">
-            <a:avLst/>
-          </a:prstGeom>
-          <a:noFill/>
-        </p:spPr>
-        <p:txBody>
-          <a:bodyPr wrap="square" anchor="t" lIns="0" rIns="0" tIns="0" bIns="0">
-            <a:spAutoFit/>
-          </a:bodyPr>
-          <a:lstStyle/>
-          <a:p>
-            <a:pPr algn="l">
-              <a:lnSpc>
-                <a:spcPct val="115000"/>
-              </a:lnSpc>
-            </a:pPr>
-            <a:r>
-              <a:rPr sz="1300" b="1">
+            <a:off x="6583680" y="1609344"/>
+            <a:ext cx="1508760" cy="274320"/>
+          </a:xfrm>
+          <a:prstGeom prst="rect">
+            <a:avLst/>
+          </a:prstGeom>
+          <a:noFill/>
+        </p:spPr>
+        <p:txBody>
+          <a:bodyPr wrap="square" anchor="t" lIns="0" rIns="0" tIns="0" bIns="0">
+            <a:spAutoFit/>
+          </a:bodyPr>
+          <a:lstStyle/>
+          <a:p>
+            <a:pPr algn="l">
+              <a:lnSpc>
+                <a:spcPct val="115000"/>
+              </a:lnSpc>
+            </a:pPr>
+            <a:r>
+              <a:rPr sz="1200" b="1">
                 <a:solidFill>
                   <a:srgbClr val="ECECE6"/>
                 </a:solidFill>
@@ -4904,27 +4904,27 @@
         </p:nvSpPr>
         <p:spPr>
           <a:xfrm>
-            <a:off x="7424928" y="2020824"/>
-            <a:ext cx="1874520" cy="365760"/>
-          </a:xfrm>
-          <a:prstGeom prst="rect">
-            <a:avLst/>
-          </a:prstGeom>
-          <a:noFill/>
-        </p:spPr>
-        <p:txBody>
-          <a:bodyPr wrap="square" anchor="t" lIns="0" rIns="0" tIns="0" bIns="0">
-            <a:spAutoFit/>
-          </a:bodyPr>
-          <a:lstStyle/>
-          <a:p>
-            <a:pPr algn="l">
-              <a:lnSpc>
-                <a:spcPct val="115000"/>
-              </a:lnSpc>
-            </a:pPr>
-            <a:r>
-              <a:rPr sz="900" b="0">
+            <a:off x="6583680" y="1865376"/>
+            <a:ext cx="1508760" cy="329184"/>
+          </a:xfrm>
+          <a:prstGeom prst="rect">
+            <a:avLst/>
+          </a:prstGeom>
+          <a:noFill/>
+        </p:spPr>
+        <p:txBody>
+          <a:bodyPr wrap="square" anchor="t" lIns="0" rIns="0" tIns="0" bIns="0">
+            <a:spAutoFit/>
+          </a:bodyPr>
+          <a:lstStyle/>
+          <a:p>
+            <a:pPr algn="l">
+              <a:lnSpc>
+                <a:spcPct val="115000"/>
+              </a:lnSpc>
+            </a:pPr>
+            <a:r>
+              <a:rPr sz="800" b="0">
                 <a:solidFill>
                   <a:srgbClr val="6F6E67"/>
                 </a:solidFill>
@@ -4943,8 +4943,8 @@
         </p:nvSpPr>
         <p:spPr>
           <a:xfrm>
-            <a:off x="9464040" y="1691640"/>
-            <a:ext cx="2057400" cy="685800"/>
+            <a:off x="8229600" y="1554480"/>
+            <a:ext cx="1645920" cy="640080"/>
           </a:xfrm>
           <a:prstGeom prst="roundRect">
             <a:avLst>
@@ -4991,27 +4991,27 @@
         </p:nvSpPr>
         <p:spPr>
           <a:xfrm>
-            <a:off x="9573768" y="1764792"/>
-            <a:ext cx="1874520" cy="274320"/>
-          </a:xfrm>
-          <a:prstGeom prst="rect">
-            <a:avLst/>
-          </a:prstGeom>
-          <a:noFill/>
-        </p:spPr>
-        <p:txBody>
-          <a:bodyPr wrap="square" anchor="t" lIns="0" rIns="0" tIns="0" bIns="0">
-            <a:spAutoFit/>
-          </a:bodyPr>
-          <a:lstStyle/>
-          <a:p>
-            <a:pPr algn="l">
-              <a:lnSpc>
-                <a:spcPct val="115000"/>
-              </a:lnSpc>
-            </a:pPr>
-            <a:r>
-              <a:rPr sz="1300" b="1">
+            <a:off x="8321040" y="1609344"/>
+            <a:ext cx="1508760" cy="274320"/>
+          </a:xfrm>
+          <a:prstGeom prst="rect">
+            <a:avLst/>
+          </a:prstGeom>
+          <a:noFill/>
+        </p:spPr>
+        <p:txBody>
+          <a:bodyPr wrap="square" anchor="t" lIns="0" rIns="0" tIns="0" bIns="0">
+            <a:spAutoFit/>
+          </a:bodyPr>
+          <a:lstStyle/>
+          <a:p>
+            <a:pPr algn="l">
+              <a:lnSpc>
+                <a:spcPct val="115000"/>
+              </a:lnSpc>
+            </a:pPr>
+            <a:r>
+              <a:rPr sz="1200" b="1">
                 <a:solidFill>
                   <a:srgbClr val="ECECE6"/>
                 </a:solidFill>
@@ -5030,27 +5030,27 @@
         </p:nvSpPr>
         <p:spPr>
           <a:xfrm>
-            <a:off x="9573768" y="2020824"/>
-            <a:ext cx="1874520" cy="365760"/>
-          </a:xfrm>
-          <a:prstGeom prst="rect">
-            <a:avLst/>
-          </a:prstGeom>
-          <a:noFill/>
-        </p:spPr>
-        <p:txBody>
-          <a:bodyPr wrap="square" anchor="t" lIns="0" rIns="0" tIns="0" bIns="0">
-            <a:spAutoFit/>
-          </a:bodyPr>
-          <a:lstStyle/>
-          <a:p>
-            <a:pPr algn="l">
-              <a:lnSpc>
-                <a:spcPct val="115000"/>
-              </a:lnSpc>
-            </a:pPr>
-            <a:r>
-              <a:rPr sz="900" b="0">
+            <a:off x="8321040" y="1865376"/>
+            <a:ext cx="1508760" cy="329184"/>
+          </a:xfrm>
+          <a:prstGeom prst="rect">
+            <a:avLst/>
+          </a:prstGeom>
+          <a:noFill/>
+        </p:spPr>
+        <p:txBody>
+          <a:bodyPr wrap="square" anchor="t" lIns="0" rIns="0" tIns="0" bIns="0">
+            <a:spAutoFit/>
+          </a:bodyPr>
+          <a:lstStyle/>
+          <a:p>
+            <a:pPr algn="l">
+              <a:lnSpc>
+                <a:spcPct val="115000"/>
+              </a:lnSpc>
+            </a:pPr>
+            <a:r>
+              <a:rPr sz="800" b="0">
                 <a:solidFill>
                   <a:srgbClr val="6F6E67"/>
                 </a:solidFill>
@@ -5069,8 +5069,8 @@
         </p:nvSpPr>
         <p:spPr>
           <a:xfrm>
-            <a:off x="640080" y="2514600"/>
-            <a:ext cx="2286000" cy="777240"/>
+            <a:off x="9966960" y="1554480"/>
+            <a:ext cx="1645920" cy="640080"/>
           </a:xfrm>
           <a:prstGeom prst="roundRect">
             <a:avLst>
@@ -5117,72 +5117,72 @@
         </p:nvSpPr>
         <p:spPr>
           <a:xfrm>
-            <a:off x="777240" y="2606040"/>
-            <a:ext cx="2103120" cy="274320"/>
-          </a:xfrm>
-          <a:prstGeom prst="rect">
-            <a:avLst/>
-          </a:prstGeom>
-          <a:noFill/>
-        </p:spPr>
-        <p:txBody>
-          <a:bodyPr wrap="square" anchor="t" lIns="0" rIns="0" tIns="0" bIns="0">
-            <a:spAutoFit/>
-          </a:bodyPr>
-          <a:lstStyle/>
-          <a:p>
-            <a:pPr algn="l">
-              <a:lnSpc>
-                <a:spcPct val="115000"/>
-              </a:lnSpc>
-            </a:pPr>
-            <a:r>
-              <a:rPr sz="1300" b="1">
+            <a:off x="10058400" y="1609344"/>
+            <a:ext cx="1508760" cy="274320"/>
+          </a:xfrm>
+          <a:prstGeom prst="rect">
+            <a:avLst/>
+          </a:prstGeom>
+          <a:noFill/>
+        </p:spPr>
+        <p:txBody>
+          <a:bodyPr wrap="square" anchor="t" lIns="0" rIns="0" tIns="0" bIns="0">
+            <a:spAutoFit/>
+          </a:bodyPr>
+          <a:lstStyle/>
+          <a:p>
+            <a:pPr algn="l">
+              <a:lnSpc>
+                <a:spcPct val="115000"/>
+              </a:lnSpc>
+            </a:pPr>
+            <a:r>
+              <a:rPr sz="1200" b="1">
                 <a:solidFill>
                   <a:srgbClr val="ECECE6"/>
                 </a:solidFill>
+                <a:latin typeface="PingFang SC"/>
+              </a:rPr>
+              <a:t>GateMate</a:t>
+            </a:r>
+          </a:p>
+        </p:txBody>
+      </p:sp>
+      <p:sp>
+        <p:nvSpPr>
+          <p:cNvPr id="20" name="TextBox 19"/>
+          <p:cNvSpPr txBox="1"/>
+          <p:nvPr/>
+        </p:nvSpPr>
+        <p:spPr>
+          <a:xfrm>
+            <a:off x="10058400" y="1865376"/>
+            <a:ext cx="1508760" cy="329184"/>
+          </a:xfrm>
+          <a:prstGeom prst="rect">
+            <a:avLst/>
+          </a:prstGeom>
+          <a:noFill/>
+        </p:spPr>
+        <p:txBody>
+          <a:bodyPr wrap="square" anchor="t" lIns="0" rIns="0" tIns="0" bIns="0">
+            <a:spAutoFit/>
+          </a:bodyPr>
+          <a:lstStyle/>
+          <a:p>
+            <a:pPr algn="l">
+              <a:lnSpc>
+                <a:spcPct val="115000"/>
+              </a:lnSpc>
+            </a:pPr>
+            <a:r>
+              <a:rPr sz="800" b="0">
+                <a:solidFill>
+                  <a:srgbClr val="6F6E67"/>
+                </a:solidFill>
                 <a:latin typeface="Menlo"/>
               </a:rPr>
-              <a:t>matmul</a:t>
-            </a:r>
-          </a:p>
-        </p:txBody>
-      </p:sp>
-      <p:sp>
-        <p:nvSpPr>
-          <p:cNvPr id="20" name="TextBox 19"/>
-          <p:cNvSpPr txBox="1"/>
-          <p:nvPr/>
-        </p:nvSpPr>
-        <p:spPr>
-          <a:xfrm>
-            <a:off x="777240" y="2880360"/>
-            <a:ext cx="2103120" cy="411480"/>
-          </a:xfrm>
-          <a:prstGeom prst="rect">
-            <a:avLst/>
-          </a:prstGeom>
-          <a:noFill/>
-        </p:spPr>
-        <p:txBody>
-          <a:bodyPr wrap="square" anchor="t" lIns="0" rIns="0" tIns="0" bIns="0">
-            <a:spAutoFit/>
-          </a:bodyPr>
-          <a:lstStyle/>
-          <a:p>
-            <a:pPr algn="l">
-              <a:lnSpc>
-                <a:spcPct val="115000"/>
-              </a:lnSpc>
-            </a:pPr>
-            <a:r>
-              <a:rPr sz="950" b="0">
-                <a:solidFill>
-                  <a:srgbClr val="6F6E67"/>
-                </a:solidFill>
-                <a:latin typeface="PingFang SC"/>
-              </a:rPr>
-              <a:t>output-stationary systolic INT 阵列</a:t>
+              <a:t>CCGM1A1 · himbächel · 2–4 min</a:t>
             </a:r>
           </a:p>
         </p:txBody>
@@ -5195,8 +5195,134 @@
         </p:nvSpPr>
         <p:spPr>
           <a:xfrm>
-            <a:off x="3017520" y="2514600"/>
-            <a:ext cx="2057400" cy="777240"/>
+            <a:off x="640080" y="2304288"/>
+            <a:ext cx="2286000" cy="530352"/>
+          </a:xfrm>
+          <a:prstGeom prst="roundRect">
+            <a:avLst>
+              <a:gd name="adj" fmla="val 6000"/>
+            </a:avLst>
+          </a:prstGeom>
+          <a:solidFill>
+            <a:srgbClr val="1C1C1B"/>
+          </a:solidFill>
+          <a:ln w="9525">
+            <a:solidFill>
+              <a:srgbClr val="333331"/>
+            </a:solidFill>
+          </a:ln>
+          <a:effectLst/>
+        </p:spPr>
+        <p:style>
+          <a:lnRef idx="1">
+            <a:schemeClr val="accent1"/>
+          </a:lnRef>
+          <a:fillRef idx="3">
+            <a:schemeClr val="accent1"/>
+          </a:fillRef>
+          <a:effectRef idx="2">
+            <a:schemeClr val="accent1"/>
+          </a:effectRef>
+          <a:fontRef idx="minor">
+            <a:schemeClr val="lt1"/>
+          </a:fontRef>
+        </p:style>
+        <p:txBody>
+          <a:bodyPr rtlCol="0" anchor="ctr" lIns="0" rIns="0"/>
+          <a:lstStyle/>
+          <a:p>
+            <a:pPr algn="ctr"/>
+          </a:p>
+        </p:txBody>
+      </p:sp>
+      <p:sp>
+        <p:nvSpPr>
+          <p:cNvPr id="22" name="TextBox 21"/>
+          <p:cNvSpPr txBox="1"/>
+          <p:nvPr/>
+        </p:nvSpPr>
+        <p:spPr>
+          <a:xfrm>
+            <a:off x="777240" y="2350008"/>
+            <a:ext cx="2103120" cy="274320"/>
+          </a:xfrm>
+          <a:prstGeom prst="rect">
+            <a:avLst/>
+          </a:prstGeom>
+          <a:noFill/>
+        </p:spPr>
+        <p:txBody>
+          <a:bodyPr wrap="square" anchor="t" lIns="0" rIns="0" tIns="0" bIns="0">
+            <a:spAutoFit/>
+          </a:bodyPr>
+          <a:lstStyle/>
+          <a:p>
+            <a:pPr algn="l">
+              <a:lnSpc>
+                <a:spcPct val="115000"/>
+              </a:lnSpc>
+            </a:pPr>
+            <a:r>
+              <a:rPr sz="1200" b="1">
+                <a:solidFill>
+                  <a:srgbClr val="ECECE6"/>
+                </a:solidFill>
+                <a:latin typeface="Menlo"/>
+              </a:rPr>
+              <a:t>matmul</a:t>
+            </a:r>
+          </a:p>
+        </p:txBody>
+      </p:sp>
+      <p:sp>
+        <p:nvSpPr>
+          <p:cNvPr id="23" name="TextBox 22"/>
+          <p:cNvSpPr txBox="1"/>
+          <p:nvPr/>
+        </p:nvSpPr>
+        <p:spPr>
+          <a:xfrm>
+            <a:off x="777240" y="2596896"/>
+            <a:ext cx="2103120" cy="320040"/>
+          </a:xfrm>
+          <a:prstGeom prst="rect">
+            <a:avLst/>
+          </a:prstGeom>
+          <a:noFill/>
+        </p:spPr>
+        <p:txBody>
+          <a:bodyPr wrap="square" anchor="t" lIns="0" rIns="0" tIns="0" bIns="0">
+            <a:spAutoFit/>
+          </a:bodyPr>
+          <a:lstStyle/>
+          <a:p>
+            <a:pPr algn="l">
+              <a:lnSpc>
+                <a:spcPct val="115000"/>
+              </a:lnSpc>
+            </a:pPr>
+            <a:r>
+              <a:rPr sz="850" b="0">
+                <a:solidFill>
+                  <a:srgbClr val="6F6E67"/>
+                </a:solidFill>
+                <a:latin typeface="PingFang SC"/>
+              </a:rPr>
+              <a:t>output-stationary systolic INT 阵列</a:t>
+            </a:r>
+          </a:p>
+        </p:txBody>
+      </p:sp>
+      <p:sp>
+        <p:nvSpPr>
+          <p:cNvPr id="24" name="Rounded Rectangle 23"/>
+          <p:cNvSpPr/>
+          <p:nvPr/>
+        </p:nvSpPr>
+        <p:spPr>
+          <a:xfrm>
+            <a:off x="3017520" y="2304288"/>
+            <a:ext cx="1645920" cy="530352"/>
           </a:xfrm>
           <a:prstGeom prst="roundRect">
             <a:avLst>
@@ -5237,33 +5363,33 @@
       </p:sp>
       <p:sp>
         <p:nvSpPr>
-          <p:cNvPr id="22" name="TextBox 21"/>
-          <p:cNvSpPr txBox="1"/>
-          <p:nvPr/>
-        </p:nvSpPr>
-        <p:spPr>
-          <a:xfrm>
-            <a:off x="3127248" y="2770632"/>
-            <a:ext cx="1874520" cy="365760"/>
-          </a:xfrm>
-          <a:prstGeom prst="rect">
-            <a:avLst/>
-          </a:prstGeom>
-          <a:noFill/>
-        </p:spPr>
-        <p:txBody>
-          <a:bodyPr wrap="square" anchor="t" lIns="0" rIns="0" tIns="0" bIns="0">
-            <a:spAutoFit/>
-          </a:bodyPr>
-          <a:lstStyle/>
-          <a:p>
-            <a:pPr algn="l">
-              <a:lnSpc>
-                <a:spcPct val="115000"/>
-              </a:lnSpc>
-            </a:pPr>
-            <a:r>
-              <a:rPr sz="1050" b="0">
+          <p:cNvPr id="25" name="TextBox 24"/>
+          <p:cNvSpPr txBox="1"/>
+          <p:nvPr/>
+        </p:nvSpPr>
+        <p:spPr>
+          <a:xfrm>
+            <a:off x="3108960" y="2441448"/>
+            <a:ext cx="1508760" cy="320040"/>
+          </a:xfrm>
+          <a:prstGeom prst="rect">
+            <a:avLst/>
+          </a:prstGeom>
+          <a:noFill/>
+        </p:spPr>
+        <p:txBody>
+          <a:bodyPr wrap="square" anchor="t" lIns="0" rIns="0" tIns="0" bIns="0">
+            <a:spAutoFit/>
+          </a:bodyPr>
+          <a:lstStyle/>
+          <a:p>
+            <a:pPr algn="l">
+              <a:lnSpc>
+                <a:spcPct val="115000"/>
+              </a:lnSpc>
+            </a:pPr>
+            <a:r>
+              <a:rPr sz="950" b="0">
                 <a:solidFill>
                   <a:srgbClr val="34C759"/>
                 </a:solidFill>
@@ -5276,14 +5402,14 @@
       </p:sp>
       <p:sp>
         <p:nvSpPr>
-          <p:cNvPr id="23" name="Rounded Rectangle 22"/>
+          <p:cNvPr id="26" name="Rounded Rectangle 25"/>
           <p:cNvSpPr/>
           <p:nvPr/>
         </p:nvSpPr>
         <p:spPr>
           <a:xfrm>
-            <a:off x="5166360" y="2514600"/>
-            <a:ext cx="2057400" cy="777240"/>
+            <a:off x="4754880" y="2304288"/>
+            <a:ext cx="1645920" cy="530352"/>
           </a:xfrm>
           <a:prstGeom prst="roundRect">
             <a:avLst>
@@ -5324,33 +5450,33 @@
       </p:sp>
       <p:sp>
         <p:nvSpPr>
-          <p:cNvPr id="24" name="TextBox 23"/>
-          <p:cNvSpPr txBox="1"/>
-          <p:nvPr/>
-        </p:nvSpPr>
-        <p:spPr>
-          <a:xfrm>
-            <a:off x="5276088" y="2770632"/>
-            <a:ext cx="1874520" cy="365760"/>
-          </a:xfrm>
-          <a:prstGeom prst="rect">
-            <a:avLst/>
-          </a:prstGeom>
-          <a:noFill/>
-        </p:spPr>
-        <p:txBody>
-          <a:bodyPr wrap="square" anchor="t" lIns="0" rIns="0" tIns="0" bIns="0">
-            <a:spAutoFit/>
-          </a:bodyPr>
-          <a:lstStyle/>
-          <a:p>
-            <a:pPr algn="l">
-              <a:lnSpc>
-                <a:spcPct val="115000"/>
-              </a:lnSpc>
-            </a:pPr>
-            <a:r>
-              <a:rPr sz="1050" b="0">
+          <p:cNvPr id="27" name="TextBox 26"/>
+          <p:cNvSpPr txBox="1"/>
+          <p:nvPr/>
+        </p:nvSpPr>
+        <p:spPr>
+          <a:xfrm>
+            <a:off x="4846320" y="2441448"/>
+            <a:ext cx="1508760" cy="320040"/>
+          </a:xfrm>
+          <a:prstGeom prst="rect">
+            <a:avLst/>
+          </a:prstGeom>
+          <a:noFill/>
+        </p:spPr>
+        <p:txBody>
+          <a:bodyPr wrap="square" anchor="t" lIns="0" rIns="0" tIns="0" bIns="0">
+            <a:spAutoFit/>
+          </a:bodyPr>
+          <a:lstStyle/>
+          <a:p>
+            <a:pPr algn="l">
+              <a:lnSpc>
+                <a:spcPct val="115000"/>
+              </a:lnSpc>
+            </a:pPr>
+            <a:r>
+              <a:rPr sz="950" b="0">
                 <a:solidFill>
                   <a:srgbClr val="34C759"/>
                 </a:solidFill>
@@ -5363,14 +5489,14 @@
       </p:sp>
       <p:sp>
         <p:nvSpPr>
-          <p:cNvPr id="25" name="Rounded Rectangle 24"/>
+          <p:cNvPr id="28" name="Rounded Rectangle 27"/>
           <p:cNvSpPr/>
           <p:nvPr/>
         </p:nvSpPr>
         <p:spPr>
           <a:xfrm>
-            <a:off x="7315200" y="2514600"/>
-            <a:ext cx="2057400" cy="777240"/>
+            <a:off x="6492240" y="2304288"/>
+            <a:ext cx="1645920" cy="530352"/>
           </a:xfrm>
           <a:prstGeom prst="roundRect">
             <a:avLst>
@@ -5411,33 +5537,33 @@
       </p:sp>
       <p:sp>
         <p:nvSpPr>
-          <p:cNvPr id="26" name="TextBox 25"/>
-          <p:cNvSpPr txBox="1"/>
-          <p:nvPr/>
-        </p:nvSpPr>
-        <p:spPr>
-          <a:xfrm>
-            <a:off x="7424928" y="2770632"/>
-            <a:ext cx="1874520" cy="365760"/>
-          </a:xfrm>
-          <a:prstGeom prst="rect">
-            <a:avLst/>
-          </a:prstGeom>
-          <a:noFill/>
-        </p:spPr>
-        <p:txBody>
-          <a:bodyPr wrap="square" anchor="t" lIns="0" rIns="0" tIns="0" bIns="0">
-            <a:spAutoFit/>
-          </a:bodyPr>
-          <a:lstStyle/>
-          <a:p>
-            <a:pPr algn="l">
-              <a:lnSpc>
-                <a:spcPct val="115000"/>
-              </a:lnSpc>
-            </a:pPr>
-            <a:r>
-              <a:rPr sz="1050" b="0">
+          <p:cNvPr id="29" name="TextBox 28"/>
+          <p:cNvSpPr txBox="1"/>
+          <p:nvPr/>
+        </p:nvSpPr>
+        <p:spPr>
+          <a:xfrm>
+            <a:off x="6583680" y="2441448"/>
+            <a:ext cx="1508760" cy="320040"/>
+          </a:xfrm>
+          <a:prstGeom prst="rect">
+            <a:avLst/>
+          </a:prstGeom>
+          <a:noFill/>
+        </p:spPr>
+        <p:txBody>
+          <a:bodyPr wrap="square" anchor="t" lIns="0" rIns="0" tIns="0" bIns="0">
+            <a:spAutoFit/>
+          </a:bodyPr>
+          <a:lstStyle/>
+          <a:p>
+            <a:pPr algn="l">
+              <a:lnSpc>
+                <a:spcPct val="115000"/>
+              </a:lnSpc>
+            </a:pPr>
+            <a:r>
+              <a:rPr sz="950" b="0">
                 <a:solidFill>
                   <a:srgbClr val="34C759"/>
                 </a:solidFill>
@@ -5450,14 +5576,14 @@
       </p:sp>
       <p:sp>
         <p:nvSpPr>
-          <p:cNvPr id="27" name="Rounded Rectangle 26"/>
+          <p:cNvPr id="30" name="Rounded Rectangle 29"/>
           <p:cNvSpPr/>
           <p:nvPr/>
         </p:nvSpPr>
         <p:spPr>
           <a:xfrm>
-            <a:off x="9464040" y="2514600"/>
-            <a:ext cx="2057400" cy="777240"/>
+            <a:off x="8229600" y="2304288"/>
+            <a:ext cx="1645920" cy="530352"/>
           </a:xfrm>
           <a:prstGeom prst="roundRect">
             <a:avLst>
@@ -5498,33 +5624,33 @@
       </p:sp>
       <p:sp>
         <p:nvSpPr>
-          <p:cNvPr id="28" name="TextBox 27"/>
-          <p:cNvSpPr txBox="1"/>
-          <p:nvPr/>
-        </p:nvSpPr>
-        <p:spPr>
-          <a:xfrm>
-            <a:off x="9573768" y="2770632"/>
-            <a:ext cx="1874520" cy="365760"/>
-          </a:xfrm>
-          <a:prstGeom prst="rect">
-            <a:avLst/>
-          </a:prstGeom>
-          <a:noFill/>
-        </p:spPr>
-        <p:txBody>
-          <a:bodyPr wrap="square" anchor="t" lIns="0" rIns="0" tIns="0" bIns="0">
-            <a:spAutoFit/>
-          </a:bodyPr>
-          <a:lstStyle/>
-          <a:p>
-            <a:pPr algn="l">
-              <a:lnSpc>
-                <a:spcPct val="115000"/>
-              </a:lnSpc>
-            </a:pPr>
-            <a:r>
-              <a:rPr sz="1050" b="0">
+          <p:cNvPr id="31" name="TextBox 30"/>
+          <p:cNvSpPr txBox="1"/>
+          <p:nvPr/>
+        </p:nvSpPr>
+        <p:spPr>
+          <a:xfrm>
+            <a:off x="8321040" y="2441448"/>
+            <a:ext cx="1508760" cy="320040"/>
+          </a:xfrm>
+          <a:prstGeom prst="rect">
+            <a:avLst/>
+          </a:prstGeom>
+          <a:noFill/>
+        </p:spPr>
+        <p:txBody>
+          <a:bodyPr wrap="square" anchor="t" lIns="0" rIns="0" tIns="0" bIns="0">
+            <a:spAutoFit/>
+          </a:bodyPr>
+          <a:lstStyle/>
+          <a:p>
+            <a:pPr algn="l">
+              <a:lnSpc>
+                <a:spcPct val="115000"/>
+              </a:lnSpc>
+            </a:pPr>
+            <a:r>
+              <a:rPr sz="950" b="0">
                 <a:solidFill>
                   <a:srgbClr val="34C759"/>
                 </a:solidFill>
@@ -5537,14 +5663,101 @@
       </p:sp>
       <p:sp>
         <p:nvSpPr>
-          <p:cNvPr id="29" name="Rounded Rectangle 28"/>
+          <p:cNvPr id="32" name="Rounded Rectangle 31"/>
           <p:cNvSpPr/>
           <p:nvPr/>
         </p:nvSpPr>
         <p:spPr>
           <a:xfrm>
-            <a:off x="640080" y="3383280"/>
-            <a:ext cx="2286000" cy="777240"/>
+            <a:off x="9966960" y="2304288"/>
+            <a:ext cx="1645920" cy="530352"/>
+          </a:xfrm>
+          <a:prstGeom prst="roundRect">
+            <a:avLst>
+              <a:gd name="adj" fmla="val 6000"/>
+            </a:avLst>
+          </a:prstGeom>
+          <a:solidFill>
+            <a:srgbClr val="0E0E0D"/>
+          </a:solidFill>
+          <a:ln w="9525">
+            <a:solidFill>
+              <a:srgbClr val="333331"/>
+            </a:solidFill>
+          </a:ln>
+          <a:effectLst/>
+        </p:spPr>
+        <p:style>
+          <a:lnRef idx="1">
+            <a:schemeClr val="accent1"/>
+          </a:lnRef>
+          <a:fillRef idx="3">
+            <a:schemeClr val="accent1"/>
+          </a:fillRef>
+          <a:effectRef idx="2">
+            <a:schemeClr val="accent1"/>
+          </a:effectRef>
+          <a:fontRef idx="minor">
+            <a:schemeClr val="lt1"/>
+          </a:fontRef>
+        </p:style>
+        <p:txBody>
+          <a:bodyPr rtlCol="0" anchor="ctr" lIns="0" rIns="0"/>
+          <a:lstStyle/>
+          <a:p>
+            <a:pPr algn="ctr"/>
+          </a:p>
+        </p:txBody>
+      </p:sp>
+      <p:sp>
+        <p:nvSpPr>
+          <p:cNvPr id="33" name="TextBox 32"/>
+          <p:cNvSpPr txBox="1"/>
+          <p:nvPr/>
+        </p:nvSpPr>
+        <p:spPr>
+          <a:xfrm>
+            <a:off x="10058400" y="2441448"/>
+            <a:ext cx="1508760" cy="320040"/>
+          </a:xfrm>
+          <a:prstGeom prst="rect">
+            <a:avLst/>
+          </a:prstGeom>
+          <a:noFill/>
+        </p:spPr>
+        <p:txBody>
+          <a:bodyPr wrap="square" anchor="t" lIns="0" rIns="0" tIns="0" bIns="0">
+            <a:spAutoFit/>
+          </a:bodyPr>
+          <a:lstStyle/>
+          <a:p>
+            <a:pPr algn="l">
+              <a:lnSpc>
+                <a:spcPct val="115000"/>
+              </a:lnSpc>
+            </a:pPr>
+            <a:r>
+              <a:rPr sz="950" b="0">
+                <a:solidFill>
+                  <a:srgbClr val="6F6E67"/>
+                </a:solidFill>
+                <a:latin typeface="PingFang SC"/>
+              </a:rPr>
+              <a:t>○ 未跑</a:t>
+            </a:r>
+          </a:p>
+        </p:txBody>
+      </p:sp>
+      <p:sp>
+        <p:nvSpPr>
+          <p:cNvPr id="34" name="Rounded Rectangle 33"/>
+          <p:cNvSpPr/>
+          <p:nvPr/>
+        </p:nvSpPr>
+        <p:spPr>
+          <a:xfrm>
+            <a:off x="640080" y="2907792"/>
+            <a:ext cx="2286000" cy="530352"/>
           </a:xfrm>
           <a:prstGeom prst="roundRect">
             <a:avLst>
@@ -5585,13 +5798,13 @@
       </p:sp>
       <p:sp>
         <p:nvSpPr>
-          <p:cNvPr id="30" name="TextBox 29"/>
-          <p:cNvSpPr txBox="1"/>
-          <p:nvPr/>
-        </p:nvSpPr>
-        <p:spPr>
-          <a:xfrm>
-            <a:off x="777240" y="3474720"/>
+          <p:cNvPr id="35" name="TextBox 34"/>
+          <p:cNvSpPr txBox="1"/>
+          <p:nvPr/>
+        </p:nvSpPr>
+        <p:spPr>
+          <a:xfrm>
+            <a:off x="777240" y="2953512"/>
             <a:ext cx="2103120" cy="274320"/>
           </a:xfrm>
           <a:prstGeom prst="rect">
@@ -5611,7 +5824,7 @@
               </a:lnSpc>
             </a:pPr>
             <a:r>
-              <a:rPr sz="1300" b="1">
+              <a:rPr sz="1200" b="1">
                 <a:solidFill>
                   <a:srgbClr val="ECECE6"/>
                 </a:solidFill>
@@ -5624,53 +5837,53 @@
       </p:sp>
       <p:sp>
         <p:nvSpPr>
-          <p:cNvPr id="31" name="TextBox 30"/>
-          <p:cNvSpPr txBox="1"/>
-          <p:nvPr/>
-        </p:nvSpPr>
-        <p:spPr>
-          <a:xfrm>
-            <a:off x="777240" y="3749040"/>
-            <a:ext cx="2103120" cy="411480"/>
-          </a:xfrm>
-          <a:prstGeom prst="rect">
-            <a:avLst/>
-          </a:prstGeom>
-          <a:noFill/>
-        </p:spPr>
-        <p:txBody>
-          <a:bodyPr wrap="square" anchor="t" lIns="0" rIns="0" tIns="0" bIns="0">
-            <a:spAutoFit/>
-          </a:bodyPr>
-          <a:lstStyle/>
-          <a:p>
-            <a:pPr algn="l">
-              <a:lnSpc>
-                <a:spcPct val="115000"/>
-              </a:lnSpc>
-            </a:pPr>
-            <a:r>
-              <a:rPr sz="950" b="0">
+          <p:cNvPr id="36" name="TextBox 35"/>
+          <p:cNvSpPr txBox="1"/>
+          <p:nvPr/>
+        </p:nvSpPr>
+        <p:spPr>
+          <a:xfrm>
+            <a:off x="777240" y="3200400"/>
+            <a:ext cx="2103120" cy="320040"/>
+          </a:xfrm>
+          <a:prstGeom prst="rect">
+            <a:avLst/>
+          </a:prstGeom>
+          <a:noFill/>
+        </p:spPr>
+        <p:txBody>
+          <a:bodyPr wrap="square" anchor="t" lIns="0" rIns="0" tIns="0" bIns="0">
+            <a:spAutoFit/>
+          </a:bodyPr>
+          <a:lstStyle/>
+          <a:p>
+            <a:pPr algn="l">
+              <a:lnSpc>
+                <a:spcPct val="115000"/>
+              </a:lnSpc>
+            </a:pPr>
+            <a:r>
+              <a:rPr sz="850" b="0">
                 <a:solidFill>
                   <a:srgbClr val="6F6E67"/>
                 </a:solidFill>
                 <a:latin typeface="PingFang SC"/>
               </a:rPr>
-              <a:t>定系数 FIR：转置 / 折叠 / 对称共享</a:t>
-            </a:r>
-          </a:p>
-        </p:txBody>
-      </p:sp>
-      <p:sp>
-        <p:nvSpPr>
-          <p:cNvPr id="32" name="Rounded Rectangle 31"/>
+              <a:t>定系数 / 运行时系数 FIR：转置 / 折叠 / 对称</a:t>
+            </a:r>
+          </a:p>
+        </p:txBody>
+      </p:sp>
+      <p:sp>
+        <p:nvSpPr>
+          <p:cNvPr id="37" name="Rounded Rectangle 36"/>
           <p:cNvSpPr/>
           <p:nvPr/>
         </p:nvSpPr>
         <p:spPr>
           <a:xfrm>
-            <a:off x="3017520" y="3383280"/>
-            <a:ext cx="2057400" cy="777240"/>
+            <a:off x="3017520" y="2907792"/>
+            <a:ext cx="1645920" cy="530352"/>
           </a:xfrm>
           <a:prstGeom prst="roundRect">
             <a:avLst>
@@ -5711,33 +5924,33 @@
       </p:sp>
       <p:sp>
         <p:nvSpPr>
-          <p:cNvPr id="33" name="TextBox 32"/>
-          <p:cNvSpPr txBox="1"/>
-          <p:nvPr/>
-        </p:nvSpPr>
-        <p:spPr>
-          <a:xfrm>
-            <a:off x="3127248" y="3639312"/>
-            <a:ext cx="1874520" cy="365760"/>
-          </a:xfrm>
-          <a:prstGeom prst="rect">
-            <a:avLst/>
-          </a:prstGeom>
-          <a:noFill/>
-        </p:spPr>
-        <p:txBody>
-          <a:bodyPr wrap="square" anchor="t" lIns="0" rIns="0" tIns="0" bIns="0">
-            <a:spAutoFit/>
-          </a:bodyPr>
-          <a:lstStyle/>
-          <a:p>
-            <a:pPr algn="l">
-              <a:lnSpc>
-                <a:spcPct val="115000"/>
-              </a:lnSpc>
-            </a:pPr>
-            <a:r>
-              <a:rPr sz="1050" b="0">
+          <p:cNvPr id="38" name="TextBox 37"/>
+          <p:cNvSpPr txBox="1"/>
+          <p:nvPr/>
+        </p:nvSpPr>
+        <p:spPr>
+          <a:xfrm>
+            <a:off x="3108960" y="3044952"/>
+            <a:ext cx="1508760" cy="320040"/>
+          </a:xfrm>
+          <a:prstGeom prst="rect">
+            <a:avLst/>
+          </a:prstGeom>
+          <a:noFill/>
+        </p:spPr>
+        <p:txBody>
+          <a:bodyPr wrap="square" anchor="t" lIns="0" rIns="0" tIns="0" bIns="0">
+            <a:spAutoFit/>
+          </a:bodyPr>
+          <a:lstStyle/>
+          <a:p>
+            <a:pPr algn="l">
+              <a:lnSpc>
+                <a:spcPct val="115000"/>
+              </a:lnSpc>
+            </a:pPr>
+            <a:r>
+              <a:rPr sz="950" b="0">
                 <a:solidFill>
                   <a:srgbClr val="34C759"/>
                 </a:solidFill>
@@ -5750,14 +5963,14 @@
       </p:sp>
       <p:sp>
         <p:nvSpPr>
-          <p:cNvPr id="34" name="Rounded Rectangle 33"/>
+          <p:cNvPr id="39" name="Rounded Rectangle 38"/>
           <p:cNvSpPr/>
           <p:nvPr/>
         </p:nvSpPr>
         <p:spPr>
           <a:xfrm>
-            <a:off x="5166360" y="3383280"/>
-            <a:ext cx="2057400" cy="777240"/>
+            <a:off x="4754880" y="2907792"/>
+            <a:ext cx="1645920" cy="530352"/>
           </a:xfrm>
           <a:prstGeom prst="roundRect">
             <a:avLst>
@@ -5798,33 +6011,33 @@
       </p:sp>
       <p:sp>
         <p:nvSpPr>
-          <p:cNvPr id="35" name="TextBox 34"/>
-          <p:cNvSpPr txBox="1"/>
-          <p:nvPr/>
-        </p:nvSpPr>
-        <p:spPr>
-          <a:xfrm>
-            <a:off x="5276088" y="3639312"/>
-            <a:ext cx="1874520" cy="365760"/>
-          </a:xfrm>
-          <a:prstGeom prst="rect">
-            <a:avLst/>
-          </a:prstGeom>
-          <a:noFill/>
-        </p:spPr>
-        <p:txBody>
-          <a:bodyPr wrap="square" anchor="t" lIns="0" rIns="0" tIns="0" bIns="0">
-            <a:spAutoFit/>
-          </a:bodyPr>
-          <a:lstStyle/>
-          <a:p>
-            <a:pPr algn="l">
-              <a:lnSpc>
-                <a:spcPct val="115000"/>
-              </a:lnSpc>
-            </a:pPr>
-            <a:r>
-              <a:rPr sz="1050" b="0">
+          <p:cNvPr id="40" name="TextBox 39"/>
+          <p:cNvSpPr txBox="1"/>
+          <p:nvPr/>
+        </p:nvSpPr>
+        <p:spPr>
+          <a:xfrm>
+            <a:off x="4846320" y="3044952"/>
+            <a:ext cx="1508760" cy="320040"/>
+          </a:xfrm>
+          <a:prstGeom prst="rect">
+            <a:avLst/>
+          </a:prstGeom>
+          <a:noFill/>
+        </p:spPr>
+        <p:txBody>
+          <a:bodyPr wrap="square" anchor="t" lIns="0" rIns="0" tIns="0" bIns="0">
+            <a:spAutoFit/>
+          </a:bodyPr>
+          <a:lstStyle/>
+          <a:p>
+            <a:pPr algn="l">
+              <a:lnSpc>
+                <a:spcPct val="115000"/>
+              </a:lnSpc>
+            </a:pPr>
+            <a:r>
+              <a:rPr sz="950" b="0">
                 <a:solidFill>
                   <a:srgbClr val="34C759"/>
                 </a:solidFill>
@@ -5837,14 +6050,14 @@
       </p:sp>
       <p:sp>
         <p:nvSpPr>
-          <p:cNvPr id="36" name="Rounded Rectangle 35"/>
+          <p:cNvPr id="41" name="Rounded Rectangle 40"/>
           <p:cNvSpPr/>
           <p:nvPr/>
         </p:nvSpPr>
         <p:spPr>
           <a:xfrm>
-            <a:off x="7315200" y="3383280"/>
-            <a:ext cx="2057400" cy="777240"/>
+            <a:off x="6492240" y="2907792"/>
+            <a:ext cx="1645920" cy="530352"/>
           </a:xfrm>
           <a:prstGeom prst="roundRect">
             <a:avLst>
@@ -5885,33 +6098,33 @@
       </p:sp>
       <p:sp>
         <p:nvSpPr>
-          <p:cNvPr id="37" name="TextBox 36"/>
-          <p:cNvSpPr txBox="1"/>
-          <p:nvPr/>
-        </p:nvSpPr>
-        <p:spPr>
-          <a:xfrm>
-            <a:off x="7424928" y="3639312"/>
-            <a:ext cx="1874520" cy="365760"/>
-          </a:xfrm>
-          <a:prstGeom prst="rect">
-            <a:avLst/>
-          </a:prstGeom>
-          <a:noFill/>
-        </p:spPr>
-        <p:txBody>
-          <a:bodyPr wrap="square" anchor="t" lIns="0" rIns="0" tIns="0" bIns="0">
-            <a:spAutoFit/>
-          </a:bodyPr>
-          <a:lstStyle/>
-          <a:p>
-            <a:pPr algn="l">
-              <a:lnSpc>
-                <a:spcPct val="115000"/>
-              </a:lnSpc>
-            </a:pPr>
-            <a:r>
-              <a:rPr sz="1050" b="0">
+          <p:cNvPr id="42" name="TextBox 41"/>
+          <p:cNvSpPr txBox="1"/>
+          <p:nvPr/>
+        </p:nvSpPr>
+        <p:spPr>
+          <a:xfrm>
+            <a:off x="6583680" y="3044952"/>
+            <a:ext cx="1508760" cy="320040"/>
+          </a:xfrm>
+          <a:prstGeom prst="rect">
+            <a:avLst/>
+          </a:prstGeom>
+          <a:noFill/>
+        </p:spPr>
+        <p:txBody>
+          <a:bodyPr wrap="square" anchor="t" lIns="0" rIns="0" tIns="0" bIns="0">
+            <a:spAutoFit/>
+          </a:bodyPr>
+          <a:lstStyle/>
+          <a:p>
+            <a:pPr algn="l">
+              <a:lnSpc>
+                <a:spcPct val="115000"/>
+              </a:lnSpc>
+            </a:pPr>
+            <a:r>
+              <a:rPr sz="950" b="0">
                 <a:solidFill>
                   <a:srgbClr val="4A90E2"/>
                 </a:solidFill>
@@ -5924,14 +6137,14 @@
       </p:sp>
       <p:sp>
         <p:nvSpPr>
-          <p:cNvPr id="38" name="Rounded Rectangle 37"/>
+          <p:cNvPr id="43" name="Rounded Rectangle 42"/>
           <p:cNvSpPr/>
           <p:nvPr/>
         </p:nvSpPr>
         <p:spPr>
           <a:xfrm>
-            <a:off x="9464040" y="3383280"/>
-            <a:ext cx="2057400" cy="777240"/>
+            <a:off x="8229600" y="2907792"/>
+            <a:ext cx="1645920" cy="530352"/>
           </a:xfrm>
           <a:prstGeom prst="roundRect">
             <a:avLst>
@@ -5972,33 +6185,33 @@
       </p:sp>
       <p:sp>
         <p:nvSpPr>
-          <p:cNvPr id="39" name="TextBox 38"/>
-          <p:cNvSpPr txBox="1"/>
-          <p:nvPr/>
-        </p:nvSpPr>
-        <p:spPr>
-          <a:xfrm>
-            <a:off x="9573768" y="3639312"/>
-            <a:ext cx="1874520" cy="365760"/>
-          </a:xfrm>
-          <a:prstGeom prst="rect">
-            <a:avLst/>
-          </a:prstGeom>
-          <a:noFill/>
-        </p:spPr>
-        <p:txBody>
-          <a:bodyPr wrap="square" anchor="t" lIns="0" rIns="0" tIns="0" bIns="0">
-            <a:spAutoFit/>
-          </a:bodyPr>
-          <a:lstStyle/>
-          <a:p>
-            <a:pPr algn="l">
-              <a:lnSpc>
-                <a:spcPct val="115000"/>
-              </a:lnSpc>
-            </a:pPr>
-            <a:r>
-              <a:rPr sz="1050" b="0">
+          <p:cNvPr id="44" name="TextBox 43"/>
+          <p:cNvSpPr txBox="1"/>
+          <p:nvPr/>
+        </p:nvSpPr>
+        <p:spPr>
+          <a:xfrm>
+            <a:off x="8321040" y="3044952"/>
+            <a:ext cx="1508760" cy="320040"/>
+          </a:xfrm>
+          <a:prstGeom prst="rect">
+            <a:avLst/>
+          </a:prstGeom>
+          <a:noFill/>
+        </p:spPr>
+        <p:txBody>
+          <a:bodyPr wrap="square" anchor="t" lIns="0" rIns="0" tIns="0" bIns="0">
+            <a:spAutoFit/>
+          </a:bodyPr>
+          <a:lstStyle/>
+          <a:p>
+            <a:pPr algn="l">
+              <a:lnSpc>
+                <a:spcPct val="115000"/>
+              </a:lnSpc>
+            </a:pPr>
+            <a:r>
+              <a:rPr sz="950" b="0">
                 <a:solidFill>
                   <a:srgbClr val="34C759"/>
                 </a:solidFill>
@@ -6011,14 +6224,101 @@
       </p:sp>
       <p:sp>
         <p:nvSpPr>
-          <p:cNvPr id="40" name="Rounded Rectangle 39"/>
+          <p:cNvPr id="45" name="Rounded Rectangle 44"/>
           <p:cNvSpPr/>
           <p:nvPr/>
         </p:nvSpPr>
         <p:spPr>
           <a:xfrm>
-            <a:off x="640080" y="4251960"/>
-            <a:ext cx="2286000" cy="777240"/>
+            <a:off x="9966960" y="2907792"/>
+            <a:ext cx="1645920" cy="530352"/>
+          </a:xfrm>
+          <a:prstGeom prst="roundRect">
+            <a:avLst>
+              <a:gd name="adj" fmla="val 6000"/>
+            </a:avLst>
+          </a:prstGeom>
+          <a:solidFill>
+            <a:srgbClr val="262624"/>
+          </a:solidFill>
+          <a:ln w="9525">
+            <a:solidFill>
+              <a:srgbClr val="34C759"/>
+            </a:solidFill>
+          </a:ln>
+          <a:effectLst/>
+        </p:spPr>
+        <p:style>
+          <a:lnRef idx="1">
+            <a:schemeClr val="accent1"/>
+          </a:lnRef>
+          <a:fillRef idx="3">
+            <a:schemeClr val="accent1"/>
+          </a:fillRef>
+          <a:effectRef idx="2">
+            <a:schemeClr val="accent1"/>
+          </a:effectRef>
+          <a:fontRef idx="minor">
+            <a:schemeClr val="lt1"/>
+          </a:fontRef>
+        </p:style>
+        <p:txBody>
+          <a:bodyPr rtlCol="0" anchor="ctr" lIns="0" rIns="0"/>
+          <a:lstStyle/>
+          <a:p>
+            <a:pPr algn="ctr"/>
+          </a:p>
+        </p:txBody>
+      </p:sp>
+      <p:sp>
+        <p:nvSpPr>
+          <p:cNvPr id="46" name="TextBox 45"/>
+          <p:cNvSpPr txBox="1"/>
+          <p:nvPr/>
+        </p:nvSpPr>
+        <p:spPr>
+          <a:xfrm>
+            <a:off x="10058400" y="3044952"/>
+            <a:ext cx="1508760" cy="320040"/>
+          </a:xfrm>
+          <a:prstGeom prst="rect">
+            <a:avLst/>
+          </a:prstGeom>
+          <a:noFill/>
+        </p:spPr>
+        <p:txBody>
+          <a:bodyPr wrap="square" anchor="t" lIns="0" rIns="0" tIns="0" bIns="0">
+            <a:spAutoFit/>
+          </a:bodyPr>
+          <a:lstStyle/>
+          <a:p>
+            <a:pPr algn="l">
+              <a:lnSpc>
+                <a:spcPct val="115000"/>
+              </a:lnSpc>
+            </a:pPr>
+            <a:r>
+              <a:rPr sz="950" b="0">
+                <a:solidFill>
+                  <a:srgbClr val="34C759"/>
+                </a:solidFill>
+                <a:latin typeface="PingFang SC"/>
+              </a:rPr>
+              <a:t>● 真实任务达标</a:t>
+            </a:r>
+          </a:p>
+        </p:txBody>
+      </p:sp>
+      <p:sp>
+        <p:nvSpPr>
+          <p:cNvPr id="47" name="Rounded Rectangle 46"/>
+          <p:cNvSpPr/>
+          <p:nvPr/>
+        </p:nvSpPr>
+        <p:spPr>
+          <a:xfrm>
+            <a:off x="640080" y="3511296"/>
+            <a:ext cx="2286000" cy="530352"/>
           </a:xfrm>
           <a:prstGeom prst="roundRect">
             <a:avLst>
@@ -6059,13 +6359,13 @@
       </p:sp>
       <p:sp>
         <p:nvSpPr>
-          <p:cNvPr id="41" name="TextBox 40"/>
-          <p:cNvSpPr txBox="1"/>
-          <p:nvPr/>
-        </p:nvSpPr>
-        <p:spPr>
-          <a:xfrm>
-            <a:off x="777240" y="4343400"/>
+          <p:cNvPr id="48" name="TextBox 47"/>
+          <p:cNvSpPr txBox="1"/>
+          <p:nvPr/>
+        </p:nvSpPr>
+        <p:spPr>
+          <a:xfrm>
+            <a:off x="777240" y="3557016"/>
             <a:ext cx="2103120" cy="274320"/>
           </a:xfrm>
           <a:prstGeom prst="rect">
@@ -6085,7 +6385,7 @@
               </a:lnSpc>
             </a:pPr>
             <a:r>
-              <a:rPr sz="1300" b="1">
+              <a:rPr sz="1200" b="1">
                 <a:solidFill>
                   <a:srgbClr val="ECECE6"/>
                 </a:solidFill>
@@ -6098,53 +6398,53 @@
       </p:sp>
       <p:sp>
         <p:nvSpPr>
-          <p:cNvPr id="42" name="TextBox 41"/>
-          <p:cNvSpPr txBox="1"/>
-          <p:nvPr/>
-        </p:nvSpPr>
-        <p:spPr>
-          <a:xfrm>
-            <a:off x="777240" y="4617720"/>
-            <a:ext cx="2103120" cy="411480"/>
-          </a:xfrm>
-          <a:prstGeom prst="rect">
-            <a:avLst/>
-          </a:prstGeom>
-          <a:noFill/>
-        </p:spPr>
-        <p:txBody>
-          <a:bodyPr wrap="square" anchor="t" lIns="0" rIns="0" tIns="0" bIns="0">
-            <a:spAutoFit/>
-          </a:bodyPr>
-          <a:lstStyle/>
-          <a:p>
-            <a:pPr algn="l">
-              <a:lnSpc>
-                <a:spcPct val="115000"/>
-              </a:lnSpc>
-            </a:pPr>
-            <a:r>
-              <a:rPr sz="950" b="0">
+          <p:cNvPr id="49" name="TextBox 48"/>
+          <p:cNvSpPr txBox="1"/>
+          <p:nvPr/>
+        </p:nvSpPr>
+        <p:spPr>
+          <a:xfrm>
+            <a:off x="777240" y="3803904"/>
+            <a:ext cx="2103120" cy="320040"/>
+          </a:xfrm>
+          <a:prstGeom prst="rect">
+            <a:avLst/>
+          </a:prstGeom>
+          <a:noFill/>
+        </p:spPr>
+        <p:txBody>
+          <a:bodyPr wrap="square" anchor="t" lIns="0" rIns="0" tIns="0" bIns="0">
+            <a:spAutoFit/>
+          </a:bodyPr>
+          <a:lstStyle/>
+          <a:p>
+            <a:pPr algn="l">
+              <a:lnSpc>
+                <a:spcPct val="115000"/>
+              </a:lnSpc>
+            </a:pPr>
+            <a:r>
+              <a:rPr sz="850" b="0">
                 <a:solidFill>
                   <a:srgbClr val="6F6E67"/>
                 </a:solidFill>
                 <a:latin typeface="PingFang SC"/>
               </a:rPr>
-              <a:t>K×K 流式卷积：BRAM 行缓冲 + 窗口 + 加法树</a:t>
-            </a:r>
-          </a:p>
-        </p:txBody>
-      </p:sp>
-      <p:sp>
-        <p:nvSpPr>
-          <p:cNvPr id="43" name="Rounded Rectangle 42"/>
+              <a:t>K×K 流式卷积：BRAM 行缓冲 + 加法树</a:t>
+            </a:r>
+          </a:p>
+        </p:txBody>
+      </p:sp>
+      <p:sp>
+        <p:nvSpPr>
+          <p:cNvPr id="50" name="Rounded Rectangle 49"/>
           <p:cNvSpPr/>
           <p:nvPr/>
         </p:nvSpPr>
         <p:spPr>
           <a:xfrm>
-            <a:off x="3017520" y="4251960"/>
-            <a:ext cx="2057400" cy="777240"/>
+            <a:off x="3017520" y="3511296"/>
+            <a:ext cx="1645920" cy="530352"/>
           </a:xfrm>
           <a:prstGeom prst="roundRect">
             <a:avLst>
@@ -6185,33 +6485,33 @@
       </p:sp>
       <p:sp>
         <p:nvSpPr>
-          <p:cNvPr id="44" name="TextBox 43"/>
-          <p:cNvSpPr txBox="1"/>
-          <p:nvPr/>
-        </p:nvSpPr>
-        <p:spPr>
-          <a:xfrm>
-            <a:off x="3127248" y="4507992"/>
-            <a:ext cx="1874520" cy="365760"/>
-          </a:xfrm>
-          <a:prstGeom prst="rect">
-            <a:avLst/>
-          </a:prstGeom>
-          <a:noFill/>
-        </p:spPr>
-        <p:txBody>
-          <a:bodyPr wrap="square" anchor="t" lIns="0" rIns="0" tIns="0" bIns="0">
-            <a:spAutoFit/>
-          </a:bodyPr>
-          <a:lstStyle/>
-          <a:p>
-            <a:pPr algn="l">
-              <a:lnSpc>
-                <a:spcPct val="115000"/>
-              </a:lnSpc>
-            </a:pPr>
-            <a:r>
-              <a:rPr sz="1050" b="0">
+          <p:cNvPr id="51" name="TextBox 50"/>
+          <p:cNvSpPr txBox="1"/>
+          <p:nvPr/>
+        </p:nvSpPr>
+        <p:spPr>
+          <a:xfrm>
+            <a:off x="3108960" y="3648456"/>
+            <a:ext cx="1508760" cy="320040"/>
+          </a:xfrm>
+          <a:prstGeom prst="rect">
+            <a:avLst/>
+          </a:prstGeom>
+          <a:noFill/>
+        </p:spPr>
+        <p:txBody>
+          <a:bodyPr wrap="square" anchor="t" lIns="0" rIns="0" tIns="0" bIns="0">
+            <a:spAutoFit/>
+          </a:bodyPr>
+          <a:lstStyle/>
+          <a:p>
+            <a:pPr algn="l">
+              <a:lnSpc>
+                <a:spcPct val="115000"/>
+              </a:lnSpc>
+            </a:pPr>
+            <a:r>
+              <a:rPr sz="950" b="0">
                 <a:solidFill>
                   <a:srgbClr val="34C759"/>
                 </a:solidFill>
@@ -6224,14 +6524,575 @@
       </p:sp>
       <p:sp>
         <p:nvSpPr>
-          <p:cNvPr id="45" name="Rounded Rectangle 44"/>
+          <p:cNvPr id="52" name="Rounded Rectangle 51"/>
           <p:cNvSpPr/>
           <p:nvPr/>
         </p:nvSpPr>
         <p:spPr>
           <a:xfrm>
-            <a:off x="5166360" y="4251960"/>
-            <a:ext cx="2057400" cy="777240"/>
+            <a:off x="4754880" y="3511296"/>
+            <a:ext cx="1645920" cy="530352"/>
+          </a:xfrm>
+          <a:prstGeom prst="roundRect">
+            <a:avLst>
+              <a:gd name="adj" fmla="val 6000"/>
+            </a:avLst>
+          </a:prstGeom>
+          <a:solidFill>
+            <a:srgbClr val="262624"/>
+          </a:solidFill>
+          <a:ln w="9525">
+            <a:solidFill>
+              <a:srgbClr val="34C759"/>
+            </a:solidFill>
+          </a:ln>
+          <a:effectLst/>
+        </p:spPr>
+        <p:style>
+          <a:lnRef idx="1">
+            <a:schemeClr val="accent1"/>
+          </a:lnRef>
+          <a:fillRef idx="3">
+            <a:schemeClr val="accent1"/>
+          </a:fillRef>
+          <a:effectRef idx="2">
+            <a:schemeClr val="accent1"/>
+          </a:effectRef>
+          <a:fontRef idx="minor">
+            <a:schemeClr val="lt1"/>
+          </a:fontRef>
+        </p:style>
+        <p:txBody>
+          <a:bodyPr rtlCol="0" anchor="ctr" lIns="0" rIns="0"/>
+          <a:lstStyle/>
+          <a:p>
+            <a:pPr algn="ctr"/>
+          </a:p>
+        </p:txBody>
+      </p:sp>
+      <p:sp>
+        <p:nvSpPr>
+          <p:cNvPr id="53" name="TextBox 52"/>
+          <p:cNvSpPr txBox="1"/>
+          <p:nvPr/>
+        </p:nvSpPr>
+        <p:spPr>
+          <a:xfrm>
+            <a:off x="4846320" y="3648456"/>
+            <a:ext cx="1508760" cy="320040"/>
+          </a:xfrm>
+          <a:prstGeom prst="rect">
+            <a:avLst/>
+          </a:prstGeom>
+          <a:noFill/>
+        </p:spPr>
+        <p:txBody>
+          <a:bodyPr wrap="square" anchor="t" lIns="0" rIns="0" tIns="0" bIns="0">
+            <a:spAutoFit/>
+          </a:bodyPr>
+          <a:lstStyle/>
+          <a:p>
+            <a:pPr algn="l">
+              <a:lnSpc>
+                <a:spcPct val="115000"/>
+              </a:lnSpc>
+            </a:pPr>
+            <a:r>
+              <a:rPr sz="950" b="0">
+                <a:solidFill>
+                  <a:srgbClr val="34C759"/>
+                </a:solidFill>
+                <a:latin typeface="PingFang SC"/>
+              </a:rPr>
+              <a:t>● 真实任务达标</a:t>
+            </a:r>
+          </a:p>
+        </p:txBody>
+      </p:sp>
+      <p:sp>
+        <p:nvSpPr>
+          <p:cNvPr id="54" name="Rounded Rectangle 53"/>
+          <p:cNvSpPr/>
+          <p:nvPr/>
+        </p:nvSpPr>
+        <p:spPr>
+          <a:xfrm>
+            <a:off x="6492240" y="3511296"/>
+            <a:ext cx="1645920" cy="530352"/>
+          </a:xfrm>
+          <a:prstGeom prst="roundRect">
+            <a:avLst>
+              <a:gd name="adj" fmla="val 6000"/>
+            </a:avLst>
+          </a:prstGeom>
+          <a:solidFill>
+            <a:srgbClr val="262624"/>
+          </a:solidFill>
+          <a:ln w="9525">
+            <a:solidFill>
+              <a:srgbClr val="34C759"/>
+            </a:solidFill>
+          </a:ln>
+          <a:effectLst/>
+        </p:spPr>
+        <p:style>
+          <a:lnRef idx="1">
+            <a:schemeClr val="accent1"/>
+          </a:lnRef>
+          <a:fillRef idx="3">
+            <a:schemeClr val="accent1"/>
+          </a:fillRef>
+          <a:effectRef idx="2">
+            <a:schemeClr val="accent1"/>
+          </a:effectRef>
+          <a:fontRef idx="minor">
+            <a:schemeClr val="lt1"/>
+          </a:fontRef>
+        </p:style>
+        <p:txBody>
+          <a:bodyPr rtlCol="0" anchor="ctr" lIns="0" rIns="0"/>
+          <a:lstStyle/>
+          <a:p>
+            <a:pPr algn="ctr"/>
+          </a:p>
+        </p:txBody>
+      </p:sp>
+      <p:sp>
+        <p:nvSpPr>
+          <p:cNvPr id="55" name="TextBox 54"/>
+          <p:cNvSpPr txBox="1"/>
+          <p:nvPr/>
+        </p:nvSpPr>
+        <p:spPr>
+          <a:xfrm>
+            <a:off x="6583680" y="3648456"/>
+            <a:ext cx="1508760" cy="320040"/>
+          </a:xfrm>
+          <a:prstGeom prst="rect">
+            <a:avLst/>
+          </a:prstGeom>
+          <a:noFill/>
+        </p:spPr>
+        <p:txBody>
+          <a:bodyPr wrap="square" anchor="t" lIns="0" rIns="0" tIns="0" bIns="0">
+            <a:spAutoFit/>
+          </a:bodyPr>
+          <a:lstStyle/>
+          <a:p>
+            <a:pPr algn="l">
+              <a:lnSpc>
+                <a:spcPct val="115000"/>
+              </a:lnSpc>
+            </a:pPr>
+            <a:r>
+              <a:rPr sz="950" b="0">
+                <a:solidFill>
+                  <a:srgbClr val="34C759"/>
+                </a:solidFill>
+                <a:latin typeface="PingFang SC"/>
+              </a:rPr>
+              <a:t>● 真实任务达标</a:t>
+            </a:r>
+          </a:p>
+        </p:txBody>
+      </p:sp>
+      <p:sp>
+        <p:nvSpPr>
+          <p:cNvPr id="56" name="Rounded Rectangle 55"/>
+          <p:cNvSpPr/>
+          <p:nvPr/>
+        </p:nvSpPr>
+        <p:spPr>
+          <a:xfrm>
+            <a:off x="8229600" y="3511296"/>
+            <a:ext cx="1645920" cy="530352"/>
+          </a:xfrm>
+          <a:prstGeom prst="roundRect">
+            <a:avLst>
+              <a:gd name="adj" fmla="val 6000"/>
+            </a:avLst>
+          </a:prstGeom>
+          <a:solidFill>
+            <a:srgbClr val="262624"/>
+          </a:solidFill>
+          <a:ln w="9525">
+            <a:solidFill>
+              <a:srgbClr val="4A90E2"/>
+            </a:solidFill>
+          </a:ln>
+          <a:effectLst/>
+        </p:spPr>
+        <p:style>
+          <a:lnRef idx="1">
+            <a:schemeClr val="accent1"/>
+          </a:lnRef>
+          <a:fillRef idx="3">
+            <a:schemeClr val="accent1"/>
+          </a:fillRef>
+          <a:effectRef idx="2">
+            <a:schemeClr val="accent1"/>
+          </a:effectRef>
+          <a:fontRef idx="minor">
+            <a:schemeClr val="lt1"/>
+          </a:fontRef>
+        </p:style>
+        <p:txBody>
+          <a:bodyPr rtlCol="0" anchor="ctr" lIns="0" rIns="0"/>
+          <a:lstStyle/>
+          <a:p>
+            <a:pPr algn="ctr"/>
+          </a:p>
+        </p:txBody>
+      </p:sp>
+      <p:sp>
+        <p:nvSpPr>
+          <p:cNvPr id="57" name="TextBox 56"/>
+          <p:cNvSpPr txBox="1"/>
+          <p:nvPr/>
+        </p:nvSpPr>
+        <p:spPr>
+          <a:xfrm>
+            <a:off x="8321040" y="3648456"/>
+            <a:ext cx="1508760" cy="320040"/>
+          </a:xfrm>
+          <a:prstGeom prst="rect">
+            <a:avLst/>
+          </a:prstGeom>
+          <a:noFill/>
+        </p:spPr>
+        <p:txBody>
+          <a:bodyPr wrap="square" anchor="t" lIns="0" rIns="0" tIns="0" bIns="0">
+            <a:spAutoFit/>
+          </a:bodyPr>
+          <a:lstStyle/>
+          <a:p>
+            <a:pPr algn="l">
+              <a:lnSpc>
+                <a:spcPct val="115000"/>
+              </a:lnSpc>
+            </a:pPr>
+            <a:r>
+              <a:rPr sz="950" b="0">
+                <a:solidFill>
+                  <a:srgbClr val="4A90E2"/>
+                </a:solidFill>
+                <a:latin typeface="PingFang SC"/>
+              </a:rPr>
+              <a:t>● EDA + 网表仿真通过</a:t>
+            </a:r>
+          </a:p>
+        </p:txBody>
+      </p:sp>
+      <p:sp>
+        <p:nvSpPr>
+          <p:cNvPr id="58" name="Rounded Rectangle 57"/>
+          <p:cNvSpPr/>
+          <p:nvPr/>
+        </p:nvSpPr>
+        <p:spPr>
+          <a:xfrm>
+            <a:off x="9966960" y="3511296"/>
+            <a:ext cx="1645920" cy="530352"/>
+          </a:xfrm>
+          <a:prstGeom prst="roundRect">
+            <a:avLst>
+              <a:gd name="adj" fmla="val 6000"/>
+            </a:avLst>
+          </a:prstGeom>
+          <a:solidFill>
+            <a:srgbClr val="262624"/>
+          </a:solidFill>
+          <a:ln w="9525">
+            <a:solidFill>
+              <a:srgbClr val="4A90E2"/>
+            </a:solidFill>
+          </a:ln>
+          <a:effectLst/>
+        </p:spPr>
+        <p:style>
+          <a:lnRef idx="1">
+            <a:schemeClr val="accent1"/>
+          </a:lnRef>
+          <a:fillRef idx="3">
+            <a:schemeClr val="accent1"/>
+          </a:fillRef>
+          <a:effectRef idx="2">
+            <a:schemeClr val="accent1"/>
+          </a:effectRef>
+          <a:fontRef idx="minor">
+            <a:schemeClr val="lt1"/>
+          </a:fontRef>
+        </p:style>
+        <p:txBody>
+          <a:bodyPr rtlCol="0" anchor="ctr" lIns="0" rIns="0"/>
+          <a:lstStyle/>
+          <a:p>
+            <a:pPr algn="ctr"/>
+          </a:p>
+        </p:txBody>
+      </p:sp>
+      <p:sp>
+        <p:nvSpPr>
+          <p:cNvPr id="59" name="TextBox 58"/>
+          <p:cNvSpPr txBox="1"/>
+          <p:nvPr/>
+        </p:nvSpPr>
+        <p:spPr>
+          <a:xfrm>
+            <a:off x="10058400" y="3648456"/>
+            <a:ext cx="1508760" cy="320040"/>
+          </a:xfrm>
+          <a:prstGeom prst="rect">
+            <a:avLst/>
+          </a:prstGeom>
+          <a:noFill/>
+        </p:spPr>
+        <p:txBody>
+          <a:bodyPr wrap="square" anchor="t" lIns="0" rIns="0" tIns="0" bIns="0">
+            <a:spAutoFit/>
+          </a:bodyPr>
+          <a:lstStyle/>
+          <a:p>
+            <a:pPr algn="l">
+              <a:lnSpc>
+                <a:spcPct val="115000"/>
+              </a:lnSpc>
+            </a:pPr>
+            <a:r>
+              <a:rPr sz="950" b="0">
+                <a:solidFill>
+                  <a:srgbClr val="4A90E2"/>
+                </a:solidFill>
+                <a:latin typeface="PingFang SC"/>
+              </a:rPr>
+              <a:t>● EDA + 网表仿真通过</a:t>
+            </a:r>
+          </a:p>
+        </p:txBody>
+      </p:sp>
+      <p:sp>
+        <p:nvSpPr>
+          <p:cNvPr id="60" name="Rounded Rectangle 59"/>
+          <p:cNvSpPr/>
+          <p:nvPr/>
+        </p:nvSpPr>
+        <p:spPr>
+          <a:xfrm>
+            <a:off x="640080" y="4114800"/>
+            <a:ext cx="2286000" cy="530352"/>
+          </a:xfrm>
+          <a:prstGeom prst="roundRect">
+            <a:avLst>
+              <a:gd name="adj" fmla="val 6000"/>
+            </a:avLst>
+          </a:prstGeom>
+          <a:solidFill>
+            <a:srgbClr val="1C1C1B"/>
+          </a:solidFill>
+          <a:ln w="9525">
+            <a:solidFill>
+              <a:srgbClr val="333331"/>
+            </a:solidFill>
+          </a:ln>
+          <a:effectLst/>
+        </p:spPr>
+        <p:style>
+          <a:lnRef idx="1">
+            <a:schemeClr val="accent1"/>
+          </a:lnRef>
+          <a:fillRef idx="3">
+            <a:schemeClr val="accent1"/>
+          </a:fillRef>
+          <a:effectRef idx="2">
+            <a:schemeClr val="accent1"/>
+          </a:effectRef>
+          <a:fontRef idx="minor">
+            <a:schemeClr val="lt1"/>
+          </a:fontRef>
+        </p:style>
+        <p:txBody>
+          <a:bodyPr rtlCol="0" anchor="ctr" lIns="0" rIns="0"/>
+          <a:lstStyle/>
+          <a:p>
+            <a:pPr algn="ctr"/>
+          </a:p>
+        </p:txBody>
+      </p:sp>
+      <p:sp>
+        <p:nvSpPr>
+          <p:cNvPr id="61" name="TextBox 60"/>
+          <p:cNvSpPr txBox="1"/>
+          <p:nvPr/>
+        </p:nvSpPr>
+        <p:spPr>
+          <a:xfrm>
+            <a:off x="777240" y="4160520"/>
+            <a:ext cx="2103120" cy="274320"/>
+          </a:xfrm>
+          <a:prstGeom prst="rect">
+            <a:avLst/>
+          </a:prstGeom>
+          <a:noFill/>
+        </p:spPr>
+        <p:txBody>
+          <a:bodyPr wrap="square" anchor="t" lIns="0" rIns="0" tIns="0" bIns="0">
+            <a:spAutoFit/>
+          </a:bodyPr>
+          <a:lstStyle/>
+          <a:p>
+            <a:pPr algn="l">
+              <a:lnSpc>
+                <a:spcPct val="115000"/>
+              </a:lnSpc>
+            </a:pPr>
+            <a:r>
+              <a:rPr sz="1200" b="1">
+                <a:solidFill>
+                  <a:srgbClr val="ECECE6"/>
+                </a:solidFill>
+                <a:latin typeface="Menlo"/>
+              </a:rPr>
+              <a:t>cordic</a:t>
+            </a:r>
+          </a:p>
+        </p:txBody>
+      </p:sp>
+      <p:sp>
+        <p:nvSpPr>
+          <p:cNvPr id="62" name="TextBox 61"/>
+          <p:cNvSpPr txBox="1"/>
+          <p:nvPr/>
+        </p:nvSpPr>
+        <p:spPr>
+          <a:xfrm>
+            <a:off x="777240" y="4407408"/>
+            <a:ext cx="2103120" cy="320040"/>
+          </a:xfrm>
+          <a:prstGeom prst="rect">
+            <a:avLst/>
+          </a:prstGeom>
+          <a:noFill/>
+        </p:spPr>
+        <p:txBody>
+          <a:bodyPr wrap="square" anchor="t" lIns="0" rIns="0" tIns="0" bIns="0">
+            <a:spAutoFit/>
+          </a:bodyPr>
+          <a:lstStyle/>
+          <a:p>
+            <a:pPr algn="l">
+              <a:lnSpc>
+                <a:spcPct val="115000"/>
+              </a:lnSpc>
+            </a:pPr>
+            <a:r>
+              <a:rPr sz="850" b="0">
+                <a:solidFill>
+                  <a:srgbClr val="6F6E67"/>
+                </a:solidFill>
+                <a:latin typeface="PingFang SC"/>
+              </a:rPr>
+              <a:t>旋转 / 向量模式，展开或折叠，位精确</a:t>
+            </a:r>
+          </a:p>
+        </p:txBody>
+      </p:sp>
+      <p:sp>
+        <p:nvSpPr>
+          <p:cNvPr id="63" name="Rounded Rectangle 62"/>
+          <p:cNvSpPr/>
+          <p:nvPr/>
+        </p:nvSpPr>
+        <p:spPr>
+          <a:xfrm>
+            <a:off x="3017520" y="4114800"/>
+            <a:ext cx="1645920" cy="530352"/>
+          </a:xfrm>
+          <a:prstGeom prst="roundRect">
+            <a:avLst>
+              <a:gd name="adj" fmla="val 6000"/>
+            </a:avLst>
+          </a:prstGeom>
+          <a:solidFill>
+            <a:srgbClr val="262624"/>
+          </a:solidFill>
+          <a:ln w="9525">
+            <a:solidFill>
+              <a:srgbClr val="34C759"/>
+            </a:solidFill>
+          </a:ln>
+          <a:effectLst/>
+        </p:spPr>
+        <p:style>
+          <a:lnRef idx="1">
+            <a:schemeClr val="accent1"/>
+          </a:lnRef>
+          <a:fillRef idx="3">
+            <a:schemeClr val="accent1"/>
+          </a:fillRef>
+          <a:effectRef idx="2">
+            <a:schemeClr val="accent1"/>
+          </a:effectRef>
+          <a:fontRef idx="minor">
+            <a:schemeClr val="lt1"/>
+          </a:fontRef>
+        </p:style>
+        <p:txBody>
+          <a:bodyPr rtlCol="0" anchor="ctr" lIns="0" rIns="0"/>
+          <a:lstStyle/>
+          <a:p>
+            <a:pPr algn="ctr"/>
+          </a:p>
+        </p:txBody>
+      </p:sp>
+      <p:sp>
+        <p:nvSpPr>
+          <p:cNvPr id="64" name="TextBox 63"/>
+          <p:cNvSpPr txBox="1"/>
+          <p:nvPr/>
+        </p:nvSpPr>
+        <p:spPr>
+          <a:xfrm>
+            <a:off x="3108960" y="4251960"/>
+            <a:ext cx="1508760" cy="320040"/>
+          </a:xfrm>
+          <a:prstGeom prst="rect">
+            <a:avLst/>
+          </a:prstGeom>
+          <a:noFill/>
+        </p:spPr>
+        <p:txBody>
+          <a:bodyPr wrap="square" anchor="t" lIns="0" rIns="0" tIns="0" bIns="0">
+            <a:spAutoFit/>
+          </a:bodyPr>
+          <a:lstStyle/>
+          <a:p>
+            <a:pPr algn="l">
+              <a:lnSpc>
+                <a:spcPct val="115000"/>
+              </a:lnSpc>
+            </a:pPr>
+            <a:r>
+              <a:rPr sz="950" b="0">
+                <a:solidFill>
+                  <a:srgbClr val="34C759"/>
+                </a:solidFill>
+                <a:latin typeface="PingFang SC"/>
+              </a:rPr>
+              <a:t>● 真实任务达标</a:t>
+            </a:r>
+          </a:p>
+        </p:txBody>
+      </p:sp>
+      <p:sp>
+        <p:nvSpPr>
+          <p:cNvPr id="65" name="Rounded Rectangle 64"/>
+          <p:cNvSpPr/>
+          <p:nvPr/>
+        </p:nvSpPr>
+        <p:spPr>
+          <a:xfrm>
+            <a:off x="4754880" y="4114800"/>
+            <a:ext cx="1645920" cy="530352"/>
           </a:xfrm>
           <a:prstGeom prst="roundRect">
             <a:avLst>
@@ -6272,33 +7133,33 @@
       </p:sp>
       <p:sp>
         <p:nvSpPr>
-          <p:cNvPr id="46" name="TextBox 45"/>
-          <p:cNvSpPr txBox="1"/>
-          <p:nvPr/>
-        </p:nvSpPr>
-        <p:spPr>
-          <a:xfrm>
-            <a:off x="5276088" y="4507992"/>
-            <a:ext cx="1874520" cy="365760"/>
-          </a:xfrm>
-          <a:prstGeom prst="rect">
-            <a:avLst/>
-          </a:prstGeom>
-          <a:noFill/>
-        </p:spPr>
-        <p:txBody>
-          <a:bodyPr wrap="square" anchor="t" lIns="0" rIns="0" tIns="0" bIns="0">
-            <a:spAutoFit/>
-          </a:bodyPr>
-          <a:lstStyle/>
-          <a:p>
-            <a:pPr algn="l">
-              <a:lnSpc>
-                <a:spcPct val="115000"/>
-              </a:lnSpc>
-            </a:pPr>
-            <a:r>
-              <a:rPr sz="1050" b="0">
+          <p:cNvPr id="66" name="TextBox 65"/>
+          <p:cNvSpPr txBox="1"/>
+          <p:nvPr/>
+        </p:nvSpPr>
+        <p:spPr>
+          <a:xfrm>
+            <a:off x="4846320" y="4251960"/>
+            <a:ext cx="1508760" cy="320040"/>
+          </a:xfrm>
+          <a:prstGeom prst="rect">
+            <a:avLst/>
+          </a:prstGeom>
+          <a:noFill/>
+        </p:spPr>
+        <p:txBody>
+          <a:bodyPr wrap="square" anchor="t" lIns="0" rIns="0" tIns="0" bIns="0">
+            <a:spAutoFit/>
+          </a:bodyPr>
+          <a:lstStyle/>
+          <a:p>
+            <a:pPr algn="l">
+              <a:lnSpc>
+                <a:spcPct val="115000"/>
+              </a:lnSpc>
+            </a:pPr>
+            <a:r>
+              <a:rPr sz="950" b="0">
                 <a:solidFill>
                   <a:srgbClr val="6F6E67"/>
                 </a:solidFill>
@@ -6311,14 +7172,662 @@
       </p:sp>
       <p:sp>
         <p:nvSpPr>
-          <p:cNvPr id="47" name="Rounded Rectangle 46"/>
+          <p:cNvPr id="67" name="Rounded Rectangle 66"/>
           <p:cNvSpPr/>
           <p:nvPr/>
         </p:nvSpPr>
         <p:spPr>
           <a:xfrm>
-            <a:off x="7315200" y="4251960"/>
-            <a:ext cx="2057400" cy="777240"/>
+            <a:off x="6492240" y="4114800"/>
+            <a:ext cx="1645920" cy="530352"/>
+          </a:xfrm>
+          <a:prstGeom prst="roundRect">
+            <a:avLst>
+              <a:gd name="adj" fmla="val 6000"/>
+            </a:avLst>
+          </a:prstGeom>
+          <a:solidFill>
+            <a:srgbClr val="262624"/>
+          </a:solidFill>
+          <a:ln w="9525">
+            <a:solidFill>
+              <a:srgbClr val="4A90E2"/>
+            </a:solidFill>
+          </a:ln>
+          <a:effectLst/>
+        </p:spPr>
+        <p:style>
+          <a:lnRef idx="1">
+            <a:schemeClr val="accent1"/>
+          </a:lnRef>
+          <a:fillRef idx="3">
+            <a:schemeClr val="accent1"/>
+          </a:fillRef>
+          <a:effectRef idx="2">
+            <a:schemeClr val="accent1"/>
+          </a:effectRef>
+          <a:fontRef idx="minor">
+            <a:schemeClr val="lt1"/>
+          </a:fontRef>
+        </p:style>
+        <p:txBody>
+          <a:bodyPr rtlCol="0" anchor="ctr" lIns="0" rIns="0"/>
+          <a:lstStyle/>
+          <a:p>
+            <a:pPr algn="ctr"/>
+          </a:p>
+        </p:txBody>
+      </p:sp>
+      <p:sp>
+        <p:nvSpPr>
+          <p:cNvPr id="68" name="TextBox 67"/>
+          <p:cNvSpPr txBox="1"/>
+          <p:nvPr/>
+        </p:nvSpPr>
+        <p:spPr>
+          <a:xfrm>
+            <a:off x="6583680" y="4251960"/>
+            <a:ext cx="1508760" cy="320040"/>
+          </a:xfrm>
+          <a:prstGeom prst="rect">
+            <a:avLst/>
+          </a:prstGeom>
+          <a:noFill/>
+        </p:spPr>
+        <p:txBody>
+          <a:bodyPr wrap="square" anchor="t" lIns="0" rIns="0" tIns="0" bIns="0">
+            <a:spAutoFit/>
+          </a:bodyPr>
+          <a:lstStyle/>
+          <a:p>
+            <a:pPr algn="l">
+              <a:lnSpc>
+                <a:spcPct val="115000"/>
+              </a:lnSpc>
+            </a:pPr>
+            <a:r>
+              <a:rPr sz="950" b="0">
+                <a:solidFill>
+                  <a:srgbClr val="4A90E2"/>
+                </a:solidFill>
+                <a:latin typeface="PingFang SC"/>
+              </a:rPr>
+              <a:t>● EDA + 网表仿真通过</a:t>
+            </a:r>
+          </a:p>
+        </p:txBody>
+      </p:sp>
+      <p:sp>
+        <p:nvSpPr>
+          <p:cNvPr id="69" name="Rounded Rectangle 68"/>
+          <p:cNvSpPr/>
+          <p:nvPr/>
+        </p:nvSpPr>
+        <p:spPr>
+          <a:xfrm>
+            <a:off x="8229600" y="4114800"/>
+            <a:ext cx="1645920" cy="530352"/>
+          </a:xfrm>
+          <a:prstGeom prst="roundRect">
+            <a:avLst>
+              <a:gd name="adj" fmla="val 6000"/>
+            </a:avLst>
+          </a:prstGeom>
+          <a:solidFill>
+            <a:srgbClr val="262624"/>
+          </a:solidFill>
+          <a:ln w="9525">
+            <a:solidFill>
+              <a:srgbClr val="4A90E2"/>
+            </a:solidFill>
+          </a:ln>
+          <a:effectLst/>
+        </p:spPr>
+        <p:style>
+          <a:lnRef idx="1">
+            <a:schemeClr val="accent1"/>
+          </a:lnRef>
+          <a:fillRef idx="3">
+            <a:schemeClr val="accent1"/>
+          </a:fillRef>
+          <a:effectRef idx="2">
+            <a:schemeClr val="accent1"/>
+          </a:effectRef>
+          <a:fontRef idx="minor">
+            <a:schemeClr val="lt1"/>
+          </a:fontRef>
+        </p:style>
+        <p:txBody>
+          <a:bodyPr rtlCol="0" anchor="ctr" lIns="0" rIns="0"/>
+          <a:lstStyle/>
+          <a:p>
+            <a:pPr algn="ctr"/>
+          </a:p>
+        </p:txBody>
+      </p:sp>
+      <p:sp>
+        <p:nvSpPr>
+          <p:cNvPr id="70" name="TextBox 69"/>
+          <p:cNvSpPr txBox="1"/>
+          <p:nvPr/>
+        </p:nvSpPr>
+        <p:spPr>
+          <a:xfrm>
+            <a:off x="8321040" y="4251960"/>
+            <a:ext cx="1508760" cy="320040"/>
+          </a:xfrm>
+          <a:prstGeom prst="rect">
+            <a:avLst/>
+          </a:prstGeom>
+          <a:noFill/>
+        </p:spPr>
+        <p:txBody>
+          <a:bodyPr wrap="square" anchor="t" lIns="0" rIns="0" tIns="0" bIns="0">
+            <a:spAutoFit/>
+          </a:bodyPr>
+          <a:lstStyle/>
+          <a:p>
+            <a:pPr algn="l">
+              <a:lnSpc>
+                <a:spcPct val="115000"/>
+              </a:lnSpc>
+            </a:pPr>
+            <a:r>
+              <a:rPr sz="950" b="0">
+                <a:solidFill>
+                  <a:srgbClr val="4A90E2"/>
+                </a:solidFill>
+                <a:latin typeface="PingFang SC"/>
+              </a:rPr>
+              <a:t>● EDA + 网表仿真通过</a:t>
+            </a:r>
+          </a:p>
+        </p:txBody>
+      </p:sp>
+      <p:sp>
+        <p:nvSpPr>
+          <p:cNvPr id="71" name="Rounded Rectangle 70"/>
+          <p:cNvSpPr/>
+          <p:nvPr/>
+        </p:nvSpPr>
+        <p:spPr>
+          <a:xfrm>
+            <a:off x="9966960" y="4114800"/>
+            <a:ext cx="1645920" cy="530352"/>
+          </a:xfrm>
+          <a:prstGeom prst="roundRect">
+            <a:avLst>
+              <a:gd name="adj" fmla="val 6000"/>
+            </a:avLst>
+          </a:prstGeom>
+          <a:solidFill>
+            <a:srgbClr val="262624"/>
+          </a:solidFill>
+          <a:ln w="9525">
+            <a:solidFill>
+              <a:srgbClr val="4A90E2"/>
+            </a:solidFill>
+          </a:ln>
+          <a:effectLst/>
+        </p:spPr>
+        <p:style>
+          <a:lnRef idx="1">
+            <a:schemeClr val="accent1"/>
+          </a:lnRef>
+          <a:fillRef idx="3">
+            <a:schemeClr val="accent1"/>
+          </a:fillRef>
+          <a:effectRef idx="2">
+            <a:schemeClr val="accent1"/>
+          </a:effectRef>
+          <a:fontRef idx="minor">
+            <a:schemeClr val="lt1"/>
+          </a:fontRef>
+        </p:style>
+        <p:txBody>
+          <a:bodyPr rtlCol="0" anchor="ctr" lIns="0" rIns="0"/>
+          <a:lstStyle/>
+          <a:p>
+            <a:pPr algn="ctr"/>
+          </a:p>
+        </p:txBody>
+      </p:sp>
+      <p:sp>
+        <p:nvSpPr>
+          <p:cNvPr id="72" name="TextBox 71"/>
+          <p:cNvSpPr txBox="1"/>
+          <p:nvPr/>
+        </p:nvSpPr>
+        <p:spPr>
+          <a:xfrm>
+            <a:off x="10058400" y="4251960"/>
+            <a:ext cx="1508760" cy="320040"/>
+          </a:xfrm>
+          <a:prstGeom prst="rect">
+            <a:avLst/>
+          </a:prstGeom>
+          <a:noFill/>
+        </p:spPr>
+        <p:txBody>
+          <a:bodyPr wrap="square" anchor="t" lIns="0" rIns="0" tIns="0" bIns="0">
+            <a:spAutoFit/>
+          </a:bodyPr>
+          <a:lstStyle/>
+          <a:p>
+            <a:pPr algn="l">
+              <a:lnSpc>
+                <a:spcPct val="115000"/>
+              </a:lnSpc>
+            </a:pPr>
+            <a:r>
+              <a:rPr sz="950" b="0">
+                <a:solidFill>
+                  <a:srgbClr val="4A90E2"/>
+                </a:solidFill>
+                <a:latin typeface="PingFang SC"/>
+              </a:rPr>
+              <a:t>● EDA + 网表仿真通过</a:t>
+            </a:r>
+          </a:p>
+        </p:txBody>
+      </p:sp>
+      <p:sp>
+        <p:nvSpPr>
+          <p:cNvPr id="73" name="Rounded Rectangle 72"/>
+          <p:cNvSpPr/>
+          <p:nvPr/>
+        </p:nvSpPr>
+        <p:spPr>
+          <a:xfrm>
+            <a:off x="640080" y="4718304"/>
+            <a:ext cx="2286000" cy="530352"/>
+          </a:xfrm>
+          <a:prstGeom prst="roundRect">
+            <a:avLst>
+              <a:gd name="adj" fmla="val 6000"/>
+            </a:avLst>
+          </a:prstGeom>
+          <a:solidFill>
+            <a:srgbClr val="1C1C1B"/>
+          </a:solidFill>
+          <a:ln w="9525">
+            <a:solidFill>
+              <a:srgbClr val="333331"/>
+            </a:solidFill>
+          </a:ln>
+          <a:effectLst/>
+        </p:spPr>
+        <p:style>
+          <a:lnRef idx="1">
+            <a:schemeClr val="accent1"/>
+          </a:lnRef>
+          <a:fillRef idx="3">
+            <a:schemeClr val="accent1"/>
+          </a:fillRef>
+          <a:effectRef idx="2">
+            <a:schemeClr val="accent1"/>
+          </a:effectRef>
+          <a:fontRef idx="minor">
+            <a:schemeClr val="lt1"/>
+          </a:fontRef>
+        </p:style>
+        <p:txBody>
+          <a:bodyPr rtlCol="0" anchor="ctr" lIns="0" rIns="0"/>
+          <a:lstStyle/>
+          <a:p>
+            <a:pPr algn="ctr"/>
+          </a:p>
+        </p:txBody>
+      </p:sp>
+      <p:sp>
+        <p:nvSpPr>
+          <p:cNvPr id="74" name="TextBox 73"/>
+          <p:cNvSpPr txBox="1"/>
+          <p:nvPr/>
+        </p:nvSpPr>
+        <p:spPr>
+          <a:xfrm>
+            <a:off x="777240" y="4764024"/>
+            <a:ext cx="2103120" cy="274320"/>
+          </a:xfrm>
+          <a:prstGeom prst="rect">
+            <a:avLst/>
+          </a:prstGeom>
+          <a:noFill/>
+        </p:spPr>
+        <p:txBody>
+          <a:bodyPr wrap="square" anchor="t" lIns="0" rIns="0" tIns="0" bIns="0">
+            <a:spAutoFit/>
+          </a:bodyPr>
+          <a:lstStyle/>
+          <a:p>
+            <a:pPr algn="l">
+              <a:lnSpc>
+                <a:spcPct val="115000"/>
+              </a:lnSpc>
+            </a:pPr>
+            <a:r>
+              <a:rPr sz="1200" b="1">
+                <a:solidFill>
+                  <a:srgbClr val="ECECE6"/>
+                </a:solidFill>
+                <a:latin typeface="Menlo"/>
+              </a:rPr>
+              <a:t>fft</a:t>
+            </a:r>
+          </a:p>
+        </p:txBody>
+      </p:sp>
+      <p:sp>
+        <p:nvSpPr>
+          <p:cNvPr id="75" name="TextBox 74"/>
+          <p:cNvSpPr txBox="1"/>
+          <p:nvPr/>
+        </p:nvSpPr>
+        <p:spPr>
+          <a:xfrm>
+            <a:off x="777240" y="5010912"/>
+            <a:ext cx="2103120" cy="320040"/>
+          </a:xfrm>
+          <a:prstGeom prst="rect">
+            <a:avLst/>
+          </a:prstGeom>
+          <a:noFill/>
+        </p:spPr>
+        <p:txBody>
+          <a:bodyPr wrap="square" anchor="t" lIns="0" rIns="0" tIns="0" bIns="0">
+            <a:spAutoFit/>
+          </a:bodyPr>
+          <a:lstStyle/>
+          <a:p>
+            <a:pPr algn="l">
+              <a:lnSpc>
+                <a:spcPct val="115000"/>
+              </a:lnSpc>
+            </a:pPr>
+            <a:r>
+              <a:rPr sz="850" b="0">
+                <a:solidFill>
+                  <a:srgbClr val="6F6E67"/>
+                </a:solidFill>
+                <a:latin typeface="PingFang SC"/>
+              </a:rPr>
+              <a:t>radix-2 SDF，16–4096 点，4/3/0 乘法器复乘</a:t>
+            </a:r>
+          </a:p>
+        </p:txBody>
+      </p:sp>
+      <p:sp>
+        <p:nvSpPr>
+          <p:cNvPr id="76" name="Rounded Rectangle 75"/>
+          <p:cNvSpPr/>
+          <p:nvPr/>
+        </p:nvSpPr>
+        <p:spPr>
+          <a:xfrm>
+            <a:off x="3017520" y="4718304"/>
+            <a:ext cx="1645920" cy="530352"/>
+          </a:xfrm>
+          <a:prstGeom prst="roundRect">
+            <a:avLst>
+              <a:gd name="adj" fmla="val 6000"/>
+            </a:avLst>
+          </a:prstGeom>
+          <a:solidFill>
+            <a:srgbClr val="262624"/>
+          </a:solidFill>
+          <a:ln w="9525">
+            <a:solidFill>
+              <a:srgbClr val="4A90E2"/>
+            </a:solidFill>
+          </a:ln>
+          <a:effectLst/>
+        </p:spPr>
+        <p:style>
+          <a:lnRef idx="1">
+            <a:schemeClr val="accent1"/>
+          </a:lnRef>
+          <a:fillRef idx="3">
+            <a:schemeClr val="accent1"/>
+          </a:fillRef>
+          <a:effectRef idx="2">
+            <a:schemeClr val="accent1"/>
+          </a:effectRef>
+          <a:fontRef idx="minor">
+            <a:schemeClr val="lt1"/>
+          </a:fontRef>
+        </p:style>
+        <p:txBody>
+          <a:bodyPr rtlCol="0" anchor="ctr" lIns="0" rIns="0"/>
+          <a:lstStyle/>
+          <a:p>
+            <a:pPr algn="ctr"/>
+          </a:p>
+        </p:txBody>
+      </p:sp>
+      <p:sp>
+        <p:nvSpPr>
+          <p:cNvPr id="77" name="TextBox 76"/>
+          <p:cNvSpPr txBox="1"/>
+          <p:nvPr/>
+        </p:nvSpPr>
+        <p:spPr>
+          <a:xfrm>
+            <a:off x="3108960" y="4855464"/>
+            <a:ext cx="1508760" cy="320040"/>
+          </a:xfrm>
+          <a:prstGeom prst="rect">
+            <a:avLst/>
+          </a:prstGeom>
+          <a:noFill/>
+        </p:spPr>
+        <p:txBody>
+          <a:bodyPr wrap="square" anchor="t" lIns="0" rIns="0" tIns="0" bIns="0">
+            <a:spAutoFit/>
+          </a:bodyPr>
+          <a:lstStyle/>
+          <a:p>
+            <a:pPr algn="l">
+              <a:lnSpc>
+                <a:spcPct val="115000"/>
+              </a:lnSpc>
+            </a:pPr>
+            <a:r>
+              <a:rPr sz="950" b="0">
+                <a:solidFill>
+                  <a:srgbClr val="4A90E2"/>
+                </a:solidFill>
+                <a:latin typeface="PingFang SC"/>
+              </a:rPr>
+              <a:t>● EDA + 网表仿真通过</a:t>
+            </a:r>
+          </a:p>
+        </p:txBody>
+      </p:sp>
+      <p:sp>
+        <p:nvSpPr>
+          <p:cNvPr id="78" name="Rounded Rectangle 77"/>
+          <p:cNvSpPr/>
+          <p:nvPr/>
+        </p:nvSpPr>
+        <p:spPr>
+          <a:xfrm>
+            <a:off x="4754880" y="4718304"/>
+            <a:ext cx="1645920" cy="530352"/>
+          </a:xfrm>
+          <a:prstGeom prst="roundRect">
+            <a:avLst>
+              <a:gd name="adj" fmla="val 6000"/>
+            </a:avLst>
+          </a:prstGeom>
+          <a:solidFill>
+            <a:srgbClr val="0E0E0D"/>
+          </a:solidFill>
+          <a:ln w="9525">
+            <a:solidFill>
+              <a:srgbClr val="333331"/>
+            </a:solidFill>
+          </a:ln>
+          <a:effectLst/>
+        </p:spPr>
+        <p:style>
+          <a:lnRef idx="1">
+            <a:schemeClr val="accent1"/>
+          </a:lnRef>
+          <a:fillRef idx="3">
+            <a:schemeClr val="accent1"/>
+          </a:fillRef>
+          <a:effectRef idx="2">
+            <a:schemeClr val="accent1"/>
+          </a:effectRef>
+          <a:fontRef idx="minor">
+            <a:schemeClr val="lt1"/>
+          </a:fontRef>
+        </p:style>
+        <p:txBody>
+          <a:bodyPr rtlCol="0" anchor="ctr" lIns="0" rIns="0"/>
+          <a:lstStyle/>
+          <a:p>
+            <a:pPr algn="ctr"/>
+          </a:p>
+        </p:txBody>
+      </p:sp>
+      <p:sp>
+        <p:nvSpPr>
+          <p:cNvPr id="79" name="TextBox 78"/>
+          <p:cNvSpPr txBox="1"/>
+          <p:nvPr/>
+        </p:nvSpPr>
+        <p:spPr>
+          <a:xfrm>
+            <a:off x="4846320" y="4855464"/>
+            <a:ext cx="1508760" cy="320040"/>
+          </a:xfrm>
+          <a:prstGeom prst="rect">
+            <a:avLst/>
+          </a:prstGeom>
+          <a:noFill/>
+        </p:spPr>
+        <p:txBody>
+          <a:bodyPr wrap="square" anchor="t" lIns="0" rIns="0" tIns="0" bIns="0">
+            <a:spAutoFit/>
+          </a:bodyPr>
+          <a:lstStyle/>
+          <a:p>
+            <a:pPr algn="l">
+              <a:lnSpc>
+                <a:spcPct val="115000"/>
+              </a:lnSpc>
+            </a:pPr>
+            <a:r>
+              <a:rPr sz="950" b="0">
+                <a:solidFill>
+                  <a:srgbClr val="6F6E67"/>
+                </a:solidFill>
+                <a:latin typeface="PingFang SC"/>
+              </a:rPr>
+              <a:t>○ 未跑</a:t>
+            </a:r>
+          </a:p>
+        </p:txBody>
+      </p:sp>
+      <p:sp>
+        <p:nvSpPr>
+          <p:cNvPr id="80" name="Rounded Rectangle 79"/>
+          <p:cNvSpPr/>
+          <p:nvPr/>
+        </p:nvSpPr>
+        <p:spPr>
+          <a:xfrm>
+            <a:off x="6492240" y="4718304"/>
+            <a:ext cx="1645920" cy="530352"/>
+          </a:xfrm>
+          <a:prstGeom prst="roundRect">
+            <a:avLst>
+              <a:gd name="adj" fmla="val 6000"/>
+            </a:avLst>
+          </a:prstGeom>
+          <a:solidFill>
+            <a:srgbClr val="0E0E0D"/>
+          </a:solidFill>
+          <a:ln w="9525">
+            <a:solidFill>
+              <a:srgbClr val="333331"/>
+            </a:solidFill>
+          </a:ln>
+          <a:effectLst/>
+        </p:spPr>
+        <p:style>
+          <a:lnRef idx="1">
+            <a:schemeClr val="accent1"/>
+          </a:lnRef>
+          <a:fillRef idx="3">
+            <a:schemeClr val="accent1"/>
+          </a:fillRef>
+          <a:effectRef idx="2">
+            <a:schemeClr val="accent1"/>
+          </a:effectRef>
+          <a:fontRef idx="minor">
+            <a:schemeClr val="lt1"/>
+          </a:fontRef>
+        </p:style>
+        <p:txBody>
+          <a:bodyPr rtlCol="0" anchor="ctr" lIns="0" rIns="0"/>
+          <a:lstStyle/>
+          <a:p>
+            <a:pPr algn="ctr"/>
+          </a:p>
+        </p:txBody>
+      </p:sp>
+      <p:sp>
+        <p:nvSpPr>
+          <p:cNvPr id="81" name="TextBox 80"/>
+          <p:cNvSpPr txBox="1"/>
+          <p:nvPr/>
+        </p:nvSpPr>
+        <p:spPr>
+          <a:xfrm>
+            <a:off x="6583680" y="4855464"/>
+            <a:ext cx="1508760" cy="320040"/>
+          </a:xfrm>
+          <a:prstGeom prst="rect">
+            <a:avLst/>
+          </a:prstGeom>
+          <a:noFill/>
+        </p:spPr>
+        <p:txBody>
+          <a:bodyPr wrap="square" anchor="t" lIns="0" rIns="0" tIns="0" bIns="0">
+            <a:spAutoFit/>
+          </a:bodyPr>
+          <a:lstStyle/>
+          <a:p>
+            <a:pPr algn="l">
+              <a:lnSpc>
+                <a:spcPct val="115000"/>
+              </a:lnSpc>
+            </a:pPr>
+            <a:r>
+              <a:rPr sz="950" b="0">
+                <a:solidFill>
+                  <a:srgbClr val="6F6E67"/>
+                </a:solidFill>
+                <a:latin typeface="PingFang SC"/>
+              </a:rPr>
+              <a:t>○ 未跑</a:t>
+            </a:r>
+          </a:p>
+        </p:txBody>
+      </p:sp>
+      <p:sp>
+        <p:nvSpPr>
+          <p:cNvPr id="82" name="Rounded Rectangle 81"/>
+          <p:cNvSpPr/>
+          <p:nvPr/>
+        </p:nvSpPr>
+        <p:spPr>
+          <a:xfrm>
+            <a:off x="8229600" y="4718304"/>
+            <a:ext cx="1645920" cy="530352"/>
           </a:xfrm>
           <a:prstGeom prst="roundRect">
             <a:avLst>
@@ -6359,33 +7868,33 @@
       </p:sp>
       <p:sp>
         <p:nvSpPr>
-          <p:cNvPr id="48" name="TextBox 47"/>
-          <p:cNvSpPr txBox="1"/>
-          <p:nvPr/>
-        </p:nvSpPr>
-        <p:spPr>
-          <a:xfrm>
-            <a:off x="7424928" y="4507992"/>
-            <a:ext cx="1874520" cy="365760"/>
-          </a:xfrm>
-          <a:prstGeom prst="rect">
-            <a:avLst/>
-          </a:prstGeom>
-          <a:noFill/>
-        </p:spPr>
-        <p:txBody>
-          <a:bodyPr wrap="square" anchor="t" lIns="0" rIns="0" tIns="0" bIns="0">
-            <a:spAutoFit/>
-          </a:bodyPr>
-          <a:lstStyle/>
-          <a:p>
-            <a:pPr algn="l">
-              <a:lnSpc>
-                <a:spcPct val="115000"/>
-              </a:lnSpc>
-            </a:pPr>
-            <a:r>
-              <a:rPr sz="1050" b="0">
+          <p:cNvPr id="83" name="TextBox 82"/>
+          <p:cNvSpPr txBox="1"/>
+          <p:nvPr/>
+        </p:nvSpPr>
+        <p:spPr>
+          <a:xfrm>
+            <a:off x="8321040" y="4855464"/>
+            <a:ext cx="1508760" cy="320040"/>
+          </a:xfrm>
+          <a:prstGeom prst="rect">
+            <a:avLst/>
+          </a:prstGeom>
+          <a:noFill/>
+        </p:spPr>
+        <p:txBody>
+          <a:bodyPr wrap="square" anchor="t" lIns="0" rIns="0" tIns="0" bIns="0">
+            <a:spAutoFit/>
+          </a:bodyPr>
+          <a:lstStyle/>
+          <a:p>
+            <a:pPr algn="l">
+              <a:lnSpc>
+                <a:spcPct val="115000"/>
+              </a:lnSpc>
+            </a:pPr>
+            <a:r>
+              <a:rPr sz="950" b="0">
                 <a:solidFill>
                   <a:srgbClr val="34C759"/>
                 </a:solidFill>
@@ -6398,14 +7907,488 @@
       </p:sp>
       <p:sp>
         <p:nvSpPr>
-          <p:cNvPr id="49" name="Rounded Rectangle 48"/>
+          <p:cNvPr id="84" name="Rounded Rectangle 83"/>
           <p:cNvSpPr/>
           <p:nvPr/>
         </p:nvSpPr>
         <p:spPr>
           <a:xfrm>
-            <a:off x="9464040" y="4251960"/>
-            <a:ext cx="2057400" cy="777240"/>
+            <a:off x="9966960" y="4718304"/>
+            <a:ext cx="1645920" cy="530352"/>
+          </a:xfrm>
+          <a:prstGeom prst="roundRect">
+            <a:avLst>
+              <a:gd name="adj" fmla="val 6000"/>
+            </a:avLst>
+          </a:prstGeom>
+          <a:solidFill>
+            <a:srgbClr val="0E0E0D"/>
+          </a:solidFill>
+          <a:ln w="9525">
+            <a:solidFill>
+              <a:srgbClr val="333331"/>
+            </a:solidFill>
+          </a:ln>
+          <a:effectLst/>
+        </p:spPr>
+        <p:style>
+          <a:lnRef idx="1">
+            <a:schemeClr val="accent1"/>
+          </a:lnRef>
+          <a:fillRef idx="3">
+            <a:schemeClr val="accent1"/>
+          </a:fillRef>
+          <a:effectRef idx="2">
+            <a:schemeClr val="accent1"/>
+          </a:effectRef>
+          <a:fontRef idx="minor">
+            <a:schemeClr val="lt1"/>
+          </a:fontRef>
+        </p:style>
+        <p:txBody>
+          <a:bodyPr rtlCol="0" anchor="ctr" lIns="0" rIns="0"/>
+          <a:lstStyle/>
+          <a:p>
+            <a:pPr algn="ctr"/>
+          </a:p>
+        </p:txBody>
+      </p:sp>
+      <p:sp>
+        <p:nvSpPr>
+          <p:cNvPr id="85" name="TextBox 84"/>
+          <p:cNvSpPr txBox="1"/>
+          <p:nvPr/>
+        </p:nvSpPr>
+        <p:spPr>
+          <a:xfrm>
+            <a:off x="10058400" y="4855464"/>
+            <a:ext cx="1508760" cy="320040"/>
+          </a:xfrm>
+          <a:prstGeom prst="rect">
+            <a:avLst/>
+          </a:prstGeom>
+          <a:noFill/>
+        </p:spPr>
+        <p:txBody>
+          <a:bodyPr wrap="square" anchor="t" lIns="0" rIns="0" tIns="0" bIns="0">
+            <a:spAutoFit/>
+          </a:bodyPr>
+          <a:lstStyle/>
+          <a:p>
+            <a:pPr algn="l">
+              <a:lnSpc>
+                <a:spcPct val="115000"/>
+              </a:lnSpc>
+            </a:pPr>
+            <a:r>
+              <a:rPr sz="950" b="0">
+                <a:solidFill>
+                  <a:srgbClr val="6F6E67"/>
+                </a:solidFill>
+                <a:latin typeface="PingFang SC"/>
+              </a:rPr>
+              <a:t>○ 未跑</a:t>
+            </a:r>
+          </a:p>
+        </p:txBody>
+      </p:sp>
+      <p:sp>
+        <p:nvSpPr>
+          <p:cNvPr id="86" name="Rounded Rectangle 85"/>
+          <p:cNvSpPr/>
+          <p:nvPr/>
+        </p:nvSpPr>
+        <p:spPr>
+          <a:xfrm>
+            <a:off x="640080" y="5321808"/>
+            <a:ext cx="2286000" cy="530352"/>
+          </a:xfrm>
+          <a:prstGeom prst="roundRect">
+            <a:avLst>
+              <a:gd name="adj" fmla="val 6000"/>
+            </a:avLst>
+          </a:prstGeom>
+          <a:solidFill>
+            <a:srgbClr val="1C1C1B"/>
+          </a:solidFill>
+          <a:ln w="9525">
+            <a:solidFill>
+              <a:srgbClr val="333331"/>
+            </a:solidFill>
+          </a:ln>
+          <a:effectLst/>
+        </p:spPr>
+        <p:style>
+          <a:lnRef idx="1">
+            <a:schemeClr val="accent1"/>
+          </a:lnRef>
+          <a:fillRef idx="3">
+            <a:schemeClr val="accent1"/>
+          </a:fillRef>
+          <a:effectRef idx="2">
+            <a:schemeClr val="accent1"/>
+          </a:effectRef>
+          <a:fontRef idx="minor">
+            <a:schemeClr val="lt1"/>
+          </a:fontRef>
+        </p:style>
+        <p:txBody>
+          <a:bodyPr rtlCol="0" anchor="ctr" lIns="0" rIns="0"/>
+          <a:lstStyle/>
+          <a:p>
+            <a:pPr algn="ctr"/>
+          </a:p>
+        </p:txBody>
+      </p:sp>
+      <p:sp>
+        <p:nvSpPr>
+          <p:cNvPr id="87" name="TextBox 86"/>
+          <p:cNvSpPr txBox="1"/>
+          <p:nvPr/>
+        </p:nvSpPr>
+        <p:spPr>
+          <a:xfrm>
+            <a:off x="777240" y="5367528"/>
+            <a:ext cx="2103120" cy="274320"/>
+          </a:xfrm>
+          <a:prstGeom prst="rect">
+            <a:avLst/>
+          </a:prstGeom>
+          <a:noFill/>
+        </p:spPr>
+        <p:txBody>
+          <a:bodyPr wrap="square" anchor="t" lIns="0" rIns="0" tIns="0" bIns="0">
+            <a:spAutoFit/>
+          </a:bodyPr>
+          <a:lstStyle/>
+          <a:p>
+            <a:pPr algn="l">
+              <a:lnSpc>
+                <a:spcPct val="115000"/>
+              </a:lnSpc>
+            </a:pPr>
+            <a:r>
+              <a:rPr sz="1200" b="1">
+                <a:solidFill>
+                  <a:srgbClr val="ECECE6"/>
+                </a:solidFill>
+                <a:latin typeface="Menlo"/>
+              </a:rPr>
+              <a:t>graph</a:t>
+            </a:r>
+          </a:p>
+        </p:txBody>
+      </p:sp>
+      <p:sp>
+        <p:nvSpPr>
+          <p:cNvPr id="88" name="TextBox 87"/>
+          <p:cNvSpPr txBox="1"/>
+          <p:nvPr/>
+        </p:nvSpPr>
+        <p:spPr>
+          <a:xfrm>
+            <a:off x="777240" y="5614416"/>
+            <a:ext cx="2103120" cy="320040"/>
+          </a:xfrm>
+          <a:prstGeom prst="rect">
+            <a:avLst/>
+          </a:prstGeom>
+          <a:noFill/>
+        </p:spPr>
+        <p:txBody>
+          <a:bodyPr wrap="square" anchor="t" lIns="0" rIns="0" tIns="0" bIns="0">
+            <a:spAutoFit/>
+          </a:bodyPr>
+          <a:lstStyle/>
+          <a:p>
+            <a:pPr algn="l">
+              <a:lnSpc>
+                <a:spcPct val="115000"/>
+              </a:lnSpc>
+            </a:pPr>
+            <a:r>
+              <a:rPr sz="850" b="0">
+                <a:solidFill>
+                  <a:srgbClr val="6F6E67"/>
+                </a:solidFill>
+                <a:latin typeface="PingFang SC"/>
+              </a:rPr>
+              <a:t>通用 IR 图：任意 fir/conv/cordic/fft 节点经 FIFO 级联</a:t>
+            </a:r>
+          </a:p>
+        </p:txBody>
+      </p:sp>
+      <p:sp>
+        <p:nvSpPr>
+          <p:cNvPr id="89" name="Rounded Rectangle 88"/>
+          <p:cNvSpPr/>
+          <p:nvPr/>
+        </p:nvSpPr>
+        <p:spPr>
+          <a:xfrm>
+            <a:off x="3017520" y="5321808"/>
+            <a:ext cx="1645920" cy="530352"/>
+          </a:xfrm>
+          <a:prstGeom prst="roundRect">
+            <a:avLst>
+              <a:gd name="adj" fmla="val 6000"/>
+            </a:avLst>
+          </a:prstGeom>
+          <a:solidFill>
+            <a:srgbClr val="262624"/>
+          </a:solidFill>
+          <a:ln w="9525">
+            <a:solidFill>
+              <a:srgbClr val="34C759"/>
+            </a:solidFill>
+          </a:ln>
+          <a:effectLst/>
+        </p:spPr>
+        <p:style>
+          <a:lnRef idx="1">
+            <a:schemeClr val="accent1"/>
+          </a:lnRef>
+          <a:fillRef idx="3">
+            <a:schemeClr val="accent1"/>
+          </a:fillRef>
+          <a:effectRef idx="2">
+            <a:schemeClr val="accent1"/>
+          </a:effectRef>
+          <a:fontRef idx="minor">
+            <a:schemeClr val="lt1"/>
+          </a:fontRef>
+        </p:style>
+        <p:txBody>
+          <a:bodyPr rtlCol="0" anchor="ctr" lIns="0" rIns="0"/>
+          <a:lstStyle/>
+          <a:p>
+            <a:pPr algn="ctr"/>
+          </a:p>
+        </p:txBody>
+      </p:sp>
+      <p:sp>
+        <p:nvSpPr>
+          <p:cNvPr id="90" name="TextBox 89"/>
+          <p:cNvSpPr txBox="1"/>
+          <p:nvPr/>
+        </p:nvSpPr>
+        <p:spPr>
+          <a:xfrm>
+            <a:off x="3108960" y="5458968"/>
+            <a:ext cx="1508760" cy="320040"/>
+          </a:xfrm>
+          <a:prstGeom prst="rect">
+            <a:avLst/>
+          </a:prstGeom>
+          <a:noFill/>
+        </p:spPr>
+        <p:txBody>
+          <a:bodyPr wrap="square" anchor="t" lIns="0" rIns="0" tIns="0" bIns="0">
+            <a:spAutoFit/>
+          </a:bodyPr>
+          <a:lstStyle/>
+          <a:p>
+            <a:pPr algn="l">
+              <a:lnSpc>
+                <a:spcPct val="115000"/>
+              </a:lnSpc>
+            </a:pPr>
+            <a:r>
+              <a:rPr sz="950" b="0">
+                <a:solidFill>
+                  <a:srgbClr val="34C759"/>
+                </a:solidFill>
+                <a:latin typeface="PingFang SC"/>
+              </a:rPr>
+              <a:t>● 真实任务达标</a:t>
+            </a:r>
+          </a:p>
+        </p:txBody>
+      </p:sp>
+      <p:sp>
+        <p:nvSpPr>
+          <p:cNvPr id="91" name="Rounded Rectangle 90"/>
+          <p:cNvSpPr/>
+          <p:nvPr/>
+        </p:nvSpPr>
+        <p:spPr>
+          <a:xfrm>
+            <a:off x="4754880" y="5321808"/>
+            <a:ext cx="1645920" cy="530352"/>
+          </a:xfrm>
+          <a:prstGeom prst="roundRect">
+            <a:avLst>
+              <a:gd name="adj" fmla="val 6000"/>
+            </a:avLst>
+          </a:prstGeom>
+          <a:solidFill>
+            <a:srgbClr val="0E0E0D"/>
+          </a:solidFill>
+          <a:ln w="9525">
+            <a:solidFill>
+              <a:srgbClr val="333331"/>
+            </a:solidFill>
+          </a:ln>
+          <a:effectLst/>
+        </p:spPr>
+        <p:style>
+          <a:lnRef idx="1">
+            <a:schemeClr val="accent1"/>
+          </a:lnRef>
+          <a:fillRef idx="3">
+            <a:schemeClr val="accent1"/>
+          </a:fillRef>
+          <a:effectRef idx="2">
+            <a:schemeClr val="accent1"/>
+          </a:effectRef>
+          <a:fontRef idx="minor">
+            <a:schemeClr val="lt1"/>
+          </a:fontRef>
+        </p:style>
+        <p:txBody>
+          <a:bodyPr rtlCol="0" anchor="ctr" lIns="0" rIns="0"/>
+          <a:lstStyle/>
+          <a:p>
+            <a:pPr algn="ctr"/>
+          </a:p>
+        </p:txBody>
+      </p:sp>
+      <p:sp>
+        <p:nvSpPr>
+          <p:cNvPr id="92" name="TextBox 91"/>
+          <p:cNvSpPr txBox="1"/>
+          <p:nvPr/>
+        </p:nvSpPr>
+        <p:spPr>
+          <a:xfrm>
+            <a:off x="4846320" y="5458968"/>
+            <a:ext cx="1508760" cy="320040"/>
+          </a:xfrm>
+          <a:prstGeom prst="rect">
+            <a:avLst/>
+          </a:prstGeom>
+          <a:noFill/>
+        </p:spPr>
+        <p:txBody>
+          <a:bodyPr wrap="square" anchor="t" lIns="0" rIns="0" tIns="0" bIns="0">
+            <a:spAutoFit/>
+          </a:bodyPr>
+          <a:lstStyle/>
+          <a:p>
+            <a:pPr algn="l">
+              <a:lnSpc>
+                <a:spcPct val="115000"/>
+              </a:lnSpc>
+            </a:pPr>
+            <a:r>
+              <a:rPr sz="950" b="0">
+                <a:solidFill>
+                  <a:srgbClr val="6F6E67"/>
+                </a:solidFill>
+                <a:latin typeface="PingFang SC"/>
+              </a:rPr>
+              <a:t>○ 未跑</a:t>
+            </a:r>
+          </a:p>
+        </p:txBody>
+      </p:sp>
+      <p:sp>
+        <p:nvSpPr>
+          <p:cNvPr id="93" name="Rounded Rectangle 92"/>
+          <p:cNvSpPr/>
+          <p:nvPr/>
+        </p:nvSpPr>
+        <p:spPr>
+          <a:xfrm>
+            <a:off x="6492240" y="5321808"/>
+            <a:ext cx="1645920" cy="530352"/>
+          </a:xfrm>
+          <a:prstGeom prst="roundRect">
+            <a:avLst>
+              <a:gd name="adj" fmla="val 6000"/>
+            </a:avLst>
+          </a:prstGeom>
+          <a:solidFill>
+            <a:srgbClr val="0E0E0D"/>
+          </a:solidFill>
+          <a:ln w="9525">
+            <a:solidFill>
+              <a:srgbClr val="333331"/>
+            </a:solidFill>
+          </a:ln>
+          <a:effectLst/>
+        </p:spPr>
+        <p:style>
+          <a:lnRef idx="1">
+            <a:schemeClr val="accent1"/>
+          </a:lnRef>
+          <a:fillRef idx="3">
+            <a:schemeClr val="accent1"/>
+          </a:fillRef>
+          <a:effectRef idx="2">
+            <a:schemeClr val="accent1"/>
+          </a:effectRef>
+          <a:fontRef idx="minor">
+            <a:schemeClr val="lt1"/>
+          </a:fontRef>
+        </p:style>
+        <p:txBody>
+          <a:bodyPr rtlCol="0" anchor="ctr" lIns="0" rIns="0"/>
+          <a:lstStyle/>
+          <a:p>
+            <a:pPr algn="ctr"/>
+          </a:p>
+        </p:txBody>
+      </p:sp>
+      <p:sp>
+        <p:nvSpPr>
+          <p:cNvPr id="94" name="TextBox 93"/>
+          <p:cNvSpPr txBox="1"/>
+          <p:nvPr/>
+        </p:nvSpPr>
+        <p:spPr>
+          <a:xfrm>
+            <a:off x="6583680" y="5458968"/>
+            <a:ext cx="1508760" cy="320040"/>
+          </a:xfrm>
+          <a:prstGeom prst="rect">
+            <a:avLst/>
+          </a:prstGeom>
+          <a:noFill/>
+        </p:spPr>
+        <p:txBody>
+          <a:bodyPr wrap="square" anchor="t" lIns="0" rIns="0" tIns="0" bIns="0">
+            <a:spAutoFit/>
+          </a:bodyPr>
+          <a:lstStyle/>
+          <a:p>
+            <a:pPr algn="l">
+              <a:lnSpc>
+                <a:spcPct val="115000"/>
+              </a:lnSpc>
+            </a:pPr>
+            <a:r>
+              <a:rPr sz="950" b="0">
+                <a:solidFill>
+                  <a:srgbClr val="6F6E67"/>
+                </a:solidFill>
+                <a:latin typeface="PingFang SC"/>
+              </a:rPr>
+              <a:t>○ 未跑</a:t>
+            </a:r>
+          </a:p>
+        </p:txBody>
+      </p:sp>
+      <p:sp>
+        <p:nvSpPr>
+          <p:cNvPr id="95" name="Rounded Rectangle 94"/>
+          <p:cNvSpPr/>
+          <p:nvPr/>
+        </p:nvSpPr>
+        <p:spPr>
+          <a:xfrm>
+            <a:off x="8229600" y="5321808"/>
+            <a:ext cx="1645920" cy="530352"/>
           </a:xfrm>
           <a:prstGeom prst="roundRect">
             <a:avLst>
@@ -6446,33 +8429,33 @@
       </p:sp>
       <p:sp>
         <p:nvSpPr>
-          <p:cNvPr id="50" name="TextBox 49"/>
-          <p:cNvSpPr txBox="1"/>
-          <p:nvPr/>
-        </p:nvSpPr>
-        <p:spPr>
-          <a:xfrm>
-            <a:off x="9573768" y="4507992"/>
-            <a:ext cx="1874520" cy="365760"/>
-          </a:xfrm>
-          <a:prstGeom prst="rect">
-            <a:avLst/>
-          </a:prstGeom>
-          <a:noFill/>
-        </p:spPr>
-        <p:txBody>
-          <a:bodyPr wrap="square" anchor="t" lIns="0" rIns="0" tIns="0" bIns="0">
-            <a:spAutoFit/>
-          </a:bodyPr>
-          <a:lstStyle/>
-          <a:p>
-            <a:pPr algn="l">
-              <a:lnSpc>
-                <a:spcPct val="115000"/>
-              </a:lnSpc>
-            </a:pPr>
-            <a:r>
-              <a:rPr sz="1050" b="0">
+          <p:cNvPr id="96" name="TextBox 95"/>
+          <p:cNvSpPr txBox="1"/>
+          <p:nvPr/>
+        </p:nvSpPr>
+        <p:spPr>
+          <a:xfrm>
+            <a:off x="8321040" y="5458968"/>
+            <a:ext cx="1508760" cy="320040"/>
+          </a:xfrm>
+          <a:prstGeom prst="rect">
+            <a:avLst/>
+          </a:prstGeom>
+          <a:noFill/>
+        </p:spPr>
+        <p:txBody>
+          <a:bodyPr wrap="square" anchor="t" lIns="0" rIns="0" tIns="0" bIns="0">
+            <a:spAutoFit/>
+          </a:bodyPr>
+          <a:lstStyle/>
+          <a:p>
+            <a:pPr algn="l">
+              <a:lnSpc>
+                <a:spcPct val="115000"/>
+              </a:lnSpc>
+            </a:pPr>
+            <a:r>
+              <a:rPr sz="950" b="0">
                 <a:solidFill>
                   <a:srgbClr val="4A90E2"/>
                 </a:solidFill>
@@ -6485,227 +8468,14 @@
       </p:sp>
       <p:sp>
         <p:nvSpPr>
-          <p:cNvPr id="51" name="Rounded Rectangle 50"/>
+          <p:cNvPr id="97" name="Rounded Rectangle 96"/>
           <p:cNvSpPr/>
           <p:nvPr/>
         </p:nvSpPr>
         <p:spPr>
           <a:xfrm>
-            <a:off x="640080" y="5120640"/>
-            <a:ext cx="2286000" cy="777240"/>
-          </a:xfrm>
-          <a:prstGeom prst="roundRect">
-            <a:avLst>
-              <a:gd name="adj" fmla="val 6000"/>
-            </a:avLst>
-          </a:prstGeom>
-          <a:solidFill>
-            <a:srgbClr val="1C1C1B"/>
-          </a:solidFill>
-          <a:ln w="9525">
-            <a:solidFill>
-              <a:srgbClr val="333331"/>
-            </a:solidFill>
-          </a:ln>
-          <a:effectLst/>
-        </p:spPr>
-        <p:style>
-          <a:lnRef idx="1">
-            <a:schemeClr val="accent1"/>
-          </a:lnRef>
-          <a:fillRef idx="3">
-            <a:schemeClr val="accent1"/>
-          </a:fillRef>
-          <a:effectRef idx="2">
-            <a:schemeClr val="accent1"/>
-          </a:effectRef>
-          <a:fontRef idx="minor">
-            <a:schemeClr val="lt1"/>
-          </a:fontRef>
-        </p:style>
-        <p:txBody>
-          <a:bodyPr rtlCol="0" anchor="ctr" lIns="0" rIns="0"/>
-          <a:lstStyle/>
-          <a:p>
-            <a:pPr algn="ctr"/>
-          </a:p>
-        </p:txBody>
-      </p:sp>
-      <p:sp>
-        <p:nvSpPr>
-          <p:cNvPr id="52" name="TextBox 51"/>
-          <p:cNvSpPr txBox="1"/>
-          <p:nvPr/>
-        </p:nvSpPr>
-        <p:spPr>
-          <a:xfrm>
-            <a:off x="777240" y="5212080"/>
-            <a:ext cx="2103120" cy="274320"/>
-          </a:xfrm>
-          <a:prstGeom prst="rect">
-            <a:avLst/>
-          </a:prstGeom>
-          <a:noFill/>
-        </p:spPr>
-        <p:txBody>
-          <a:bodyPr wrap="square" anchor="t" lIns="0" rIns="0" tIns="0" bIns="0">
-            <a:spAutoFit/>
-          </a:bodyPr>
-          <a:lstStyle/>
-          <a:p>
-            <a:pPr algn="l">
-              <a:lnSpc>
-                <a:spcPct val="115000"/>
-              </a:lnSpc>
-            </a:pPr>
-            <a:r>
-              <a:rPr sz="1300" b="1">
-                <a:solidFill>
-                  <a:srgbClr val="ECECE6"/>
-                </a:solidFill>
-                <a:latin typeface="Menlo"/>
-              </a:rPr>
-              <a:t>fir_chain</a:t>
-            </a:r>
-          </a:p>
-        </p:txBody>
-      </p:sp>
-      <p:sp>
-        <p:nvSpPr>
-          <p:cNvPr id="53" name="TextBox 52"/>
-          <p:cNvSpPr txBox="1"/>
-          <p:nvPr/>
-        </p:nvSpPr>
-        <p:spPr>
-          <a:xfrm>
-            <a:off x="777240" y="5486400"/>
-            <a:ext cx="2103120" cy="411480"/>
-          </a:xfrm>
-          <a:prstGeom prst="rect">
-            <a:avLst/>
-          </a:prstGeom>
-          <a:noFill/>
-        </p:spPr>
-        <p:txBody>
-          <a:bodyPr wrap="square" anchor="t" lIns="0" rIns="0" tIns="0" bIns="0">
-            <a:spAutoFit/>
-          </a:bodyPr>
-          <a:lstStyle/>
-          <a:p>
-            <a:pPr algn="l">
-              <a:lnSpc>
-                <a:spcPct val="115000"/>
-              </a:lnSpc>
-            </a:pPr>
-            <a:r>
-              <a:rPr sz="950" b="0">
-                <a:solidFill>
-                  <a:srgbClr val="6F6E67"/>
-                </a:solidFill>
-                <a:latin typeface="PingFang SC"/>
-              </a:rPr>
-              <a:t>组合：多级 FIR 经 FIFO 级联（每级独立旋钮）</a:t>
-            </a:r>
-          </a:p>
-        </p:txBody>
-      </p:sp>
-      <p:sp>
-        <p:nvSpPr>
-          <p:cNvPr id="54" name="Rounded Rectangle 53"/>
-          <p:cNvSpPr/>
-          <p:nvPr/>
-        </p:nvSpPr>
-        <p:spPr>
-          <a:xfrm>
-            <a:off x="3017520" y="5120640"/>
-            <a:ext cx="2057400" cy="777240"/>
-          </a:xfrm>
-          <a:prstGeom prst="roundRect">
-            <a:avLst>
-              <a:gd name="adj" fmla="val 6000"/>
-            </a:avLst>
-          </a:prstGeom>
-          <a:solidFill>
-            <a:srgbClr val="262624"/>
-          </a:solidFill>
-          <a:ln w="9525">
-            <a:solidFill>
-              <a:srgbClr val="34C759"/>
-            </a:solidFill>
-          </a:ln>
-          <a:effectLst/>
-        </p:spPr>
-        <p:style>
-          <a:lnRef idx="1">
-            <a:schemeClr val="accent1"/>
-          </a:lnRef>
-          <a:fillRef idx="3">
-            <a:schemeClr val="accent1"/>
-          </a:fillRef>
-          <a:effectRef idx="2">
-            <a:schemeClr val="accent1"/>
-          </a:effectRef>
-          <a:fontRef idx="minor">
-            <a:schemeClr val="lt1"/>
-          </a:fontRef>
-        </p:style>
-        <p:txBody>
-          <a:bodyPr rtlCol="0" anchor="ctr" lIns="0" rIns="0"/>
-          <a:lstStyle/>
-          <a:p>
-            <a:pPr algn="ctr"/>
-          </a:p>
-        </p:txBody>
-      </p:sp>
-      <p:sp>
-        <p:nvSpPr>
-          <p:cNvPr id="55" name="TextBox 54"/>
-          <p:cNvSpPr txBox="1"/>
-          <p:nvPr/>
-        </p:nvSpPr>
-        <p:spPr>
-          <a:xfrm>
-            <a:off x="3127248" y="5376672"/>
-            <a:ext cx="1874520" cy="365760"/>
-          </a:xfrm>
-          <a:prstGeom prst="rect">
-            <a:avLst/>
-          </a:prstGeom>
-          <a:noFill/>
-        </p:spPr>
-        <p:txBody>
-          <a:bodyPr wrap="square" anchor="t" lIns="0" rIns="0" tIns="0" bIns="0">
-            <a:spAutoFit/>
-          </a:bodyPr>
-          <a:lstStyle/>
-          <a:p>
-            <a:pPr algn="l">
-              <a:lnSpc>
-                <a:spcPct val="115000"/>
-              </a:lnSpc>
-            </a:pPr>
-            <a:r>
-              <a:rPr sz="1050" b="0">
-                <a:solidFill>
-                  <a:srgbClr val="34C759"/>
-                </a:solidFill>
-                <a:latin typeface="PingFang SC"/>
-              </a:rPr>
-              <a:t>● 真实任务达标</a:t>
-            </a:r>
-          </a:p>
-        </p:txBody>
-      </p:sp>
-      <p:sp>
-        <p:nvSpPr>
-          <p:cNvPr id="56" name="Rounded Rectangle 55"/>
-          <p:cNvSpPr/>
-          <p:nvPr/>
-        </p:nvSpPr>
-        <p:spPr>
-          <a:xfrm>
-            <a:off x="5166360" y="5120640"/>
-            <a:ext cx="2057400" cy="777240"/>
+            <a:off x="9966960" y="5321808"/>
+            <a:ext cx="1645920" cy="530352"/>
           </a:xfrm>
           <a:prstGeom prst="roundRect">
             <a:avLst>
@@ -6746,33 +8516,33 @@
       </p:sp>
       <p:sp>
         <p:nvSpPr>
-          <p:cNvPr id="57" name="TextBox 56"/>
-          <p:cNvSpPr txBox="1"/>
-          <p:nvPr/>
-        </p:nvSpPr>
-        <p:spPr>
-          <a:xfrm>
-            <a:off x="5276088" y="5376672"/>
-            <a:ext cx="1874520" cy="365760"/>
-          </a:xfrm>
-          <a:prstGeom prst="rect">
-            <a:avLst/>
-          </a:prstGeom>
-          <a:noFill/>
-        </p:spPr>
-        <p:txBody>
-          <a:bodyPr wrap="square" anchor="t" lIns="0" rIns="0" tIns="0" bIns="0">
-            <a:spAutoFit/>
-          </a:bodyPr>
-          <a:lstStyle/>
-          <a:p>
-            <a:pPr algn="l">
-              <a:lnSpc>
-                <a:spcPct val="115000"/>
-              </a:lnSpc>
-            </a:pPr>
-            <a:r>
-              <a:rPr sz="1050" b="0">
+          <p:cNvPr id="98" name="TextBox 97"/>
+          <p:cNvSpPr txBox="1"/>
+          <p:nvPr/>
+        </p:nvSpPr>
+        <p:spPr>
+          <a:xfrm>
+            <a:off x="10058400" y="5458968"/>
+            <a:ext cx="1508760" cy="320040"/>
+          </a:xfrm>
+          <a:prstGeom prst="rect">
+            <a:avLst/>
+          </a:prstGeom>
+          <a:noFill/>
+        </p:spPr>
+        <p:txBody>
+          <a:bodyPr wrap="square" anchor="t" lIns="0" rIns="0" tIns="0" bIns="0">
+            <a:spAutoFit/>
+          </a:bodyPr>
+          <a:lstStyle/>
+          <a:p>
+            <a:pPr algn="l">
+              <a:lnSpc>
+                <a:spcPct val="115000"/>
+              </a:lnSpc>
+            </a:pPr>
+            <a:r>
+              <a:rPr sz="950" b="0">
                 <a:solidFill>
                   <a:srgbClr val="6F6E67"/>
                 </a:solidFill>
@@ -6785,207 +8555,33 @@
       </p:sp>
       <p:sp>
         <p:nvSpPr>
-          <p:cNvPr id="58" name="Rounded Rectangle 57"/>
-          <p:cNvSpPr/>
-          <p:nvPr/>
-        </p:nvSpPr>
-        <p:spPr>
-          <a:xfrm>
-            <a:off x="7315200" y="5120640"/>
-            <a:ext cx="2057400" cy="777240"/>
-          </a:xfrm>
-          <a:prstGeom prst="roundRect">
-            <a:avLst>
-              <a:gd name="adj" fmla="val 6000"/>
-            </a:avLst>
-          </a:prstGeom>
-          <a:solidFill>
-            <a:srgbClr val="262624"/>
-          </a:solidFill>
-          <a:ln w="9525">
-            <a:solidFill>
-              <a:srgbClr val="4A90E2"/>
-            </a:solidFill>
-          </a:ln>
-          <a:effectLst/>
-        </p:spPr>
-        <p:style>
-          <a:lnRef idx="1">
-            <a:schemeClr val="accent1"/>
-          </a:lnRef>
-          <a:fillRef idx="3">
-            <a:schemeClr val="accent1"/>
-          </a:fillRef>
-          <a:effectRef idx="2">
-            <a:schemeClr val="accent1"/>
-          </a:effectRef>
-          <a:fontRef idx="minor">
-            <a:schemeClr val="lt1"/>
-          </a:fontRef>
-        </p:style>
-        <p:txBody>
-          <a:bodyPr rtlCol="0" anchor="ctr" lIns="0" rIns="0"/>
-          <a:lstStyle/>
-          <a:p>
-            <a:pPr algn="ctr"/>
-          </a:p>
-        </p:txBody>
-      </p:sp>
-      <p:sp>
-        <p:nvSpPr>
-          <p:cNvPr id="59" name="TextBox 58"/>
-          <p:cNvSpPr txBox="1"/>
-          <p:nvPr/>
-        </p:nvSpPr>
-        <p:spPr>
-          <a:xfrm>
-            <a:off x="7424928" y="5376672"/>
-            <a:ext cx="1874520" cy="365760"/>
-          </a:xfrm>
-          <a:prstGeom prst="rect">
-            <a:avLst/>
-          </a:prstGeom>
-          <a:noFill/>
-        </p:spPr>
-        <p:txBody>
-          <a:bodyPr wrap="square" anchor="t" lIns="0" rIns="0" tIns="0" bIns="0">
-            <a:spAutoFit/>
-          </a:bodyPr>
-          <a:lstStyle/>
-          <a:p>
-            <a:pPr algn="l">
-              <a:lnSpc>
-                <a:spcPct val="115000"/>
-              </a:lnSpc>
-            </a:pPr>
-            <a:r>
-              <a:rPr sz="1050" b="0">
-                <a:solidFill>
-                  <a:srgbClr val="4A90E2"/>
-                </a:solidFill>
-                <a:latin typeface="PingFang SC"/>
-              </a:rPr>
-              <a:t>● EDA + 网表仿真通过</a:t>
-            </a:r>
-          </a:p>
-        </p:txBody>
-      </p:sp>
-      <p:sp>
-        <p:nvSpPr>
-          <p:cNvPr id="60" name="Rounded Rectangle 59"/>
-          <p:cNvSpPr/>
-          <p:nvPr/>
-        </p:nvSpPr>
-        <p:spPr>
-          <a:xfrm>
-            <a:off x="9464040" y="5120640"/>
-            <a:ext cx="2057400" cy="777240"/>
-          </a:xfrm>
-          <a:prstGeom prst="roundRect">
-            <a:avLst>
-              <a:gd name="adj" fmla="val 6000"/>
-            </a:avLst>
-          </a:prstGeom>
-          <a:solidFill>
-            <a:srgbClr val="262624"/>
-          </a:solidFill>
-          <a:ln w="9525">
-            <a:solidFill>
-              <a:srgbClr val="4A90E2"/>
-            </a:solidFill>
-          </a:ln>
-          <a:effectLst/>
-        </p:spPr>
-        <p:style>
-          <a:lnRef idx="1">
-            <a:schemeClr val="accent1"/>
-          </a:lnRef>
-          <a:fillRef idx="3">
-            <a:schemeClr val="accent1"/>
-          </a:fillRef>
-          <a:effectRef idx="2">
-            <a:schemeClr val="accent1"/>
-          </a:effectRef>
-          <a:fontRef idx="minor">
-            <a:schemeClr val="lt1"/>
-          </a:fontRef>
-        </p:style>
-        <p:txBody>
-          <a:bodyPr rtlCol="0" anchor="ctr" lIns="0" rIns="0"/>
-          <a:lstStyle/>
-          <a:p>
-            <a:pPr algn="ctr"/>
-          </a:p>
-        </p:txBody>
-      </p:sp>
-      <p:sp>
-        <p:nvSpPr>
-          <p:cNvPr id="61" name="TextBox 60"/>
-          <p:cNvSpPr txBox="1"/>
-          <p:nvPr/>
-        </p:nvSpPr>
-        <p:spPr>
-          <a:xfrm>
-            <a:off x="9573768" y="5376672"/>
-            <a:ext cx="1874520" cy="365760"/>
-          </a:xfrm>
-          <a:prstGeom prst="rect">
-            <a:avLst/>
-          </a:prstGeom>
-          <a:noFill/>
-        </p:spPr>
-        <p:txBody>
-          <a:bodyPr wrap="square" anchor="t" lIns="0" rIns="0" tIns="0" bIns="0">
-            <a:spAutoFit/>
-          </a:bodyPr>
-          <a:lstStyle/>
-          <a:p>
-            <a:pPr algn="l">
-              <a:lnSpc>
-                <a:spcPct val="115000"/>
-              </a:lnSpc>
-            </a:pPr>
-            <a:r>
-              <a:rPr sz="1050" b="0">
-                <a:solidFill>
-                  <a:srgbClr val="4A90E2"/>
-                </a:solidFill>
-                <a:latin typeface="PingFang SC"/>
-              </a:rPr>
-              <a:t>● EDA + 网表仿真通过</a:t>
-            </a:r>
-          </a:p>
-        </p:txBody>
-      </p:sp>
-      <p:sp>
-        <p:nvSpPr>
-          <p:cNvPr id="62" name="TextBox 61"/>
-          <p:cNvSpPr txBox="1"/>
-          <p:nvPr/>
-        </p:nvSpPr>
-        <p:spPr>
-          <a:xfrm>
-            <a:off x="640080" y="5623560"/>
-            <a:ext cx="10972800" cy="731520"/>
-          </a:xfrm>
-          <a:prstGeom prst="rect">
-            <a:avLst/>
-          </a:prstGeom>
-          <a:noFill/>
-        </p:spPr>
-        <p:txBody>
-          <a:bodyPr wrap="square" anchor="t" lIns="0" rIns="0" tIns="0" bIns="0">
-            <a:spAutoFit/>
-          </a:bodyPr>
-          <a:lstStyle/>
-          <a:p>
-            <a:pPr algn="l">
-              <a:lnSpc>
-                <a:spcPct val="130000"/>
-              </a:lnSpc>
-            </a:pPr>
-            <a:r>
-              <a:rPr sz="1200" b="0">
+          <p:cNvPr id="99" name="TextBox 98"/>
+          <p:cNvSpPr txBox="1"/>
+          <p:nvPr/>
+        </p:nvSpPr>
+        <p:spPr>
+          <a:xfrm>
+            <a:off x="640080" y="5897880"/>
+            <a:ext cx="10972800" cy="548640"/>
+          </a:xfrm>
+          <a:prstGeom prst="rect">
+            <a:avLst/>
+          </a:prstGeom>
+          <a:noFill/>
+        </p:spPr>
+        <p:txBody>
+          <a:bodyPr wrap="square" anchor="t" lIns="0" rIns="0" tIns="0" bIns="0">
+            <a:spAutoFit/>
+          </a:bodyPr>
+          <a:lstStyle/>
+          <a:p>
+            <a:pPr algn="l">
+              <a:lnSpc>
+                <a:spcPct val="125000"/>
+              </a:lnSpc>
+            </a:pPr>
+            <a:r>
+              <a:rPr sz="1100" b="0">
                 <a:solidFill>
                   <a:srgbClr val="A9A89F"/>
                 </a:solidFill>
@@ -6997,11 +8593,11 @@
           <a:p>
             <a:pPr algn="l">
               <a:lnSpc>
-                <a:spcPct val="130000"/>
-              </a:lnSpc>
-            </a:pPr>
-            <a:r>
-              <a:rPr sz="1200" b="0">
+                <a:spcPct val="125000"/>
+              </a:lnSpc>
+            </a:pPr>
+            <a:r>
+              <a:rPr sz="1100" b="0">
                 <a:solidFill>
                   <a:srgbClr val="A9A89F"/>
                 </a:solidFill>
@@ -7010,13 +8606,13 @@
               <a:t>黑盒原语自己建模：</a:t>
             </a:r>
             <a:r>
-              <a:rPr sz="1200" b="0">
+              <a:rPr sz="1100" b="0">
                 <a:solidFill>
                   <a:srgbClr val="A9A89F"/>
                 </a:solidFill>
                 <a:latin typeface="PingFang SC"/>
               </a:rPr>
-              <a:t>DP16KD / Gowin DPX9B、SP、SPX9、MULT9X9/18X18 的仿真模型按 yosys 的驱动方式写出，所以每个开源后端都能跑综合后网表仿真。</a:t>
+              <a:t>DP16KD / Gowin BRAM / MULT 的仿真模型按 yosys 的驱动方式写出，所以每个开源后端都能跑综合后网表仿真。Artix-7 后端已写好，等 Vivado 装上器件文件即启用。</a:t>
             </a:r>
           </a:p>
         </p:txBody>
@@ -7285,7 +8881,7 @@
                 </a:solidFill>
                 <a:latin typeface="PingFang SC"/>
               </a:rPr>
-              <a:t>回归基准集</a:t>
+              <a:t>形式等价（SymbiYosys BMC）</a:t>
             </a:r>
           </a:p>
         </p:txBody>
@@ -7324,7 +8920,7 @@
                 </a:solidFill>
                 <a:latin typeface="PingFang SC"/>
               </a:rPr>
-              <a:t>11 个固定规格 × 期望（可行 / 几轮内可行），当作普通任务提交、打分、落盘；`bench show` 并排看最近几次。首轮开源 8 例 8/8，平均第 1.6 轮可行。</a:t>
+              <a:t>miter 把「实测过的 RTL」和「同一 IR 的重新生成」接同一组自由输入，逐拍断言所有输出相等；外加流形协议性质（复位期间无 valid、无握手撤回）。正/负对照都验证过：篡改一份就 FAIL。生成器重构从此有闸门。</a:t>
             </a:r>
           </a:p>
         </p:txBody>
@@ -7411,7 +9007,7 @@
                 </a:solidFill>
                 <a:latin typeface="PingFang SC"/>
               </a:rPr>
-              <a:t>多种子 Fmax</a:t>
+              <a:t>功能覆盖率</a:t>
             </a:r>
           </a:p>
         </p:txBody>
@@ -7450,7 +9046,7 @@
                 </a:solidFill>
                 <a:latin typeface="PingFang SC"/>
               </a:rPr>
-              <a:t>开源后端每个设计布线 3 个种子，报中位数并显示区间（ECP5 上 ±3–5%）。规划器也看到区间，不再被一次布线的运气判「差 4 MHz」。</a:t>
+              <a:t>每个 cocotb 测试上报命名 bins（背靠背 / 间隔 / 反压停顿 / 极值操作数 / 帧重启…）进 sim_coverage；「仿真通过」会说明到底练了什么。</a:t>
             </a:r>
           </a:p>
         </p:txBody>
@@ -7537,7 +9133,7 @@
                 </a:solidFill>
                 <a:latin typeface="PingFang SC"/>
               </a:rPr>
-              <a:t>停机必须给证据</a:t>
+              <a:t>每晚回归 + 退化告警</a:t>
             </a:r>
           </a:p>
         </p:txBody>
@@ -7576,7 +9172,7 @@
                 </a:solidFill>
                 <a:latin typeface="PingFang SC"/>
               </a:rPr>
-              <a:t>规划器只能带着 stop_reason 停：触到了哪个上界（DSP 上限、累加位宽下限、器件本征级）、试过哪些旋钮没用。叙述里直接说「为什么停」。</a:t>
+              <a:t>14 个固定规格 × 期望（可行 / 几轮内可行），03:17 由 cron 在 EDA 主机上跑开源后端，与上一份报告逐例比对，退化即标红（/api/bench）。多种子 Fmax：3 个种子取中位数并显示区间。</a:t>
             </a:r>
           </a:p>
         </p:txBody>
@@ -7663,7 +9259,7 @@
                 </a:solidFill>
                 <a:latin typeface="PingFang SC"/>
               </a:rPr>
-              <a:t>跨运行 Pareto 前沿</a:t>
+              <a:t>停机必须给证据</a:t>
             </a:r>
           </a:p>
         </p:txBody>
@@ -7702,7 +9298,7 @@
                 </a:solidFill>
                 <a:latin typeface="PingFang SC"/>
               </a:rPr>
-              <a:t>同一设计类型在同一芯片上的所有实测点，取非支配集；「≥180 MHz、≤32 DSP 最好能到多少」直接从 20 个实测点里回答，不用重新跑。聊天回答也用它。</a:t>
+              <a:t>规划器只能带着 stop_reason 停：触到了哪个上界（DSP 上限、累加位宽下限、乘法器本征级）。叙述里直接说「为什么停」；候选并行评估时，次优点也进历史。</a:t>
             </a:r>
           </a:p>
         </p:txBody>
@@ -7789,7 +9385,7 @@
                 </a:solidFill>
                 <a:latin typeface="PingFang SC"/>
               </a:rPr>
-              <a:t>功耗维度</a:t>
+              <a:t>跨运行 Pareto + 功耗</a:t>
             </a:r>
           </a:p>
         </p:txBody>
@@ -7828,7 +9424,7 @@
                 </a:solidFill>
                 <a:latin typeface="PingFang SC"/>
               </a:rPr>
-              <a:t>Vivado report_power 动态功耗 → power_mw，可作约束 max_power_mw 和目标 minimize_power。</a:t>
+              <a:t>同一设计在同一芯片上的所有实测点取非支配集，「≥180 MHz、≤32 DSP 最好能到多少」从实测点回答；Vivado report_power → power_mw 可作约束与目标。</a:t>
             </a:r>
           </a:p>
         </p:txBody>
@@ -7915,7 +9511,7 @@
                 </a:solidFill>
                 <a:latin typeface="PingFang SC"/>
               </a:rPr>
-              <a:t>交付包</a:t>
+              <a:t>交付包 + 板级工程</a:t>
             </a:r>
           </a:p>
         </p:txBody>
@@ -7954,7 +9550,7 @@
                 </a:solidFill>
                 <a:latin typeface="PingFang SC"/>
               </a:rPr>
-              <a:t>zip：RTL + AXI4-Stream 包装（带输出 FIFO，随机反压下验证）+ 自检向量 testbench + 工具报告 + 轨迹 + README。拖进 Vivado IP Integrator 就能用。</a:t>
+              <a:t>zip：RTL + AXI4-Stream 包装（FIR 可带 AXI4-Lite 系数端口）+ 自检向量 testbench + 工具报告 + 轨迹 + README + create_vivado.tcl/XDC 或 build_oss.sh。拖进 IP Integrator 就能用。</a:t>
             </a:r>
           </a:p>
         </p:txBody>
@@ -10200,7 +11796,7 @@
                 </a:solidFill>
                 <a:latin typeface="PingFang SC"/>
               </a:rPr>
-              <a:t>✓ 后端插件化：ECP5 / Spartan-7 / iCE40 / Gowin</a:t>
+              <a:t>✓ 5 种器件插件：ECP5 / Spartan-7 / iCE40 / Gowin / GateMate</a:t>
             </a:r>
           </a:p>
           <a:p>
@@ -10216,7 +11812,7 @@
                 </a:solidFill>
                 <a:latin typeface="PingFang SC"/>
               </a:rPr>
-              <a:t>✓ 第三、四类生成器：conv2d（BRAM）、fir_chain（组合数据通路）</a:t>
+              <a:t>✓ 7 类生成器：matmul、FIR(+系数端口)、conv2d、FIR 级联、CORDIC、FFT、通用 IR 图</a:t>
             </a:r>
           </a:p>
           <a:p>
@@ -10232,7 +11828,7 @@
                 </a:solidFill>
                 <a:latin typeface="PingFang SC"/>
               </a:rPr>
-              <a:t>✓ 回归基准集 + 多种子 Fmax + 停机证据</a:t>
+              <a:t>✓ 并行候选评估 + kNN 校准估算（Gowin Fmax 误差 53%→13%）</a:t>
             </a:r>
           </a:p>
           <a:p>
@@ -10248,7 +11844,7 @@
                 </a:solidFill>
                 <a:latin typeface="PingFang SC"/>
               </a:rPr>
-              <a:t>✓ 跨运行 Pareto 前沿 + 功耗维度</a:t>
+              <a:t>✓ 形式等价 + 覆盖率 + 每晚回归告警 + 多种子 Fmax</a:t>
             </a:r>
           </a:p>
           <a:p>
@@ -10264,7 +11860,7 @@
                 </a:solidFill>
                 <a:latin typeface="PingFang SC"/>
               </a:rPr>
-              <a:t>✓ 交付包：RTL + AXI-Stream + testbench + 报告</a:t>
+              <a:t>✓ 交付包含板级工程；规划器多模型 A/B 开关</a:t>
             </a:r>
           </a:p>
           <a:p>
@@ -10280,7 +11876,7 @@
                 </a:solidFill>
                 <a:latin typeface="PingFang SC"/>
               </a:rPr>
-              <a:t>✓ 聊天：ETA、替代方案一键追问、会话隔离/重命名</a:t>
+              <a:t>✓ 聊天：ETA、架构替代方案一键追问、会话隔离</a:t>
             </a:r>
           </a:p>
         </p:txBody>
@@ -10450,7 +12046,7 @@
                 </a:solidFill>
                 <a:latin typeface="PingFang SC"/>
               </a:rPr>
-              <a:t>• 更多生成器：FFT、CORDIC、行缓冲 + 池化、systolic 以外的 matmul 形态（dot-product 折叠）</a:t>
+              <a:t>• Artix-7 / UltraScale+：装上 Vivado 器件文件即启用（后端已写好）</a:t>
             </a:r>
           </a:p>
           <a:p>
@@ -10466,7 +12062,7 @@
                 </a:solidFill>
                 <a:latin typeface="PingFang SC"/>
               </a:rPr>
-              <a:t>• 架构级 A/B：同一规格先在多个生成器间做选择，再在选中者内优化</a:t>
+              <a:t>• 更多节点：池化、滑窗 max、dot-product 折叠 matmul、CIC 抽取</a:t>
             </a:r>
           </a:p>
           <a:p>
@@ -10482,7 +12078,7 @@
                 </a:solidFill>
                 <a:latin typeface="PingFang SC"/>
               </a:rPr>
-              <a:t>• 通用 IR 图：任意 valid/ready 模块按图级联（fir_chain 的推广）</a:t>
+              <a:t>• 估算器上做贝叶斯优化：用 kNN 后验直接提候选，减少规划器调用</a:t>
             </a:r>
           </a:p>
           <a:p>
@@ -10498,7 +12094,7 @@
                 </a:solidFill>
                 <a:latin typeface="PingFang SC"/>
               </a:rPr>
-              <a:t>• 每晚回归常态化 + 记忆/估算退化告警</a:t>
+              <a:t>• 多模型规划器基准对照（DeepSeek-reasoner / Claude / GPT）跑进每晚回归</a:t>
             </a:r>
           </a:p>
         </p:txBody>
@@ -10668,7 +12264,7 @@
                 </a:solidFill>
                 <a:latin typeface="PingFang SC"/>
               </a:rPr>
-              <a:t>• UltraScale+、Artix-7、GateMate：一个后端文件一个器件</a:t>
+              <a:t>• 有板后：ILA/VIO 在板验证作为第六级</a:t>
             </a:r>
           </a:p>
           <a:p>
@@ -10684,7 +12280,7 @@
                 </a:solidFill>
                 <a:latin typeface="PingFang SC"/>
               </a:rPr>
-              <a:t>• 有板后：ILA/VIO 在板验证作为第六级</a:t>
+              <a:t>• 开放 IR 规范（/schema 已导出），让外部生成器接入；设计记忆跨用户共享（可审计）</a:t>
             </a:r>
           </a:p>
           <a:p>
@@ -10700,7 +12296,7 @@
                 </a:solidFill>
                 <a:latin typeface="PingFang SC"/>
               </a:rPr>
-              <a:t>• 开放 IR 规范，让别人的生成器接入；设计记忆跨用户共享（可审计）</a:t>
+              <a:t>• 形式等价扩展到跨 IR（折叠 vs 展开同一滤波器）</a:t>
             </a:r>
           </a:p>
           <a:p>
@@ -10716,7 +12312,7 @@
                 </a:solidFill>
                 <a:latin typeface="PingFang SC"/>
               </a:rPr>
-              <a:t>• 多模型规划器（DeepSeek / Claude / GPT）A/B 与基准集对照</a:t>
+              <a:t>• 从 SDF 时序仿真到门级功耗估计</a:t>
             </a:r>
           </a:p>
         </p:txBody>
@@ -10820,7 +12416,7 @@
                 </a:solidFill>
                 <a:latin typeface="PingFang SC"/>
               </a:rPr>
-              <a:t>• 4 类生成器（matmul、FIR、conv2d、FIR 级联）× 4 种器件（ECP5、Spartan-7、iCE40、Gowin），13 个真实任务达标，最高 319.5 MHz</a:t>
+              <a:t>• 7 类生成器（matmul、FIR、conv2d、FIR 级联、CORDIC、FFT、通用 IR 图）× 5 种器件，20+ 个真实任务达标，最高 319.5 MHz</a:t>
             </a:r>
           </a:p>
           <a:p>
@@ -10836,7 +12432,7 @@
                 </a:solidFill>
                 <a:latin typeface="PingFang SC"/>
               </a:rPr>
-              <a:t>• 五级仿真阶梯 + 真实布局布线签核 + 3 种子中位数 Fmax，没有一个估算数字进结论</a:t>
+              <a:t>• 五级仿真阶梯 + 真实布局布线签核 + 3 种子中位数 Fmax + SymbiYosys 形式等价，没有一个估算数字进结论</a:t>
             </a:r>
           </a:p>
           <a:p>
@@ -10852,7 +12448,7 @@
                 </a:solidFill>
                 <a:latin typeface="PingFang SC"/>
               </a:rPr>
-              <a:t>• 88 条自动验证的设计经验；回归基准 8/8，平均第 1.6 轮可行；交付包含 AXI-Stream 包装</a:t>
+              <a:t>• 自动验证的设计经验池；14 例回归每晚自动跑并告警；交付包含 AXI-Stream 包装与板级工程</a:t>
             </a:r>
           </a:p>
           <a:p>
@@ -10868,7 +12464,7 @@
                 </a:solidFill>
                 <a:latin typeface="PingFang SC"/>
               </a:rPr>
-              <a:t>• 2 天、约 7,100 行 Python/JS，27 次提交；已部署，笔记本是瘦客户端</a:t>
+              <a:t>• 3 天、约 9,610 行 Python/JS，38 次提交；已部署，笔记本是瘦客户端</a:t>
             </a:r>
           </a:p>
         </p:txBody>
@@ -15532,7 +17128,7 @@
                 </a:solidFill>
                 <a:latin typeface="PingFang SC"/>
               </a:rPr>
-              <a:t>真实结果：13 个任务 · 4 种器件 · 4 类设计，全部由真实 EDA 签核</a:t>
+              <a:t>真实结果：20+ 个任务 · 5 种器件 · 7 类设计，全部由真实 EDA 签核</a:t>
             </a:r>
           </a:p>
         </p:txBody>
@@ -15818,8 +17414,8 @@
         </p:nvSpPr>
         <p:spPr>
           <a:xfrm>
-            <a:off x="548640" y="1874519"/>
-            <a:ext cx="11155680" cy="310896"/>
+            <a:off x="548640" y="1847088"/>
+            <a:ext cx="11155680" cy="283464"/>
           </a:xfrm>
           <a:prstGeom prst="roundRect">
             <a:avLst>
@@ -15864,7 +17460,7 @@
         </p:nvSpPr>
         <p:spPr>
           <a:xfrm>
-            <a:off x="640080" y="1920239"/>
+            <a:off x="640080" y="1892808"/>
             <a:ext cx="2651760" cy="274320"/>
           </a:xfrm>
           <a:prstGeom prst="rect">
@@ -15890,7 +17486,7 @@
                 </a:solidFill>
                 <a:latin typeface="PingFang SC"/>
               </a:rPr>
-              <a:t>INT8 matmul</a:t>
+              <a:t>INT8 matmul · 五级仿真</a:t>
             </a:r>
           </a:p>
         </p:txBody>
@@ -15903,7 +17499,7 @@
         </p:nvSpPr>
         <p:spPr>
           <a:xfrm>
-            <a:off x="3291840" y="1938527"/>
+            <a:off x="3291840" y="1911096"/>
             <a:ext cx="1554480" cy="274320"/>
           </a:xfrm>
           <a:prstGeom prst="rect">
@@ -15929,7 +17525,7 @@
                 </a:solidFill>
                 <a:latin typeface="Menlo"/>
               </a:rPr>
-              <a:t>ECP5</a:t>
+              <a:t>XC7S50</a:t>
             </a:r>
           </a:p>
         </p:txBody>
@@ -15942,7 +17538,7 @@
         </p:nvSpPr>
         <p:spPr>
           <a:xfrm>
-            <a:off x="4846320" y="1938527"/>
+            <a:off x="4846320" y="1911096"/>
             <a:ext cx="2468880" cy="274320"/>
           </a:xfrm>
           <a:prstGeom prst="rect">
@@ -15968,7 +17564,7 @@
                 </a:solidFill>
                 <a:latin typeface="Menlo"/>
               </a:rPr>
-              <a:t>≥180 MHz · ≤48 DSP</a:t>
+              <a:t>≥300 MHz · ≤32 DSP</a:t>
             </a:r>
           </a:p>
         </p:txBody>
@@ -15981,7 +17577,7 @@
         </p:nvSpPr>
         <p:spPr>
           <a:xfrm>
-            <a:off x="7315200" y="1920239"/>
+            <a:off x="7315200" y="1892808"/>
             <a:ext cx="731520" cy="274320"/>
           </a:xfrm>
           <a:prstGeom prst="rect">
@@ -16007,7 +17603,7 @@
                 </a:solidFill>
                 <a:latin typeface="Menlo"/>
               </a:rPr>
-              <a:t>5</a:t>
+              <a:t>3</a:t>
             </a:r>
           </a:p>
         </p:txBody>
@@ -16020,7 +17616,7 @@
         </p:nvSpPr>
         <p:spPr>
           <a:xfrm>
-            <a:off x="8001000" y="1920239"/>
+            <a:off x="8001000" y="1892808"/>
             <a:ext cx="3840480" cy="274320"/>
           </a:xfrm>
           <a:prstGeom prst="rect">
@@ -16040,7 +17636,7 @@
               </a:lnSpc>
             </a:pPr>
             <a:r>
-              <a:rPr sz="1050" b="1">
+              <a:rPr sz="1000" b="1">
                 <a:solidFill>
                   <a:srgbClr val="34C759"/>
                 </a:solidFill>
@@ -16049,13 +17645,13 @@
               <a:t>✓ </a:t>
             </a:r>
             <a:r>
-              <a:rPr sz="1050" b="0">
+              <a:rPr sz="1000" b="0">
                 <a:solidFill>
                   <a:srgbClr val="ECECE6"/>
                 </a:solidFill>
                 <a:latin typeface="PingFang SC"/>
               </a:rPr>
-              <a:t>4×12 · 188.5 MHz · 48 DSP · 48 MAC/cyc</a:t>
+              <a:t>2×16 · 315–319.5 MHz · 32 DSP · 五级全过</a:t>
             </a:r>
           </a:p>
         </p:txBody>
@@ -16068,8 +17664,8 @@
         </p:nvSpPr>
         <p:spPr>
           <a:xfrm>
-            <a:off x="548640" y="2203703"/>
-            <a:ext cx="11155680" cy="310896"/>
+            <a:off x="548640" y="2144268"/>
+            <a:ext cx="11155680" cy="283464"/>
           </a:xfrm>
           <a:prstGeom prst="roundRect">
             <a:avLst>
@@ -16114,7 +17710,7 @@
         </p:nvSpPr>
         <p:spPr>
           <a:xfrm>
-            <a:off x="640080" y="2249423"/>
+            <a:off x="640080" y="2189988"/>
             <a:ext cx="2651760" cy="274320"/>
           </a:xfrm>
           <a:prstGeom prst="rect">
@@ -16140,7 +17736,7 @@
                 </a:solidFill>
                 <a:latin typeface="PingFang SC"/>
               </a:rPr>
-              <a:t>INT8 matmul</a:t>
+              <a:t>32 阶 FIR</a:t>
             </a:r>
           </a:p>
         </p:txBody>
@@ -16153,7 +17749,7 @@
         </p:nvSpPr>
         <p:spPr>
           <a:xfrm>
-            <a:off x="3291840" y="2267711"/>
+            <a:off x="3291840" y="2208276"/>
             <a:ext cx="1554480" cy="274320"/>
           </a:xfrm>
           <a:prstGeom prst="rect">
@@ -16192,7 +17788,7 @@
         </p:nvSpPr>
         <p:spPr>
           <a:xfrm>
-            <a:off x="4846320" y="2267711"/>
+            <a:off x="4846320" y="2208276"/>
             <a:ext cx="2468880" cy="274320"/>
           </a:xfrm>
           <a:prstGeom prst="rect">
@@ -16218,7 +17814,7 @@
                 </a:solidFill>
                 <a:latin typeface="Menlo"/>
               </a:rPr>
-              <a:t>≥200 MHz · ≤64 DSP</a:t>
+              <a:t>≥250 MHz · ≤8 DSP</a:t>
             </a:r>
           </a:p>
         </p:txBody>
@@ -16231,7 +17827,7 @@
         </p:nvSpPr>
         <p:spPr>
           <a:xfrm>
-            <a:off x="7315200" y="2249423"/>
+            <a:off x="7315200" y="2189988"/>
             <a:ext cx="731520" cy="274320"/>
           </a:xfrm>
           <a:prstGeom prst="rect">
@@ -16257,7 +17853,7 @@
                 </a:solidFill>
                 <a:latin typeface="Menlo"/>
               </a:rPr>
-              <a:t>3</a:t>
+              <a:t>7</a:t>
             </a:r>
           </a:p>
         </p:txBody>
@@ -16270,7 +17866,7 @@
         </p:nvSpPr>
         <p:spPr>
           <a:xfrm>
-            <a:off x="8001000" y="2249423"/>
+            <a:off x="8001000" y="2189988"/>
             <a:ext cx="3840480" cy="274320"/>
           </a:xfrm>
           <a:prstGeom prst="rect">
@@ -16290,7 +17886,7 @@
               </a:lnSpc>
             </a:pPr>
             <a:r>
-              <a:rPr sz="1050" b="1">
+              <a:rPr sz="1000" b="1">
                 <a:solidFill>
                   <a:srgbClr val="34C759"/>
                 </a:solidFill>
@@ -16299,13 +17895,13 @@
               <a:t>✓ </a:t>
             </a:r>
             <a:r>
-              <a:rPr sz="1050" b="0">
+              <a:rPr sz="1000" b="0">
                 <a:solidFill>
                   <a:srgbClr val="ECECE6"/>
                 </a:solidFill>
                 <a:latin typeface="PingFang SC"/>
               </a:rPr>
-              <a:t>8×8 · 239.6 MHz · 64 DSP · 1005 LUT</a:t>
+              <a:t>非对称 fold=8 · 259.1 MHz · 8 DSP · 324 LUT</a:t>
             </a:r>
           </a:p>
         </p:txBody>
@@ -16318,8 +17914,8 @@
         </p:nvSpPr>
         <p:spPr>
           <a:xfrm>
-            <a:off x="548640" y="2532887"/>
-            <a:ext cx="11155680" cy="310896"/>
+            <a:off x="548640" y="2441448"/>
+            <a:ext cx="11155680" cy="283464"/>
           </a:xfrm>
           <a:prstGeom prst="roundRect">
             <a:avLst>
@@ -16364,7 +17960,7 @@
         </p:nvSpPr>
         <p:spPr>
           <a:xfrm>
-            <a:off x="640080" y="2578607"/>
+            <a:off x="640080" y="2487168"/>
             <a:ext cx="2651760" cy="274320"/>
           </a:xfrm>
           <a:prstGeom prst="rect">
@@ -16390,7 +17986,7 @@
                 </a:solidFill>
                 <a:latin typeface="PingFang SC"/>
               </a:rPr>
-              <a:t>INT8 matmul · 五级仿真</a:t>
+              <a:t>INT8 matmul（并行候选）</a:t>
             </a:r>
           </a:p>
         </p:txBody>
@@ -16403,7 +17999,7 @@
         </p:nvSpPr>
         <p:spPr>
           <a:xfrm>
-            <a:off x="3291840" y="2596895"/>
+            <a:off x="3291840" y="2505456"/>
             <a:ext cx="1554480" cy="274320"/>
           </a:xfrm>
           <a:prstGeom prst="rect">
@@ -16429,7 +18025,7 @@
                 </a:solidFill>
                 <a:latin typeface="Menlo"/>
               </a:rPr>
-              <a:t>XC7S50</a:t>
+              <a:t>Gowin GW1NR-9</a:t>
             </a:r>
           </a:p>
         </p:txBody>
@@ -16442,7 +18038,7 @@
         </p:nvSpPr>
         <p:spPr>
           <a:xfrm>
-            <a:off x="4846320" y="2596895"/>
+            <a:off x="4846320" y="2505456"/>
             <a:ext cx="2468880" cy="274320"/>
           </a:xfrm>
           <a:prstGeom prst="rect">
@@ -16468,7 +18064,7 @@
                 </a:solidFill>
                 <a:latin typeface="Menlo"/>
               </a:rPr>
-              <a:t>≥300 MHz · ≤32 DSP</a:t>
+              <a:t>≥130 MHz · ≤16 DSP</a:t>
             </a:r>
           </a:p>
         </p:txBody>
@@ -16481,7 +18077,7 @@
         </p:nvSpPr>
         <p:spPr>
           <a:xfrm>
-            <a:off x="7315200" y="2578607"/>
+            <a:off x="7315200" y="2487168"/>
             <a:ext cx="731520" cy="274320"/>
           </a:xfrm>
           <a:prstGeom prst="rect">
@@ -16507,7 +18103,7 @@
                 </a:solidFill>
                 <a:latin typeface="Menlo"/>
               </a:rPr>
-              <a:t>3</a:t>
+              <a:t>2</a:t>
             </a:r>
           </a:p>
         </p:txBody>
@@ -16520,7 +18116,7 @@
         </p:nvSpPr>
         <p:spPr>
           <a:xfrm>
-            <a:off x="8001000" y="2578607"/>
+            <a:off x="8001000" y="2487168"/>
             <a:ext cx="3840480" cy="274320"/>
           </a:xfrm>
           <a:prstGeom prst="rect">
@@ -16540,7 +18136,7 @@
               </a:lnSpc>
             </a:pPr>
             <a:r>
-              <a:rPr sz="1050" b="1">
+              <a:rPr sz="1000" b="1">
                 <a:solidFill>
                   <a:srgbClr val="34C759"/>
                 </a:solidFill>
@@ -16549,13 +18145,13 @@
               <a:t>✓ </a:t>
             </a:r>
             <a:r>
-              <a:rPr sz="1050" b="0">
+              <a:rPr sz="1000" b="0">
                 <a:solidFill>
                   <a:srgbClr val="ECECE6"/>
                 </a:solidFill>
                 <a:latin typeface="PingFang SC"/>
               </a:rPr>
-              <a:t>2×16 · 315–319.5 MHz · 32 DSP · 五级全过</a:t>
+              <a:t>2×8 · 205.3 MHz · 16 MULT · 975 LUT（第 2 轮 3 个候选并行）</a:t>
             </a:r>
           </a:p>
         </p:txBody>
@@ -16568,8 +18164,8 @@
         </p:nvSpPr>
         <p:spPr>
           <a:xfrm>
-            <a:off x="548640" y="2862071"/>
-            <a:ext cx="11155680" cy="310896"/>
+            <a:off x="548640" y="2738628"/>
+            <a:ext cx="11155680" cy="283464"/>
           </a:xfrm>
           <a:prstGeom prst="roundRect">
             <a:avLst>
@@ -16614,7 +18210,7 @@
         </p:nvSpPr>
         <p:spPr>
           <a:xfrm>
-            <a:off x="640080" y="2907791"/>
+            <a:off x="640080" y="2784348"/>
             <a:ext cx="2651760" cy="274320"/>
           </a:xfrm>
           <a:prstGeom prst="rect">
@@ -16640,7 +18236,7 @@
                 </a:solidFill>
                 <a:latin typeface="PingFang SC"/>
               </a:rPr>
-              <a:t>32 阶 FIR</a:t>
+              <a:t>INT8 matmul · 72 DSP 用满</a:t>
             </a:r>
           </a:p>
         </p:txBody>
@@ -16653,7 +18249,7 @@
         </p:nvSpPr>
         <p:spPr>
           <a:xfrm>
-            <a:off x="3291840" y="2926079"/>
+            <a:off x="3291840" y="2802636"/>
             <a:ext cx="1554480" cy="274320"/>
           </a:xfrm>
           <a:prstGeom prst="rect">
@@ -16692,7 +18288,7 @@
         </p:nvSpPr>
         <p:spPr>
           <a:xfrm>
-            <a:off x="4846320" y="2926079"/>
+            <a:off x="4846320" y="2802636"/>
             <a:ext cx="2468880" cy="274320"/>
           </a:xfrm>
           <a:prstGeom prst="rect">
@@ -16718,7 +18314,7 @@
                 </a:solidFill>
                 <a:latin typeface="Menlo"/>
               </a:rPr>
-              <a:t>≥120 MHz · ≤6 DSP</a:t>
+              <a:t>≥150 MHz · ≤72 DSP</a:t>
             </a:r>
           </a:p>
         </p:txBody>
@@ -16731,7 +18327,7 @@
         </p:nvSpPr>
         <p:spPr>
           <a:xfrm>
-            <a:off x="7315200" y="2907791"/>
+            <a:off x="7315200" y="2784348"/>
             <a:ext cx="731520" cy="274320"/>
           </a:xfrm>
           <a:prstGeom prst="rect">
@@ -16757,7 +18353,7 @@
                 </a:solidFill>
                 <a:latin typeface="Menlo"/>
               </a:rPr>
-              <a:t>2</a:t>
+              <a:t>5</a:t>
             </a:r>
           </a:p>
         </p:txBody>
@@ -16770,7 +18366,7 @@
         </p:nvSpPr>
         <p:spPr>
           <a:xfrm>
-            <a:off x="8001000" y="2907791"/>
+            <a:off x="8001000" y="2784348"/>
             <a:ext cx="3840480" cy="274320"/>
           </a:xfrm>
           <a:prstGeom prst="rect">
@@ -16790,7 +18386,7 @@
               </a:lnSpc>
             </a:pPr>
             <a:r>
-              <a:rPr sz="1050" b="1">
+              <a:rPr sz="1000" b="1">
                 <a:solidFill>
                   <a:srgbClr val="34C759"/>
                 </a:solidFill>
@@ -16799,13 +18395,13 @@
               <a:t>✓ </a:t>
             </a:r>
             <a:r>
-              <a:rPr sz="1050" b="0">
+              <a:rPr sz="1000" b="0">
                 <a:solidFill>
                   <a:srgbClr val="ECECE6"/>
                 </a:solidFill>
                 <a:latin typeface="PingFang SC"/>
               </a:rPr>
-              <a:t>对称 fold=4 · 125.8 MHz · 4 DSP</a:t>
+              <a:t>3×24 · 167.6 MHz · 72 DSP · 72 MAC/cyc</a:t>
             </a:r>
           </a:p>
         </p:txBody>
@@ -16818,8 +18414,8 @@
         </p:nvSpPr>
         <p:spPr>
           <a:xfrm>
-            <a:off x="548640" y="3191255"/>
-            <a:ext cx="11155680" cy="310896"/>
+            <a:off x="548640" y="3035808"/>
+            <a:ext cx="11155680" cy="283464"/>
           </a:xfrm>
           <a:prstGeom prst="roundRect">
             <a:avLst>
@@ -16864,7 +18460,7 @@
         </p:nvSpPr>
         <p:spPr>
           <a:xfrm>
-            <a:off x="640080" y="3236975"/>
+            <a:off x="640080" y="3081528"/>
             <a:ext cx="2651760" cy="274320"/>
           </a:xfrm>
           <a:prstGeom prst="rect">
@@ -16890,7 +18486,7 @@
                 </a:solidFill>
                 <a:latin typeface="PingFang SC"/>
               </a:rPr>
-              <a:t>32 阶 FIR</a:t>
+              <a:t>16 位 sin/cos CORDIC · 0 DSP</a:t>
             </a:r>
           </a:p>
         </p:txBody>
@@ -16903,7 +18499,7 @@
         </p:nvSpPr>
         <p:spPr>
           <a:xfrm>
-            <a:off x="3291840" y="3255263"/>
+            <a:off x="3291840" y="3099816"/>
             <a:ext cx="1554480" cy="274320"/>
           </a:xfrm>
           <a:prstGeom prst="rect">
@@ -16929,7 +18525,7 @@
                 </a:solidFill>
                 <a:latin typeface="Menlo"/>
               </a:rPr>
-              <a:t>XC7S50</a:t>
+              <a:t>ECP5</a:t>
             </a:r>
           </a:p>
         </p:txBody>
@@ -16942,7 +18538,7 @@
         </p:nvSpPr>
         <p:spPr>
           <a:xfrm>
-            <a:off x="4846320" y="3255263"/>
+            <a:off x="4846320" y="3099816"/>
             <a:ext cx="2468880" cy="274320"/>
           </a:xfrm>
           <a:prstGeom prst="rect">
@@ -16968,7 +18564,7 @@
                 </a:solidFill>
                 <a:latin typeface="Menlo"/>
               </a:rPr>
-              <a:t>≥250 MHz · ≤8 DSP</a:t>
+              <a:t>≥200 MHz · 省 LUT</a:t>
             </a:r>
           </a:p>
         </p:txBody>
@@ -16981,7 +18577,7 @@
         </p:nvSpPr>
         <p:spPr>
           <a:xfrm>
-            <a:off x="7315200" y="3236975"/>
+            <a:off x="7315200" y="3081528"/>
             <a:ext cx="731520" cy="274320"/>
           </a:xfrm>
           <a:prstGeom prst="rect">
@@ -17007,7 +18603,7 @@
                 </a:solidFill>
                 <a:latin typeface="Menlo"/>
               </a:rPr>
-              <a:t>7</a:t>
+              <a:t>8</a:t>
             </a:r>
           </a:p>
         </p:txBody>
@@ -17020,7 +18616,7 @@
         </p:nvSpPr>
         <p:spPr>
           <a:xfrm>
-            <a:off x="8001000" y="3236975"/>
+            <a:off x="8001000" y="3081528"/>
             <a:ext cx="3840480" cy="274320"/>
           </a:xfrm>
           <a:prstGeom prst="rect">
@@ -17040,7 +18636,7 @@
               </a:lnSpc>
             </a:pPr>
             <a:r>
-              <a:rPr sz="1050" b="1">
+              <a:rPr sz="1000" b="1">
                 <a:solidFill>
                   <a:srgbClr val="34C759"/>
                 </a:solidFill>
@@ -17049,13 +18645,13 @@
               <a:t>✓ </a:t>
             </a:r>
             <a:r>
-              <a:rPr sz="1050" b="0">
+              <a:rPr sz="1000" b="0">
                 <a:solidFill>
                   <a:srgbClr val="ECECE6"/>
                 </a:solidFill>
                 <a:latin typeface="PingFang SC"/>
               </a:rPr>
-              <a:t>非对称 fold=8 · 259.1 MHz · 8 DSP · 324 LUT</a:t>
+              <a:t>4 级流水 · 211.8 MHz · 594 LUT · 0 DSP</a:t>
             </a:r>
           </a:p>
         </p:txBody>
@@ -17068,8 +18664,8 @@
         </p:nvSpPr>
         <p:spPr>
           <a:xfrm>
-            <a:off x="548640" y="3520439"/>
-            <a:ext cx="11155680" cy="310896"/>
+            <a:off x="548640" y="3332988"/>
+            <a:ext cx="11155680" cy="283464"/>
           </a:xfrm>
           <a:prstGeom prst="roundRect">
             <a:avLst>
@@ -17114,7 +18710,7 @@
         </p:nvSpPr>
         <p:spPr>
           <a:xfrm>
-            <a:off x="640080" y="3566159"/>
+            <a:off x="640080" y="3378708"/>
             <a:ext cx="2651760" cy="274320"/>
           </a:xfrm>
           <a:prstGeom prst="rect">
@@ -17140,7 +18736,7 @@
                 </a:solidFill>
                 <a:latin typeface="PingFang SC"/>
               </a:rPr>
-              <a:t>INT8 matmul（聊天 + 追问 fork）</a:t>
+              <a:t>FIR → CORDIC 数据通路（graph）</a:t>
             </a:r>
           </a:p>
         </p:txBody>
@@ -17153,7 +18749,7 @@
         </p:nvSpPr>
         <p:spPr>
           <a:xfrm>
-            <a:off x="3291840" y="3584447"/>
+            <a:off x="3291840" y="3396996"/>
             <a:ext cx="1554480" cy="274320"/>
           </a:xfrm>
           <a:prstGeom prst="rect">
@@ -17192,7 +18788,7 @@
         </p:nvSpPr>
         <p:spPr>
           <a:xfrm>
-            <a:off x="4846320" y="3584447"/>
+            <a:off x="4846320" y="3396996"/>
             <a:ext cx="2468880" cy="274320"/>
           </a:xfrm>
           <a:prstGeom prst="rect">
@@ -17218,7 +18814,7 @@
                 </a:solidFill>
                 <a:latin typeface="Menlo"/>
               </a:rPr>
-              <a:t>≥160 MHz · ≤32 DSP</a:t>
+              <a:t>≥120 MHz · ≤10 DSP</a:t>
             </a:r>
           </a:p>
         </p:txBody>
@@ -17231,7 +18827,7 @@
         </p:nvSpPr>
         <p:spPr>
           <a:xfrm>
-            <a:off x="7315200" y="3566159"/>
+            <a:off x="7315200" y="3378708"/>
             <a:ext cx="731520" cy="274320"/>
           </a:xfrm>
           <a:prstGeom prst="rect">
@@ -17257,7 +18853,7 @@
                 </a:solidFill>
                 <a:latin typeface="Menlo"/>
               </a:rPr>
-              <a:t>2+8</a:t>
+              <a:t>3</a:t>
             </a:r>
           </a:p>
         </p:txBody>
@@ -17270,7 +18866,7 @@
         </p:nvSpPr>
         <p:spPr>
           <a:xfrm>
-            <a:off x="8001000" y="3566159"/>
+            <a:off x="8001000" y="3378708"/>
             <a:ext cx="3840480" cy="274320"/>
           </a:xfrm>
           <a:prstGeom prst="rect">
@@ -17290,7 +18886,7 @@
               </a:lnSpc>
             </a:pPr>
             <a:r>
-              <a:rPr sz="1050" b="1">
+              <a:rPr sz="1000" b="1">
                 <a:solidFill>
                   <a:srgbClr val="34C759"/>
                 </a:solidFill>
@@ -17299,13 +18895,13 @@
               <a:t>✓ </a:t>
             </a:r>
             <a:r>
-              <a:rPr sz="1050" b="0">
+              <a:rPr sz="1000" b="0">
                 <a:solidFill>
                   <a:srgbClr val="ECECE6"/>
                 </a:solidFill>
                 <a:latin typeface="PingFang SC"/>
               </a:rPr>
-              <a:t>1×1 216.8 → 1×32 · 214.2 MHz · 32 MAC/cyc</a:t>
+              <a:t>218.4 MHz · 1209 LUT · 3 DSP · 1 样本/周期</a:t>
             </a:r>
           </a:p>
         </p:txBody>
@@ -17318,8 +18914,8 @@
         </p:nvSpPr>
         <p:spPr>
           <a:xfrm>
-            <a:off x="548640" y="3849623"/>
-            <a:ext cx="11155680" cy="310896"/>
+            <a:off x="548640" y="3630168"/>
+            <a:ext cx="11155680" cy="283464"/>
           </a:xfrm>
           <a:prstGeom prst="roundRect">
             <a:avLst>
@@ -17364,7 +18960,7 @@
         </p:nvSpPr>
         <p:spPr>
           <a:xfrm>
-            <a:off x="640080" y="3895343"/>
+            <a:off x="640080" y="3675888"/>
             <a:ext cx="2651760" cy="274320"/>
           </a:xfrm>
           <a:prstGeom prst="rect">
@@ -17390,7 +18986,7 @@
                 </a:solidFill>
                 <a:latin typeface="PingFang SC"/>
               </a:rPr>
-              <a:t>3×3 高斯卷积（聊天）</a:t>
+              <a:t>16 阶 FIR · 运行时系数端口</a:t>
             </a:r>
           </a:p>
         </p:txBody>
@@ -17403,7 +18999,7 @@
         </p:nvSpPr>
         <p:spPr>
           <a:xfrm>
-            <a:off x="3291840" y="3913631"/>
+            <a:off x="3291840" y="3694176"/>
             <a:ext cx="1554480" cy="274320"/>
           </a:xfrm>
           <a:prstGeom prst="rect">
@@ -17429,7 +19025,7 @@
                 </a:solidFill>
                 <a:latin typeface="Menlo"/>
               </a:rPr>
-              <a:t>iCE40 UP5K</a:t>
+              <a:t>GateMate CCGM1A1</a:t>
             </a:r>
           </a:p>
         </p:txBody>
@@ -17442,7 +19038,7 @@
         </p:nvSpPr>
         <p:spPr>
           <a:xfrm>
-            <a:off x="4846320" y="3913631"/>
+            <a:off x="4846320" y="3694176"/>
             <a:ext cx="2468880" cy="274320"/>
           </a:xfrm>
           <a:prstGeom prst="rect">
@@ -17468,7 +19064,7 @@
                 </a:solidFill>
                 <a:latin typeface="Menlo"/>
               </a:rPr>
-              <a:t>≥60 MHz · ≤1500 LUT</a:t>
+              <a:t>≥60 MHz</a:t>
             </a:r>
           </a:p>
         </p:txBody>
@@ -17481,7 +19077,7 @@
         </p:nvSpPr>
         <p:spPr>
           <a:xfrm>
-            <a:off x="7315200" y="3895343"/>
+            <a:off x="7315200" y="3675888"/>
             <a:ext cx="731520" cy="274320"/>
           </a:xfrm>
           <a:prstGeom prst="rect">
@@ -17507,7 +19103,7 @@
                 </a:solidFill>
                 <a:latin typeface="Menlo"/>
               </a:rPr>
-              <a:t>4</a:t>
+              <a:t>8</a:t>
             </a:r>
           </a:p>
         </p:txBody>
@@ -17520,7 +19116,7 @@
         </p:nvSpPr>
         <p:spPr>
           <a:xfrm>
-            <a:off x="8001000" y="3895343"/>
+            <a:off x="8001000" y="3675888"/>
             <a:ext cx="3840480" cy="274320"/>
           </a:xfrm>
           <a:prstGeom prst="rect">
@@ -17540,7 +19136,7 @@
               </a:lnSpc>
             </a:pPr>
             <a:r>
-              <a:rPr sz="1050" b="1">
+              <a:rPr sz="1000" b="1">
                 <a:solidFill>
                   <a:srgbClr val="34C759"/>
                 </a:solidFill>
@@ -17549,13 +19145,13 @@
               <a:t>✓ </a:t>
             </a:r>
             <a:r>
-              <a:rPr sz="1050" b="0">
+              <a:rPr sz="1000" b="0">
                 <a:solidFill>
                   <a:srgbClr val="ECECE6"/>
                 </a:solidFill>
                 <a:latin typeface="PingFang SC"/>
               </a:rPr>
-              <a:t>全并行 · 70.6 MHz · 273 LUT · 0 DSP · 2 BRAM</a:t>
+              <a:t>对称 fold=2 · 60.3 MHz · 4 CC_MULT · 1028 LUT</a:t>
             </a:r>
           </a:p>
         </p:txBody>
@@ -17568,8 +19164,8 @@
         </p:nvSpPr>
         <p:spPr>
           <a:xfrm>
-            <a:off x="548640" y="4178807"/>
-            <a:ext cx="11155680" cy="310896"/>
+            <a:off x="548640" y="3927348"/>
+            <a:ext cx="11155680" cy="283464"/>
           </a:xfrm>
           <a:prstGeom prst="roundRect">
             <a:avLst>
@@ -17614,7 +19210,7 @@
         </p:nvSpPr>
         <p:spPr>
           <a:xfrm>
-            <a:off x="640080" y="4224527"/>
+            <a:off x="640080" y="3973068"/>
             <a:ext cx="2651760" cy="274320"/>
           </a:xfrm>
           <a:prstGeom prst="rect">
@@ -17640,7 +19236,7 @@
                 </a:solidFill>
                 <a:latin typeface="PingFang SC"/>
               </a:rPr>
-              <a:t>5×5 卷积 · 640 宽</a:t>
+              <a:t>256 点 16 位 FFT · 自然序</a:t>
             </a:r>
           </a:p>
         </p:txBody>
@@ -17653,7 +19249,7 @@
         </p:nvSpPr>
         <p:spPr>
           <a:xfrm>
-            <a:off x="3291840" y="4242815"/>
+            <a:off x="3291840" y="3991356"/>
             <a:ext cx="1554480" cy="274320"/>
           </a:xfrm>
           <a:prstGeom prst="rect">
@@ -17679,7 +19275,7 @@
                 </a:solidFill>
                 <a:latin typeface="Menlo"/>
               </a:rPr>
-              <a:t>ECP5</a:t>
+              <a:t>Gowin GW1NR-9</a:t>
             </a:r>
           </a:p>
         </p:txBody>
@@ -17692,7 +19288,7 @@
         </p:nvSpPr>
         <p:spPr>
           <a:xfrm>
-            <a:off x="4846320" y="4242815"/>
+            <a:off x="4846320" y="3991356"/>
             <a:ext cx="2468880" cy="274320"/>
           </a:xfrm>
           <a:prstGeom prst="rect">
@@ -17718,7 +19314,7 @@
                 </a:solidFill>
                 <a:latin typeface="Menlo"/>
               </a:rPr>
-              <a:t>≥100 MHz · 省 LUT</a:t>
+              <a:t>≥100 MHz · ≤20 MULT</a:t>
             </a:r>
           </a:p>
         </p:txBody>
@@ -17731,7 +19327,7 @@
         </p:nvSpPr>
         <p:spPr>
           <a:xfrm>
-            <a:off x="7315200" y="4224527"/>
+            <a:off x="7315200" y="3973068"/>
             <a:ext cx="731520" cy="274320"/>
           </a:xfrm>
           <a:prstGeom prst="rect">
@@ -17757,7 +19353,7 @@
                 </a:solidFill>
                 <a:latin typeface="Menlo"/>
               </a:rPr>
-              <a:t>8</a:t>
+              <a:t>1</a:t>
             </a:r>
           </a:p>
         </p:txBody>
@@ -17770,7 +19366,7 @@
         </p:nvSpPr>
         <p:spPr>
           <a:xfrm>
-            <a:off x="8001000" y="4224527"/>
+            <a:off x="8001000" y="3973068"/>
             <a:ext cx="3840480" cy="274320"/>
           </a:xfrm>
           <a:prstGeom prst="rect">
@@ -17790,7 +19386,7 @@
               </a:lnSpc>
             </a:pPr>
             <a:r>
-              <a:rPr sz="1050" b="1">
+              <a:rPr sz="1000" b="1">
                 <a:solidFill>
                   <a:srgbClr val="34C759"/>
                 </a:solidFill>
@@ -17799,13 +19395,13 @@
               <a:t>✓ </a:t>
             </a:r>
             <a:r>
-              <a:rPr sz="1050" b="0">
+              <a:rPr sz="1000" b="0">
                 <a:solidFill>
                   <a:srgbClr val="ECECE6"/>
                 </a:solidFill>
                 <a:latin typeface="PingFang SC"/>
               </a:rPr>
-              <a:t>125.7 MHz · 630 LUT · 9 DSP · 4 BRAM</a:t>
+              <a:t>cmul=three · 153.9 MHz · 18/20 MULT · 3250 LUT · 8 BRAM</a:t>
             </a:r>
           </a:p>
         </p:txBody>
@@ -17818,8 +19414,8 @@
         </p:nvSpPr>
         <p:spPr>
           <a:xfrm>
-            <a:off x="548640" y="4507991"/>
-            <a:ext cx="11155680" cy="310896"/>
+            <a:off x="548640" y="4224528"/>
+            <a:ext cx="11155680" cy="283464"/>
           </a:xfrm>
           <a:prstGeom prst="roundRect">
             <a:avLst>
@@ -17864,7 +19460,7 @@
         </p:nvSpPr>
         <p:spPr>
           <a:xfrm>
-            <a:off x="640080" y="4553711"/>
+            <a:off x="640080" y="4270248"/>
             <a:ext cx="2651760" cy="274320"/>
           </a:xfrm>
           <a:prstGeom prst="rect">
@@ -17890,7 +19486,7 @@
                 </a:solidFill>
                 <a:latin typeface="PingFang SC"/>
               </a:rPr>
-              <a:t>16 阶 FIR（聊天）</a:t>
+              <a:t>5×5 卷积 · 640 宽 · 五级仿真</a:t>
             </a:r>
           </a:p>
         </p:txBody>
@@ -17903,7 +19499,7 @@
         </p:nvSpPr>
         <p:spPr>
           <a:xfrm>
-            <a:off x="3291840" y="4571999"/>
+            <a:off x="3291840" y="4288536"/>
             <a:ext cx="1554480" cy="274320"/>
           </a:xfrm>
           <a:prstGeom prst="rect">
@@ -17929,7 +19525,7 @@
                 </a:solidFill>
                 <a:latin typeface="Menlo"/>
               </a:rPr>
-              <a:t>Gowin GW1NR-9</a:t>
+              <a:t>XC7S50</a:t>
             </a:r>
           </a:p>
         </p:txBody>
@@ -17942,7 +19538,7 @@
         </p:nvSpPr>
         <p:spPr>
           <a:xfrm>
-            <a:off x="4846320" y="4571999"/>
+            <a:off x="4846320" y="4288536"/>
             <a:ext cx="2468880" cy="274320"/>
           </a:xfrm>
           <a:prstGeom prst="rect">
@@ -17968,7 +19564,7 @@
                 </a:solidFill>
                 <a:latin typeface="Menlo"/>
               </a:rPr>
-              <a:t>≥100 MHz · ≤4 DSP</a:t>
+              <a:t>≥200 MHz · ≤30 DSP</a:t>
             </a:r>
           </a:p>
         </p:txBody>
@@ -17981,7 +19577,7 @@
         </p:nvSpPr>
         <p:spPr>
           <a:xfrm>
-            <a:off x="7315200" y="4553711"/>
+            <a:off x="7315200" y="4270248"/>
             <a:ext cx="731520" cy="274320"/>
           </a:xfrm>
           <a:prstGeom prst="rect">
@@ -18007,7 +19603,7 @@
                 </a:solidFill>
                 <a:latin typeface="Menlo"/>
               </a:rPr>
-              <a:t>4</a:t>
+              <a:t>2</a:t>
             </a:r>
           </a:p>
         </p:txBody>
@@ -18020,7 +19616,7 @@
         </p:nvSpPr>
         <p:spPr>
           <a:xfrm>
-            <a:off x="8001000" y="4553711"/>
+            <a:off x="8001000" y="4270248"/>
             <a:ext cx="3840480" cy="274320"/>
           </a:xfrm>
           <a:prstGeom prst="rect">
@@ -18040,7 +19636,7 @@
               </a:lnSpc>
             </a:pPr>
             <a:r>
-              <a:rPr sz="1050" b="1">
+              <a:rPr sz="1000" b="1">
                 <a:solidFill>
                   <a:srgbClr val="34C759"/>
                 </a:solidFill>
@@ -18049,13 +19645,13 @@
               <a:t>✓ </a:t>
             </a:r>
             <a:r>
-              <a:rPr sz="1050" b="0">
+              <a:rPr sz="1000" b="0">
                 <a:solidFill>
                   <a:srgbClr val="ECECE6"/>
                 </a:solidFill>
                 <a:latin typeface="PingFang SC"/>
               </a:rPr>
-              <a:t>fold=2 · 103.5 MHz · 4 MULT18X18 · 733 LUT</a:t>
+              <a:t>in_pipe_out · 219.8 MHz · 25 DSP · 469 LUT · 五级全过</a:t>
             </a:r>
           </a:p>
         </p:txBody>
@@ -18068,8 +19664,8 @@
         </p:nvSpPr>
         <p:spPr>
           <a:xfrm>
-            <a:off x="548640" y="4837175"/>
-            <a:ext cx="11155680" cy="310896"/>
+            <a:off x="548640" y="4521708"/>
+            <a:ext cx="11155680" cy="283464"/>
           </a:xfrm>
           <a:prstGeom prst="roundRect">
             <a:avLst>
@@ -18114,7 +19710,7 @@
         </p:nvSpPr>
         <p:spPr>
           <a:xfrm>
-            <a:off x="640080" y="4882895"/>
+            <a:off x="640080" y="4567428"/>
             <a:ext cx="2651760" cy="274320"/>
           </a:xfrm>
           <a:prstGeom prst="rect">
@@ -18140,7 +19736,7 @@
                 </a:solidFill>
                 <a:latin typeface="PingFang SC"/>
               </a:rPr>
-              <a:t>INT8 matmul</a:t>
+              <a:t>3×3 高斯卷积（聊天）</a:t>
             </a:r>
           </a:p>
         </p:txBody>
@@ -18153,7 +19749,7 @@
         </p:nvSpPr>
         <p:spPr>
           <a:xfrm>
-            <a:off x="3291840" y="4901183"/>
+            <a:off x="3291840" y="4585716"/>
             <a:ext cx="1554480" cy="274320"/>
           </a:xfrm>
           <a:prstGeom prst="rect">
@@ -18179,7 +19775,7 @@
                 </a:solidFill>
                 <a:latin typeface="Menlo"/>
               </a:rPr>
-              <a:t>Gowin GW1NR-9</a:t>
+              <a:t>iCE40 UP5K</a:t>
             </a:r>
           </a:p>
         </p:txBody>
@@ -18192,7 +19788,7 @@
         </p:nvSpPr>
         <p:spPr>
           <a:xfrm>
-            <a:off x="4846320" y="4901183"/>
+            <a:off x="4846320" y="4585716"/>
             <a:ext cx="2468880" cy="274320"/>
           </a:xfrm>
           <a:prstGeom prst="rect">
@@ -18218,7 +19814,7 @@
                 </a:solidFill>
                 <a:latin typeface="Menlo"/>
               </a:rPr>
-              <a:t>≥120 MHz · ≤16 DSP</a:t>
+              <a:t>≥60 MHz · ≤1500 LUT</a:t>
             </a:r>
           </a:p>
         </p:txBody>
@@ -18231,7 +19827,7 @@
         </p:nvSpPr>
         <p:spPr>
           <a:xfrm>
-            <a:off x="7315200" y="4882895"/>
+            <a:off x="7315200" y="4567428"/>
             <a:ext cx="731520" cy="274320"/>
           </a:xfrm>
           <a:prstGeom prst="rect">
@@ -18257,7 +19853,7 @@
                 </a:solidFill>
                 <a:latin typeface="Menlo"/>
               </a:rPr>
-              <a:t>1</a:t>
+              <a:t>4</a:t>
             </a:r>
           </a:p>
         </p:txBody>
@@ -18270,7 +19866,7 @@
         </p:nvSpPr>
         <p:spPr>
           <a:xfrm>
-            <a:off x="8001000" y="4882895"/>
+            <a:off x="8001000" y="4567428"/>
             <a:ext cx="3840480" cy="274320"/>
           </a:xfrm>
           <a:prstGeom prst="rect">
@@ -18290,7 +19886,7 @@
               </a:lnSpc>
             </a:pPr>
             <a:r>
-              <a:rPr sz="1050" b="1">
+              <a:rPr sz="1000" b="1">
                 <a:solidFill>
                   <a:srgbClr val="34C759"/>
                 </a:solidFill>
@@ -18299,13 +19895,13 @@
               <a:t>✓ </a:t>
             </a:r>
             <a:r>
-              <a:rPr sz="1050" b="0">
+              <a:rPr sz="1000" b="0">
                 <a:solidFill>
                   <a:srgbClr val="ECECE6"/>
                 </a:solidFill>
                 <a:latin typeface="PingFang SC"/>
               </a:rPr>
-              <a:t>153.5 MHz · 16 DSP · 976 LUT</a:t>
+              <a:t>全并行 · 70.6 MHz · 273 LUT · 0 DSP · 2 BRAM</a:t>
             </a:r>
           </a:p>
         </p:txBody>
@@ -18318,8 +19914,8 @@
         </p:nvSpPr>
         <p:spPr>
           <a:xfrm>
-            <a:off x="548640" y="5166359"/>
-            <a:ext cx="11155680" cy="310896"/>
+            <a:off x="548640" y="4818888"/>
+            <a:ext cx="11155680" cy="283464"/>
           </a:xfrm>
           <a:prstGeom prst="roundRect">
             <a:avLst>
@@ -18364,7 +19960,7 @@
         </p:nvSpPr>
         <p:spPr>
           <a:xfrm>
-            <a:off x="640080" y="5212079"/>
+            <a:off x="640080" y="4864608"/>
             <a:ext cx="2651760" cy="274320"/>
           </a:xfrm>
           <a:prstGeom prst="rect">
@@ -18390,7 +19986,7 @@
                 </a:solidFill>
                 <a:latin typeface="PingFang SC"/>
               </a:rPr>
-              <a:t>INT8 matmul</a:t>
+              <a:t>5×5 卷积 · 640 宽</a:t>
             </a:r>
           </a:p>
         </p:txBody>
@@ -18403,7 +19999,7 @@
         </p:nvSpPr>
         <p:spPr>
           <a:xfrm>
-            <a:off x="3291840" y="5230367"/>
+            <a:off x="3291840" y="4882896"/>
             <a:ext cx="1554480" cy="274320"/>
           </a:xfrm>
           <a:prstGeom prst="rect">
@@ -18429,7 +20025,7 @@
                 </a:solidFill>
                 <a:latin typeface="Menlo"/>
               </a:rPr>
-              <a:t>iCE40 UP5K</a:t>
+              <a:t>ECP5</a:t>
             </a:r>
           </a:p>
         </p:txBody>
@@ -18442,7 +20038,7 @@
         </p:nvSpPr>
         <p:spPr>
           <a:xfrm>
-            <a:off x="4846320" y="5230367"/>
+            <a:off x="4846320" y="4882896"/>
             <a:ext cx="2468880" cy="274320"/>
           </a:xfrm>
           <a:prstGeom prst="rect">
@@ -18468,7 +20064,7 @@
                 </a:solidFill>
                 <a:latin typeface="Menlo"/>
               </a:rPr>
-              <a:t>≥40 MHz · ≤8 DSP</a:t>
+              <a:t>≥100 MHz · 省 LUT</a:t>
             </a:r>
           </a:p>
         </p:txBody>
@@ -18481,7 +20077,7 @@
         </p:nvSpPr>
         <p:spPr>
           <a:xfrm>
-            <a:off x="7315200" y="5212079"/>
+            <a:off x="7315200" y="4864608"/>
             <a:ext cx="731520" cy="274320"/>
           </a:xfrm>
           <a:prstGeom prst="rect">
@@ -18507,7 +20103,7 @@
                 </a:solidFill>
                 <a:latin typeface="Menlo"/>
               </a:rPr>
-              <a:t>1</a:t>
+              <a:t>8</a:t>
             </a:r>
           </a:p>
         </p:txBody>
@@ -18520,7 +20116,7 @@
         </p:nvSpPr>
         <p:spPr>
           <a:xfrm>
-            <a:off x="8001000" y="5212079"/>
+            <a:off x="8001000" y="4864608"/>
             <a:ext cx="3840480" cy="274320"/>
           </a:xfrm>
           <a:prstGeom prst="rect">
@@ -18540,7 +20136,7 @@
               </a:lnSpc>
             </a:pPr>
             <a:r>
-              <a:rPr sz="1050" b="1">
+              <a:rPr sz="1000" b="1">
                 <a:solidFill>
                   <a:srgbClr val="34C759"/>
                 </a:solidFill>
@@ -18549,13 +20145,13 @@
               <a:t>✓ </a:t>
             </a:r>
             <a:r>
-              <a:rPr sz="1050" b="0">
+              <a:rPr sz="1000" b="0">
                 <a:solidFill>
                   <a:srgbClr val="ECECE6"/>
                 </a:solidFill>
                 <a:latin typeface="PingFang SC"/>
               </a:rPr>
-              <a:t>78.2 MHz · 8 SB_MAC16 · 304 LUT</a:t>
+              <a:t>125.7 MHz · 630 LUT · 9 DSP · 4 BRAM</a:t>
             </a:r>
           </a:p>
         </p:txBody>
@@ -18568,8 +20164,8 @@
         </p:nvSpPr>
         <p:spPr>
           <a:xfrm>
-            <a:off x="548640" y="5495543"/>
-            <a:ext cx="11155680" cy="310896"/>
+            <a:off x="548640" y="5116068"/>
+            <a:ext cx="11155680" cy="283464"/>
           </a:xfrm>
           <a:prstGeom prst="roundRect">
             <a:avLst>
@@ -18614,7 +20210,7 @@
         </p:nvSpPr>
         <p:spPr>
           <a:xfrm>
-            <a:off x="640080" y="5541263"/>
+            <a:off x="640080" y="5161788"/>
             <a:ext cx="2651760" cy="274320"/>
           </a:xfrm>
           <a:prstGeom prst="rect">
@@ -18640,7 +20236,7 @@
                 </a:solidFill>
                 <a:latin typeface="PingFang SC"/>
               </a:rPr>
-              <a:t>3×3 卷积 · 640 宽</a:t>
+              <a:t>16 阶 FIR（聊天）</a:t>
             </a:r>
           </a:p>
         </p:txBody>
@@ -18653,7 +20249,7 @@
         </p:nvSpPr>
         <p:spPr>
           <a:xfrm>
-            <a:off x="3291840" y="5559551"/>
+            <a:off x="3291840" y="5180076"/>
             <a:ext cx="1554480" cy="274320"/>
           </a:xfrm>
           <a:prstGeom prst="rect">
@@ -18679,7 +20275,7 @@
                 </a:solidFill>
                 <a:latin typeface="Menlo"/>
               </a:rPr>
-              <a:t>ECP5</a:t>
+              <a:t>Gowin GW1NR-9</a:t>
             </a:r>
           </a:p>
         </p:txBody>
@@ -18692,7 +20288,7 @@
         </p:nvSpPr>
         <p:spPr>
           <a:xfrm>
-            <a:off x="4846320" y="5559551"/>
+            <a:off x="4846320" y="5180076"/>
             <a:ext cx="2468880" cy="274320"/>
           </a:xfrm>
           <a:prstGeom prst="rect">
@@ -18718,7 +20314,7 @@
                 </a:solidFill>
                 <a:latin typeface="Menlo"/>
               </a:rPr>
-              <a:t>≥100 MHz · ≤1500 LUT</a:t>
+              <a:t>≥100 MHz · ≤4 DSP</a:t>
             </a:r>
           </a:p>
         </p:txBody>
@@ -18731,7 +20327,7 @@
         </p:nvSpPr>
         <p:spPr>
           <a:xfrm>
-            <a:off x="7315200" y="5541263"/>
+            <a:off x="7315200" y="5161788"/>
             <a:ext cx="731520" cy="274320"/>
           </a:xfrm>
           <a:prstGeom prst="rect">
@@ -18757,7 +20353,7 @@
                 </a:solidFill>
                 <a:latin typeface="Menlo"/>
               </a:rPr>
-              <a:t>1</a:t>
+              <a:t>4</a:t>
             </a:r>
           </a:p>
         </p:txBody>
@@ -18770,7 +20366,7 @@
         </p:nvSpPr>
         <p:spPr>
           <a:xfrm>
-            <a:off x="8001000" y="5541263"/>
+            <a:off x="8001000" y="5161788"/>
             <a:ext cx="3840480" cy="274320"/>
           </a:xfrm>
           <a:prstGeom prst="rect">
@@ -18790,7 +20386,7 @@
               </a:lnSpc>
             </a:pPr>
             <a:r>
-              <a:rPr sz="1050" b="1">
+              <a:rPr sz="1000" b="1">
                 <a:solidFill>
                   <a:srgbClr val="34C759"/>
                 </a:solidFill>
@@ -18799,13 +20395,13 @@
               <a:t>✓ </a:t>
             </a:r>
             <a:r>
-              <a:rPr sz="1050" b="0">
+              <a:rPr sz="1000" b="0">
                 <a:solidFill>
                   <a:srgbClr val="ECECE6"/>
                 </a:solidFill>
                 <a:latin typeface="PingFang SC"/>
               </a:rPr>
-              <a:t>140.2 MHz · 213 LUT · 0 DSP · 2 BRAM</a:t>
+              <a:t>fold=2 · 103.5 MHz · 4 MULT18X18 · 733 LUT</a:t>
             </a:r>
           </a:p>
         </p:txBody>
@@ -18818,8 +20414,8 @@
         </p:nvSpPr>
         <p:spPr>
           <a:xfrm>
-            <a:off x="548640" y="5824727"/>
-            <a:ext cx="11155680" cy="310896"/>
+            <a:off x="548640" y="5413248"/>
+            <a:ext cx="11155680" cy="283464"/>
           </a:xfrm>
           <a:prstGeom prst="roundRect">
             <a:avLst>
@@ -18864,7 +20460,7 @@
         </p:nvSpPr>
         <p:spPr>
           <a:xfrm>
-            <a:off x="640080" y="5870447"/>
+            <a:off x="640080" y="5458968"/>
             <a:ext cx="2651760" cy="274320"/>
           </a:xfrm>
           <a:prstGeom prst="rect">
@@ -18903,7 +20499,7 @@
         </p:nvSpPr>
         <p:spPr>
           <a:xfrm>
-            <a:off x="3291840" y="5888735"/>
+            <a:off x="3291840" y="5477256"/>
             <a:ext cx="1554480" cy="274320"/>
           </a:xfrm>
           <a:prstGeom prst="rect">
@@ -18942,7 +20538,7 @@
         </p:nvSpPr>
         <p:spPr>
           <a:xfrm>
-            <a:off x="4846320" y="5888735"/>
+            <a:off x="4846320" y="5477256"/>
             <a:ext cx="2468880" cy="274320"/>
           </a:xfrm>
           <a:prstGeom prst="rect">
@@ -18981,7 +20577,7 @@
         </p:nvSpPr>
         <p:spPr>
           <a:xfrm>
-            <a:off x="7315200" y="5870447"/>
+            <a:off x="7315200" y="5458968"/>
             <a:ext cx="731520" cy="274320"/>
           </a:xfrm>
           <a:prstGeom prst="rect">
@@ -19020,7 +20616,7 @@
         </p:nvSpPr>
         <p:spPr>
           <a:xfrm>
-            <a:off x="8001000" y="5870447"/>
+            <a:off x="8001000" y="5458968"/>
             <a:ext cx="3840480" cy="274320"/>
           </a:xfrm>
           <a:prstGeom prst="rect">
@@ -19040,7 +20636,7 @@
               </a:lnSpc>
             </a:pPr>
             <a:r>
-              <a:rPr sz="1050" b="1">
+              <a:rPr sz="1000" b="1">
                 <a:solidFill>
                   <a:srgbClr val="34C759"/>
                 </a:solidFill>
@@ -19049,7 +20645,7 @@
               <a:t>✓ </a:t>
             </a:r>
             <a:r>
-              <a:rPr sz="1050" b="0">
+              <a:rPr sz="1000" b="0">
                 <a:solidFill>
                   <a:srgbClr val="ECECE6"/>
                 </a:solidFill>
@@ -19062,13 +20658,263 @@
       </p:sp>
       <p:sp>
         <p:nvSpPr>
-          <p:cNvPr id="89" name="TextBox 88"/>
-          <p:cNvSpPr txBox="1"/>
-          <p:nvPr/>
-        </p:nvSpPr>
-        <p:spPr>
-          <a:xfrm>
-            <a:off x="640080" y="6263640"/>
+          <p:cNvPr id="89" name="Rounded Rectangle 88"/>
+          <p:cNvSpPr/>
+          <p:nvPr/>
+        </p:nvSpPr>
+        <p:spPr>
+          <a:xfrm>
+            <a:off x="548640" y="5710428"/>
+            <a:ext cx="11155680" cy="283464"/>
+          </a:xfrm>
+          <a:prstGeom prst="roundRect">
+            <a:avLst>
+              <a:gd name="adj" fmla="val 6000"/>
+            </a:avLst>
+          </a:prstGeom>
+          <a:solidFill>
+            <a:srgbClr val="0E0E0D"/>
+          </a:solidFill>
+          <a:ln>
+            <a:noFill/>
+          </a:ln>
+          <a:effectLst/>
+        </p:spPr>
+        <p:style>
+          <a:lnRef idx="1">
+            <a:schemeClr val="accent1"/>
+          </a:lnRef>
+          <a:fillRef idx="3">
+            <a:schemeClr val="accent1"/>
+          </a:fillRef>
+          <a:effectRef idx="2">
+            <a:schemeClr val="accent1"/>
+          </a:effectRef>
+          <a:fontRef idx="minor">
+            <a:schemeClr val="lt1"/>
+          </a:fontRef>
+        </p:style>
+        <p:txBody>
+          <a:bodyPr rtlCol="0" anchor="ctr" lIns="0" rIns="0"/>
+          <a:lstStyle/>
+          <a:p>
+            <a:pPr algn="ctr"/>
+          </a:p>
+        </p:txBody>
+      </p:sp>
+      <p:sp>
+        <p:nvSpPr>
+          <p:cNvPr id="90" name="TextBox 89"/>
+          <p:cNvSpPr txBox="1"/>
+          <p:nvPr/>
+        </p:nvSpPr>
+        <p:spPr>
+          <a:xfrm>
+            <a:off x="640080" y="5756148"/>
+            <a:ext cx="2651760" cy="274320"/>
+          </a:xfrm>
+          <a:prstGeom prst="rect">
+            <a:avLst/>
+          </a:prstGeom>
+          <a:noFill/>
+        </p:spPr>
+        <p:txBody>
+          <a:bodyPr wrap="square" anchor="t" lIns="0" rIns="0" tIns="0" bIns="0">
+            <a:spAutoFit/>
+          </a:bodyPr>
+          <a:lstStyle/>
+          <a:p>
+            <a:pPr algn="l">
+              <a:lnSpc>
+                <a:spcPct val="115000"/>
+              </a:lnSpc>
+            </a:pPr>
+            <a:r>
+              <a:rPr sz="1100" b="0">
+                <a:solidFill>
+                  <a:srgbClr val="ECECE6"/>
+                </a:solidFill>
+                <a:latin typeface="PingFang SC"/>
+              </a:rPr>
+              <a:t>INT8 matmul（聊天 + 追问 fork）</a:t>
+            </a:r>
+          </a:p>
+        </p:txBody>
+      </p:sp>
+      <p:sp>
+        <p:nvSpPr>
+          <p:cNvPr id="91" name="TextBox 90"/>
+          <p:cNvSpPr txBox="1"/>
+          <p:nvPr/>
+        </p:nvSpPr>
+        <p:spPr>
+          <a:xfrm>
+            <a:off x="3291840" y="5774436"/>
+            <a:ext cx="1554480" cy="274320"/>
+          </a:xfrm>
+          <a:prstGeom prst="rect">
+            <a:avLst/>
+          </a:prstGeom>
+          <a:noFill/>
+        </p:spPr>
+        <p:txBody>
+          <a:bodyPr wrap="square" anchor="t" lIns="0" rIns="0" tIns="0" bIns="0">
+            <a:spAutoFit/>
+          </a:bodyPr>
+          <a:lstStyle/>
+          <a:p>
+            <a:pPr algn="l">
+              <a:lnSpc>
+                <a:spcPct val="115000"/>
+              </a:lnSpc>
+            </a:pPr>
+            <a:r>
+              <a:rPr sz="1000" b="0">
+                <a:solidFill>
+                  <a:srgbClr val="A9A89F"/>
+                </a:solidFill>
+                <a:latin typeface="Menlo"/>
+              </a:rPr>
+              <a:t>ECP5</a:t>
+            </a:r>
+          </a:p>
+        </p:txBody>
+      </p:sp>
+      <p:sp>
+        <p:nvSpPr>
+          <p:cNvPr id="92" name="TextBox 91"/>
+          <p:cNvSpPr txBox="1"/>
+          <p:nvPr/>
+        </p:nvSpPr>
+        <p:spPr>
+          <a:xfrm>
+            <a:off x="4846320" y="5774436"/>
+            <a:ext cx="2468880" cy="274320"/>
+          </a:xfrm>
+          <a:prstGeom prst="rect">
+            <a:avLst/>
+          </a:prstGeom>
+          <a:noFill/>
+        </p:spPr>
+        <p:txBody>
+          <a:bodyPr wrap="square" anchor="t" lIns="0" rIns="0" tIns="0" bIns="0">
+            <a:spAutoFit/>
+          </a:bodyPr>
+          <a:lstStyle/>
+          <a:p>
+            <a:pPr algn="l">
+              <a:lnSpc>
+                <a:spcPct val="115000"/>
+              </a:lnSpc>
+            </a:pPr>
+            <a:r>
+              <a:rPr sz="1000" b="0">
+                <a:solidFill>
+                  <a:srgbClr val="A9A89F"/>
+                </a:solidFill>
+                <a:latin typeface="Menlo"/>
+              </a:rPr>
+              <a:t>≥160 MHz · ≤32 DSP</a:t>
+            </a:r>
+          </a:p>
+        </p:txBody>
+      </p:sp>
+      <p:sp>
+        <p:nvSpPr>
+          <p:cNvPr id="93" name="TextBox 92"/>
+          <p:cNvSpPr txBox="1"/>
+          <p:nvPr/>
+        </p:nvSpPr>
+        <p:spPr>
+          <a:xfrm>
+            <a:off x="7315200" y="5756148"/>
+            <a:ext cx="731520" cy="274320"/>
+          </a:xfrm>
+          <a:prstGeom prst="rect">
+            <a:avLst/>
+          </a:prstGeom>
+          <a:noFill/>
+        </p:spPr>
+        <p:txBody>
+          <a:bodyPr wrap="square" anchor="t" lIns="0" rIns="0" tIns="0" bIns="0">
+            <a:spAutoFit/>
+          </a:bodyPr>
+          <a:lstStyle/>
+          <a:p>
+            <a:pPr algn="l">
+              <a:lnSpc>
+                <a:spcPct val="115000"/>
+              </a:lnSpc>
+            </a:pPr>
+            <a:r>
+              <a:rPr sz="1100" b="0">
+                <a:solidFill>
+                  <a:srgbClr val="ECECE6"/>
+                </a:solidFill>
+                <a:latin typeface="Menlo"/>
+              </a:rPr>
+              <a:t>2+8</a:t>
+            </a:r>
+          </a:p>
+        </p:txBody>
+      </p:sp>
+      <p:sp>
+        <p:nvSpPr>
+          <p:cNvPr id="94" name="TextBox 93"/>
+          <p:cNvSpPr txBox="1"/>
+          <p:nvPr/>
+        </p:nvSpPr>
+        <p:spPr>
+          <a:xfrm>
+            <a:off x="8001000" y="5756148"/>
+            <a:ext cx="3840480" cy="274320"/>
+          </a:xfrm>
+          <a:prstGeom prst="rect">
+            <a:avLst/>
+          </a:prstGeom>
+          <a:noFill/>
+        </p:spPr>
+        <p:txBody>
+          <a:bodyPr wrap="square" anchor="t" lIns="0" rIns="0" tIns="0" bIns="0">
+            <a:spAutoFit/>
+          </a:bodyPr>
+          <a:lstStyle/>
+          <a:p>
+            <a:pPr algn="l">
+              <a:lnSpc>
+                <a:spcPct val="115000"/>
+              </a:lnSpc>
+            </a:pPr>
+            <a:r>
+              <a:rPr sz="1000" b="1">
+                <a:solidFill>
+                  <a:srgbClr val="34C759"/>
+                </a:solidFill>
+                <a:latin typeface="PingFang SC"/>
+              </a:rPr>
+              <a:t>✓ </a:t>
+            </a:r>
+            <a:r>
+              <a:rPr sz="1000" b="0">
+                <a:solidFill>
+                  <a:srgbClr val="ECECE6"/>
+                </a:solidFill>
+                <a:latin typeface="PingFang SC"/>
+              </a:rPr>
+              <a:t>1×1 216.8 → 1×32 · 214.2 MHz · 32 MAC/cyc</a:t>
+            </a:r>
+          </a:p>
+        </p:txBody>
+      </p:sp>
+      <p:sp>
+        <p:nvSpPr>
+          <p:cNvPr id="95" name="TextBox 94"/>
+          <p:cNvSpPr txBox="1"/>
+          <p:nvPr/>
+        </p:nvSpPr>
+        <p:spPr>
+          <a:xfrm>
+            <a:off x="640080" y="6144768"/>
             <a:ext cx="10972800" cy="365760"/>
           </a:xfrm>
           <a:prstGeom prst="rect">
@@ -19094,7 +20940,7 @@
                 </a:solidFill>
                 <a:latin typeface="PingFang SC"/>
               </a:rPr>
-              <a:t>每轮成本：ECP5 / iCE40 / Gowin 15–60 秒（3 个布线种子取中位数），XC7S50 1.5–4 分钟（含五级仿真）。规划器 DeepSeek，每轮一次调用。回归基准集 8/8 通过，平均第 1.6 轮可行。</a:t>
+              <a:t>每轮成本：ECP5 / iCE40 / Gowin 15–60 秒、GateMate 2–4 分钟（3 个布线种子取中位数），XC7S50 1.5–4 分钟（含五级仿真）。规划器 DeepSeek，每轮一次调用，候选可并行评估。回归基准集 14 例，每晚 03:17 自动跑并与上一次比对。</a:t>
             </a:r>
           </a:p>
         </p:txBody>

--- a/docs/silicon-agent-pitch.pptx
+++ b/docs/silicon-agent-pitch.pptx
@@ -15003,7 +15003,39 @@
                 </a:solidFill>
                 <a:latin typeface="PingFang SC"/>
               </a:rPr>
-              <a:t>一个对话 = 一个 AGH 会话；前端显示的「智能体过程」就是 AGH 的工具账本。</a:t>
+              <a:t>一个对话 = 一个 AGH 会话；前端显示的「智能体过程」就是 AGH 的工具账本，每轮回复下面是它的费用账本（模型调用次数、token、估算美元、用时）。</a:t>
+            </a:r>
+          </a:p>
+          <a:p>
+            <a:pPr algn="l">
+              <a:lnSpc>
+                <a:spcPct val="115000"/>
+              </a:lnSpc>
+            </a:pPr>
+            <a:r>
+              <a:rPr sz="1300" b="0">
+                <a:solidFill>
+                  <a:srgbClr val="A9A89F"/>
+                </a:solidFill>
+                <a:latin typeface="PingFang SC"/>
+              </a:rPr>
+              <a:t/>
+            </a:r>
+          </a:p>
+          <a:p>
+            <a:pPr algn="l">
+              <a:lnSpc>
+                <a:spcPct val="115000"/>
+              </a:lnSpc>
+            </a:pPr>
+            <a:r>
+              <a:rPr sz="1300" b="0">
+                <a:solidFill>
+                  <a:srgbClr val="A9A89F"/>
+                </a:solidFill>
+                <a:latin typeface="PingFang SC"/>
+              </a:rPr>
+              <a:t>作业服务器重启不丢轮次：从 AGH 的会话投影重建这一轮，或让智能体按自己的记录续接。</a:t>
             </a:r>
           </a:p>
         </p:txBody>

--- a/docs/silicon-agent-pitch.pptx
+++ b/docs/silicon-agent-pitch.pptx
@@ -15384,6 +15384,38 @@
                 <a:latin typeface="PingFang SC"/>
               </a:rPr>
               <a:t>agent 自己发现过一个仿真库 bug（Gowin ALU 模型常量输入下永远 X），修掉后它重跑收敛到 236 LUT。</a:t>
+            </a:r>
+          </a:p>
+          <a:p>
+            <a:pPr algn="l">
+              <a:lnSpc>
+                <a:spcPct val="115000"/>
+              </a:lnSpc>
+            </a:pPr>
+            <a:r>
+              <a:rPr sz="1300" b="0">
+                <a:solidFill>
+                  <a:srgbClr val="A9A89F"/>
+                </a:solidFill>
+                <a:latin typeface="PingFang SC"/>
+              </a:rPr>
+              <a:t/>
+            </a:r>
+          </a:p>
+          <a:p>
+            <a:pPr algn="l">
+              <a:lnSpc>
+                <a:spcPct val="115000"/>
+              </a:lnSpc>
+            </a:pPr>
+            <a:r>
+              <a:rPr sz="1300" b="0">
+                <a:solidFill>
+                  <a:srgbClr val="34C759"/>
+                </a:solidFill>
+                <a:latin typeface="PingFang SC"/>
+              </a:rPr>
+              <a:t>深思模式（V4 Pro + thinking）从关键路径推出「生成器缺一个旋钮」——做成 sum_tree 后 iCE40 FIR 49.5→55.0 MHz，形式验证通过。</a:t>
             </a:r>
           </a:p>
         </p:txBody>

--- a/docs/silicon-agent-pitch.pptx
+++ b/docs/silicon-agent-pitch.pptx
@@ -22,6 +22,7 @@
     <p:sldId id="270" r:id="rId21"/>
     <p:sldId id="271" r:id="rId22"/>
     <p:sldId id="272" r:id="rId23"/>
+    <p:sldId id="273" r:id="rId24"/>
   </p:sldIdLst>
   <p:sldSz cx="12191695" cy="6858000" type="screen4x3"/>
   <p:notesSz cx="6858000" cy="9144000"/>
@@ -11933,7 +11934,7 @@
                 </a:solidFill>
                 <a:latin typeface="Menlo"/>
               </a:rPr>
-              <a:t>13 · 路线图</a:t>
+              <a:t>12b · 扩展</a:t>
             </a:r>
           </a:p>
         </p:txBody>
@@ -11972,7 +11973,7 @@
                 </a:solidFill>
                 <a:latin typeface="PingFang SC"/>
               </a:rPr>
-              <a:t>路线图：本周做完的，和下一步</a:t>
+              <a:t>更 versatile：智能体改自己的生成器、用户自带 RTL、ASIC 标准单元</a:t>
             </a:r>
           </a:p>
         </p:txBody>
@@ -12064,7 +12065,7 @@
         <p:spPr>
           <a:xfrm>
             <a:off x="640080" y="1645920"/>
-            <a:ext cx="3566160" cy="4572000"/>
+            <a:ext cx="3566160" cy="4206240"/>
           </a:xfrm>
           <a:prstGeom prst="roundRect">
             <a:avLst>
@@ -12105,216 +12106,156 @@
       </p:sp>
       <p:sp>
         <p:nvSpPr>
-          <p:cNvPr id="7" name="Rectangle 6"/>
+          <p:cNvPr id="7" name="TextBox 6"/>
+          <p:cNvSpPr txBox="1"/>
+          <p:nvPr/>
+        </p:nvSpPr>
+        <p:spPr>
+          <a:xfrm>
+            <a:off x="841248" y="1810512"/>
+            <a:ext cx="3163824" cy="365760"/>
+          </a:xfrm>
+          <a:prstGeom prst="rect">
+            <a:avLst/>
+          </a:prstGeom>
+          <a:noFill/>
+        </p:spPr>
+        <p:txBody>
+          <a:bodyPr wrap="square" anchor="t" lIns="0" rIns="0" tIns="0" bIns="0">
+            <a:spAutoFit/>
+          </a:bodyPr>
+          <a:lstStyle/>
+          <a:p>
+            <a:pPr algn="l">
+              <a:lnSpc>
+                <a:spcPct val="115000"/>
+              </a:lnSpc>
+            </a:pPr>
+            <a:r>
+              <a:rPr sz="1500" b="1">
+                <a:solidFill>
+                  <a:srgbClr val="ECECE6"/>
+                </a:solidFill>
+                <a:latin typeface="PingFang SC"/>
+              </a:rPr>
+              <a:t>智能体改生成器（author 模式）</a:t>
+            </a:r>
+          </a:p>
+        </p:txBody>
+      </p:sp>
+      <p:sp>
+        <p:nvSpPr>
+          <p:cNvPr id="8" name="TextBox 7"/>
+          <p:cNvSpPr txBox="1"/>
+          <p:nvPr/>
+        </p:nvSpPr>
+        <p:spPr>
+          <a:xfrm>
+            <a:off x="841248" y="2212848"/>
+            <a:ext cx="3163824" cy="3474720"/>
+          </a:xfrm>
+          <a:prstGeom prst="rect">
+            <a:avLst/>
+          </a:prstGeom>
+          <a:noFill/>
+        </p:spPr>
+        <p:txBody>
+          <a:bodyPr wrap="square" anchor="t" lIns="0" rIns="0" tIns="0" bIns="0">
+            <a:spAutoFit/>
+          </a:bodyPr>
+          <a:lstStyle/>
+          <a:p>
+            <a:pPr algn="l">
+              <a:lnSpc>
+                <a:spcPct val="115000"/>
+              </a:lnSpc>
+            </a:pPr>
+            <a:r>
+              <a:rPr sz="1300" b="0">
+                <a:solidFill>
+                  <a:srgbClr val="A9A89F"/>
+                </a:solidFill>
+                <a:latin typeface="PingFang SC"/>
+              </a:rPr>
+              <a:t>AGH 里一个独立会话（author 配方，可写/可执行）在 silicon_agent/ 的草稿副本上改代码，sa_check 用真实工具链试跑，sa_propose 提交 diff。</a:t>
+            </a:r>
+          </a:p>
+          <a:p>
+            <a:pPr algn="l">
+              <a:lnSpc>
+                <a:spcPct val="115000"/>
+              </a:lnSpc>
+            </a:pPr>
+            <a:r>
+              <a:rPr sz="1300" b="0">
+                <a:solidFill>
+                  <a:srgbClr val="A9A89F"/>
+                </a:solidFill>
+                <a:latin typeface="PingFang SC"/>
+              </a:rPr>
+              <a:t/>
+            </a:r>
+          </a:p>
+          <a:p>
+            <a:pPr algn="l">
+              <a:lnSpc>
+                <a:spcPct val="115000"/>
+              </a:lnSpc>
+            </a:pPr>
+            <a:r>
+              <a:rPr sz="1300" b="0">
+                <a:solidFill>
+                  <a:srgbClr val="A9A89F"/>
+                </a:solidFill>
+                <a:latin typeface="PingFang SC"/>
+              </a:rPr>
+              <a:t>作业服务器门禁：所有预设可发射/展开、bench 用例行为仿真、未改 IR 形式等价、测试台变异分数不降、再在改过的生成器上实跑 A/B。</a:t>
+            </a:r>
+          </a:p>
+          <a:p>
+            <a:pPr algn="l">
+              <a:lnSpc>
+                <a:spcPct val="115000"/>
+              </a:lnSpc>
+            </a:pPr>
+            <a:r>
+              <a:rPr sz="1300" b="0">
+                <a:solidFill>
+                  <a:srgbClr val="A9A89F"/>
+                </a:solidFill>
+                <a:latin typeface="PingFang SC"/>
+              </a:rPr>
+              <a:t/>
+            </a:r>
+          </a:p>
+          <a:p>
+            <a:pPr algn="l">
+              <a:lnSpc>
+                <a:spcPct val="115000"/>
+              </a:lnSpc>
+            </a:pPr>
+            <a:r>
+              <a:rPr sz="1300" b="0">
+                <a:solidFill>
+                  <a:srgbClr val="34C759"/>
+                </a:solidFill>
+                <a:latin typeface="PingFang SC"/>
+              </a:rPr>
+              <a:t>第一个提案：智能体给 CORDIC 加了 reg_out 旋钮，门禁 4/4 通过，A/B 实测 202 MHz。合并仍由人决定。</a:t>
+            </a:r>
+          </a:p>
+        </p:txBody>
+      </p:sp>
+      <p:sp>
+        <p:nvSpPr>
+          <p:cNvPr id="9" name="Rounded Rectangle 8"/>
           <p:cNvSpPr/>
           <p:nvPr/>
         </p:nvSpPr>
         <p:spPr>
           <a:xfrm>
-            <a:off x="640080" y="1645920"/>
-            <a:ext cx="3566160" cy="73152"/>
-          </a:xfrm>
-          <a:prstGeom prst="rect">
-            <a:avLst/>
-          </a:prstGeom>
-          <a:solidFill>
-            <a:srgbClr val="34C759"/>
-          </a:solidFill>
-          <a:ln>
-            <a:noFill/>
-          </a:ln>
-          <a:effectLst/>
-        </p:spPr>
-        <p:style>
-          <a:lnRef idx="1">
-            <a:schemeClr val="accent1"/>
-          </a:lnRef>
-          <a:fillRef idx="3">
-            <a:schemeClr val="accent1"/>
-          </a:fillRef>
-          <a:effectRef idx="2">
-            <a:schemeClr val="accent1"/>
-          </a:effectRef>
-          <a:fontRef idx="minor">
-            <a:schemeClr val="lt1"/>
-          </a:fontRef>
-        </p:style>
-        <p:txBody>
-          <a:bodyPr rtlCol="0" anchor="ctr" lIns="0" rIns="0"/>
-          <a:lstStyle/>
-          <a:p>
-            <a:pPr algn="ctr"/>
-          </a:p>
-        </p:txBody>
-      </p:sp>
-      <p:sp>
-        <p:nvSpPr>
-          <p:cNvPr id="8" name="TextBox 7"/>
-          <p:cNvSpPr txBox="1"/>
-          <p:nvPr/>
-        </p:nvSpPr>
-        <p:spPr>
-          <a:xfrm>
-            <a:off x="841248" y="1874519"/>
-            <a:ext cx="3200400" cy="365760"/>
-          </a:xfrm>
-          <a:prstGeom prst="rect">
-            <a:avLst/>
-          </a:prstGeom>
-          <a:noFill/>
-        </p:spPr>
-        <p:txBody>
-          <a:bodyPr wrap="square" anchor="t" lIns="0" rIns="0" tIns="0" bIns="0">
-            <a:spAutoFit/>
-          </a:bodyPr>
-          <a:lstStyle/>
-          <a:p>
-            <a:pPr algn="l">
-              <a:lnSpc>
-                <a:spcPct val="115000"/>
-              </a:lnSpc>
-            </a:pPr>
-            <a:r>
-              <a:rPr sz="1400" b="1">
-                <a:solidFill>
-                  <a:srgbClr val="34C759"/>
-                </a:solidFill>
-                <a:latin typeface="PingFang SC"/>
-              </a:rPr>
-              <a:t>已完成（本周）</a:t>
-            </a:r>
-          </a:p>
-        </p:txBody>
-      </p:sp>
-      <p:sp>
-        <p:nvSpPr>
-          <p:cNvPr id="9" name="TextBox 8"/>
-          <p:cNvSpPr txBox="1"/>
-          <p:nvPr/>
-        </p:nvSpPr>
-        <p:spPr>
-          <a:xfrm>
-            <a:off x="841248" y="2331720"/>
-            <a:ext cx="3200400" cy="3840480"/>
-          </a:xfrm>
-          <a:prstGeom prst="rect">
-            <a:avLst/>
-          </a:prstGeom>
-          <a:noFill/>
-        </p:spPr>
-        <p:txBody>
-          <a:bodyPr wrap="square" anchor="t" lIns="0" rIns="0" tIns="0" bIns="0">
-            <a:spAutoFit/>
-          </a:bodyPr>
-          <a:lstStyle/>
-          <a:p>
-            <a:pPr algn="l">
-              <a:lnSpc>
-                <a:spcPct val="130000"/>
-              </a:lnSpc>
-            </a:pPr>
-            <a:r>
-              <a:rPr sz="1150" b="0">
-                <a:solidFill>
-                  <a:srgbClr val="A9A89F"/>
-                </a:solidFill>
-                <a:latin typeface="PingFang SC"/>
-              </a:rPr>
-              <a:t>✓ 5 种器件插件：ECP5 / Spartan-7 / iCE40 / Gowin / GateMate</a:t>
-            </a:r>
-          </a:p>
-          <a:p>
-            <a:pPr algn="l">
-              <a:lnSpc>
-                <a:spcPct val="130000"/>
-              </a:lnSpc>
-            </a:pPr>
-            <a:r>
-              <a:rPr sz="1150" b="0">
-                <a:solidFill>
-                  <a:srgbClr val="A9A89F"/>
-                </a:solidFill>
-                <a:latin typeface="PingFang SC"/>
-              </a:rPr>
-              <a:t>✓ 7 类生成器：matmul、FIR(+系数端口)、conv2d、FIR 级联、CORDIC、FFT、通用 IR 图</a:t>
-            </a:r>
-          </a:p>
-          <a:p>
-            <a:pPr algn="l">
-              <a:lnSpc>
-                <a:spcPct val="130000"/>
-              </a:lnSpc>
-            </a:pPr>
-            <a:r>
-              <a:rPr sz="1150" b="0">
-                <a:solidFill>
-                  <a:srgbClr val="A9A89F"/>
-                </a:solidFill>
-                <a:latin typeface="PingFang SC"/>
-              </a:rPr>
-              <a:t>✓ 并行候选评估 + kNN 校准估算（Gowin Fmax 误差 53%→13%）</a:t>
-            </a:r>
-          </a:p>
-          <a:p>
-            <a:pPr algn="l">
-              <a:lnSpc>
-                <a:spcPct val="130000"/>
-              </a:lnSpc>
-            </a:pPr>
-            <a:r>
-              <a:rPr sz="1150" b="0">
-                <a:solidFill>
-                  <a:srgbClr val="A9A89F"/>
-                </a:solidFill>
-                <a:latin typeface="PingFang SC"/>
-              </a:rPr>
-              <a:t>✓ 形式等价 + 覆盖率 + 每晚回归告警 + 多种子 Fmax</a:t>
-            </a:r>
-          </a:p>
-          <a:p>
-            <a:pPr algn="l">
-              <a:lnSpc>
-                <a:spcPct val="130000"/>
-              </a:lnSpc>
-            </a:pPr>
-            <a:r>
-              <a:rPr sz="1150" b="0">
-                <a:solidFill>
-                  <a:srgbClr val="A9A89F"/>
-                </a:solidFill>
-                <a:latin typeface="PingFang SC"/>
-              </a:rPr>
-              <a:t>✓ 交付包含板级工程；规划器多模型 A/B 开关</a:t>
-            </a:r>
-          </a:p>
-          <a:p>
-            <a:pPr algn="l">
-              <a:lnSpc>
-                <a:spcPct val="130000"/>
-              </a:lnSpc>
-            </a:pPr>
-            <a:r>
-              <a:rPr sz="1150" b="0">
-                <a:solidFill>
-                  <a:srgbClr val="A9A89F"/>
-                </a:solidFill>
-                <a:latin typeface="PingFang SC"/>
-              </a:rPr>
-              <a:t>✓ 聊天：ETA、架构替代方案一键追问、会话隔离</a:t>
-            </a:r>
-          </a:p>
-        </p:txBody>
-      </p:sp>
-      <p:sp>
-        <p:nvSpPr>
-          <p:cNvPr id="10" name="Rounded Rectangle 9"/>
-          <p:cNvSpPr/>
-          <p:nvPr/>
-        </p:nvSpPr>
-        <p:spPr>
-          <a:xfrm>
-            <a:off x="4389120" y="1645920"/>
-            <a:ext cx="3566160" cy="4572000"/>
+            <a:off x="4343400" y="1645920"/>
+            <a:ext cx="3566160" cy="4206240"/>
           </a:xfrm>
           <a:prstGeom prst="roundRect">
             <a:avLst>
@@ -12355,184 +12296,156 @@
       </p:sp>
       <p:sp>
         <p:nvSpPr>
-          <p:cNvPr id="11" name="Rectangle 10"/>
+          <p:cNvPr id="10" name="TextBox 9"/>
+          <p:cNvSpPr txBox="1"/>
+          <p:nvPr/>
+        </p:nvSpPr>
+        <p:spPr>
+          <a:xfrm>
+            <a:off x="4544568" y="1810512"/>
+            <a:ext cx="3163824" cy="365760"/>
+          </a:xfrm>
+          <a:prstGeom prst="rect">
+            <a:avLst/>
+          </a:prstGeom>
+          <a:noFill/>
+        </p:spPr>
+        <p:txBody>
+          <a:bodyPr wrap="square" anchor="t" lIns="0" rIns="0" tIns="0" bIns="0">
+            <a:spAutoFit/>
+          </a:bodyPr>
+          <a:lstStyle/>
+          <a:p>
+            <a:pPr algn="l">
+              <a:lnSpc>
+                <a:spcPct val="115000"/>
+              </a:lnSpc>
+            </a:pPr>
+            <a:r>
+              <a:rPr sz="1500" b="1">
+                <a:solidFill>
+                  <a:srgbClr val="ECECE6"/>
+                </a:solidFill>
+                <a:latin typeface="PingFang SC"/>
+              </a:rPr>
+              <a:t>用户自带 RTL</a:t>
+            </a:r>
+          </a:p>
+        </p:txBody>
+      </p:sp>
+      <p:sp>
+        <p:nvSpPr>
+          <p:cNvPr id="11" name="TextBox 10"/>
+          <p:cNvSpPr txBox="1"/>
+          <p:nvPr/>
+        </p:nvSpPr>
+        <p:spPr>
+          <a:xfrm>
+            <a:off x="4544568" y="2212848"/>
+            <a:ext cx="3163824" cy="3474720"/>
+          </a:xfrm>
+          <a:prstGeom prst="rect">
+            <a:avLst/>
+          </a:prstGeom>
+          <a:noFill/>
+        </p:spPr>
+        <p:txBody>
+          <a:bodyPr wrap="square" anchor="t" lIns="0" rIns="0" tIns="0" bIns="0">
+            <a:spAutoFit/>
+          </a:bodyPr>
+          <a:lstStyle/>
+          <a:p>
+            <a:pPr algn="l">
+              <a:lnSpc>
+                <a:spcPct val="115000"/>
+              </a:lnSpc>
+            </a:pPr>
+            <a:r>
+              <a:rPr sz="1300" b="0">
+                <a:solidFill>
+                  <a:srgbClr val="A9A89F"/>
+                </a:solidFill>
+                <a:latin typeface="PingFang SC"/>
+              </a:rPr>
+              <a:t>上传 SystemVerilog + 自检测试台 + 允许调的参数，注册成 rtl:&lt;id&gt;；同一条阶梯：用户的台跑行为级和每一级网表，综合、布局布线、形式属性。</a:t>
+            </a:r>
+          </a:p>
+          <a:p>
+            <a:pPr algn="l">
+              <a:lnSpc>
+                <a:spcPct val="115000"/>
+              </a:lnSpc>
+            </a:pPr>
+            <a:r>
+              <a:rPr sz="1300" b="0">
+                <a:solidFill>
+                  <a:srgbClr val="A9A89F"/>
+                </a:solidFill>
+                <a:latin typeface="PingFang SC"/>
+              </a:rPr>
+              <a:t/>
+            </a:r>
+          </a:p>
+          <a:p>
+            <a:pPr algn="l">
+              <a:lnSpc>
+                <a:spcPct val="115000"/>
+              </a:lnSpc>
+            </a:pPr>
+            <a:r>
+              <a:rPr sz="1300" b="0">
+                <a:solidFill>
+                  <a:srgbClr val="A9A89F"/>
+                </a:solidFill>
+                <a:latin typeface="PingFang SC"/>
+              </a:rPr>
+              <a:t>流水线改动用 transfer-level 等价（允许延迟偏移）证明两组参数功能相同。</a:t>
+            </a:r>
+          </a:p>
+          <a:p>
+            <a:pPr algn="l">
+              <a:lnSpc>
+                <a:spcPct val="115000"/>
+              </a:lnSpc>
+            </a:pPr>
+            <a:r>
+              <a:rPr sz="1300" b="0">
+                <a:solidFill>
+                  <a:srgbClr val="A9A89F"/>
+                </a:solidFill>
+                <a:latin typeface="PingFang SC"/>
+              </a:rPr>
+              <a:t/>
+            </a:r>
+          </a:p>
+          <a:p>
+            <a:pPr algn="l">
+              <a:lnSpc>
+                <a:spcPct val="115000"/>
+              </a:lnSpc>
+            </a:pPr>
+            <a:r>
+              <a:rPr sz="1300" b="0">
+                <a:solidFill>
+                  <a:srgbClr val="34C759"/>
+                </a:solidFill>
+                <a:latin typeface="PingFang SC"/>
+              </a:rPr>
+              <a:t>聊天里一个 ＋ 按钮附加 .sv 文件，智能体自己写台、注册、跑。</a:t>
+            </a:r>
+          </a:p>
+        </p:txBody>
+      </p:sp>
+      <p:sp>
+        <p:nvSpPr>
+          <p:cNvPr id="12" name="Rounded Rectangle 11"/>
           <p:cNvSpPr/>
           <p:nvPr/>
         </p:nvSpPr>
         <p:spPr>
           <a:xfrm>
-            <a:off x="4389120" y="1645920"/>
-            <a:ext cx="3566160" cy="73152"/>
-          </a:xfrm>
-          <a:prstGeom prst="rect">
-            <a:avLst/>
-          </a:prstGeom>
-          <a:solidFill>
-            <a:srgbClr val="4A90E2"/>
-          </a:solidFill>
-          <a:ln>
-            <a:noFill/>
-          </a:ln>
-          <a:effectLst/>
-        </p:spPr>
-        <p:style>
-          <a:lnRef idx="1">
-            <a:schemeClr val="accent1"/>
-          </a:lnRef>
-          <a:fillRef idx="3">
-            <a:schemeClr val="accent1"/>
-          </a:fillRef>
-          <a:effectRef idx="2">
-            <a:schemeClr val="accent1"/>
-          </a:effectRef>
-          <a:fontRef idx="minor">
-            <a:schemeClr val="lt1"/>
-          </a:fontRef>
-        </p:style>
-        <p:txBody>
-          <a:bodyPr rtlCol="0" anchor="ctr" lIns="0" rIns="0"/>
-          <a:lstStyle/>
-          <a:p>
-            <a:pPr algn="ctr"/>
-          </a:p>
-        </p:txBody>
-      </p:sp>
-      <p:sp>
-        <p:nvSpPr>
-          <p:cNvPr id="12" name="TextBox 11"/>
-          <p:cNvSpPr txBox="1"/>
-          <p:nvPr/>
-        </p:nvSpPr>
-        <p:spPr>
-          <a:xfrm>
-            <a:off x="4590288" y="1874519"/>
-            <a:ext cx="3200400" cy="365760"/>
-          </a:xfrm>
-          <a:prstGeom prst="rect">
-            <a:avLst/>
-          </a:prstGeom>
-          <a:noFill/>
-        </p:spPr>
-        <p:txBody>
-          <a:bodyPr wrap="square" anchor="t" lIns="0" rIns="0" tIns="0" bIns="0">
-            <a:spAutoFit/>
-          </a:bodyPr>
-          <a:lstStyle/>
-          <a:p>
-            <a:pPr algn="l">
-              <a:lnSpc>
-                <a:spcPct val="115000"/>
-              </a:lnSpc>
-            </a:pPr>
-            <a:r>
-              <a:rPr sz="1400" b="1">
-                <a:solidFill>
-                  <a:srgbClr val="4A90E2"/>
-                </a:solidFill>
-                <a:latin typeface="PingFang SC"/>
-              </a:rPr>
-              <a:t>下一步 · 扩大空间</a:t>
-            </a:r>
-          </a:p>
-        </p:txBody>
-      </p:sp>
-      <p:sp>
-        <p:nvSpPr>
-          <p:cNvPr id="13" name="TextBox 12"/>
-          <p:cNvSpPr txBox="1"/>
-          <p:nvPr/>
-        </p:nvSpPr>
-        <p:spPr>
-          <a:xfrm>
-            <a:off x="4590288" y="2331720"/>
-            <a:ext cx="3200400" cy="3840480"/>
-          </a:xfrm>
-          <a:prstGeom prst="rect">
-            <a:avLst/>
-          </a:prstGeom>
-          <a:noFill/>
-        </p:spPr>
-        <p:txBody>
-          <a:bodyPr wrap="square" anchor="t" lIns="0" rIns="0" tIns="0" bIns="0">
-            <a:spAutoFit/>
-          </a:bodyPr>
-          <a:lstStyle/>
-          <a:p>
-            <a:pPr algn="l">
-              <a:lnSpc>
-                <a:spcPct val="130000"/>
-              </a:lnSpc>
-            </a:pPr>
-            <a:r>
-              <a:rPr sz="1150" b="0">
-                <a:solidFill>
-                  <a:srgbClr val="A9A89F"/>
-                </a:solidFill>
-                <a:latin typeface="PingFang SC"/>
-              </a:rPr>
-              <a:t>• Artix-7 / UltraScale+：装上 Vivado 器件文件即启用（后端已写好）</a:t>
-            </a:r>
-          </a:p>
-          <a:p>
-            <a:pPr algn="l">
-              <a:lnSpc>
-                <a:spcPct val="130000"/>
-              </a:lnSpc>
-            </a:pPr>
-            <a:r>
-              <a:rPr sz="1150" b="0">
-                <a:solidFill>
-                  <a:srgbClr val="A9A89F"/>
-                </a:solidFill>
-                <a:latin typeface="PingFang SC"/>
-              </a:rPr>
-              <a:t>• 更多节点：池化、滑窗 max、dot-product 折叠 matmul、CIC 抽取</a:t>
-            </a:r>
-          </a:p>
-          <a:p>
-            <a:pPr algn="l">
-              <a:lnSpc>
-                <a:spcPct val="130000"/>
-              </a:lnSpc>
-            </a:pPr>
-            <a:r>
-              <a:rPr sz="1150" b="0">
-                <a:solidFill>
-                  <a:srgbClr val="A9A89F"/>
-                </a:solidFill>
-                <a:latin typeface="PingFang SC"/>
-              </a:rPr>
-              <a:t>• 估算器上做贝叶斯优化：用 kNN 后验直接提候选，减少规划器调用</a:t>
-            </a:r>
-          </a:p>
-          <a:p>
-            <a:pPr algn="l">
-              <a:lnSpc>
-                <a:spcPct val="130000"/>
-              </a:lnSpc>
-            </a:pPr>
-            <a:r>
-              <a:rPr sz="1150" b="0">
-                <a:solidFill>
-                  <a:srgbClr val="A9A89F"/>
-                </a:solidFill>
-                <a:latin typeface="PingFang SC"/>
-              </a:rPr>
-              <a:t>• 多模型规划器基准对照（DeepSeek-reasoner / Claude / GPT）跑进每晚回归</a:t>
-            </a:r>
-          </a:p>
-        </p:txBody>
-      </p:sp>
-      <p:sp>
-        <p:nvSpPr>
-          <p:cNvPr id="14" name="Rounded Rectangle 13"/>
-          <p:cNvSpPr/>
-          <p:nvPr/>
-        </p:nvSpPr>
-        <p:spPr>
-          <a:xfrm>
-            <a:off x="8138159" y="1645920"/>
-            <a:ext cx="3566160" cy="4572000"/>
+            <a:off x="8046720" y="1645920"/>
+            <a:ext cx="3566160" cy="4206240"/>
           </a:xfrm>
           <a:prstGeom prst="roundRect">
             <a:avLst>
@@ -12573,170 +12486,181 @@
       </p:sp>
       <p:sp>
         <p:nvSpPr>
-          <p:cNvPr id="15" name="Rectangle 14"/>
-          <p:cNvSpPr/>
-          <p:nvPr/>
-        </p:nvSpPr>
-        <p:spPr>
-          <a:xfrm>
-            <a:off x="8138159" y="1645920"/>
-            <a:ext cx="3566160" cy="73152"/>
-          </a:xfrm>
-          <a:prstGeom prst="rect">
-            <a:avLst/>
-          </a:prstGeom>
-          <a:solidFill>
-            <a:srgbClr val="D9A21B"/>
-          </a:solidFill>
-          <a:ln>
-            <a:noFill/>
-          </a:ln>
-          <a:effectLst/>
-        </p:spPr>
-        <p:style>
-          <a:lnRef idx="1">
-            <a:schemeClr val="accent1"/>
-          </a:lnRef>
-          <a:fillRef idx="3">
-            <a:schemeClr val="accent1"/>
-          </a:fillRef>
-          <a:effectRef idx="2">
-            <a:schemeClr val="accent1"/>
-          </a:effectRef>
-          <a:fontRef idx="minor">
-            <a:schemeClr val="lt1"/>
-          </a:fontRef>
-        </p:style>
-        <p:txBody>
-          <a:bodyPr rtlCol="0" anchor="ctr" lIns="0" rIns="0"/>
-          <a:lstStyle/>
-          <a:p>
-            <a:pPr algn="ctr"/>
-          </a:p>
-        </p:txBody>
-      </p:sp>
-      <p:sp>
-        <p:nvSpPr>
-          <p:cNvPr id="16" name="TextBox 15"/>
-          <p:cNvSpPr txBox="1"/>
-          <p:nvPr/>
-        </p:nvSpPr>
-        <p:spPr>
-          <a:xfrm>
-            <a:off x="8339327" y="1874519"/>
-            <a:ext cx="3200400" cy="365760"/>
-          </a:xfrm>
-          <a:prstGeom prst="rect">
-            <a:avLst/>
-          </a:prstGeom>
-          <a:noFill/>
-        </p:spPr>
-        <p:txBody>
-          <a:bodyPr wrap="square" anchor="t" lIns="0" rIns="0" tIns="0" bIns="0">
-            <a:spAutoFit/>
-          </a:bodyPr>
-          <a:lstStyle/>
-          <a:p>
-            <a:pPr algn="l">
-              <a:lnSpc>
-                <a:spcPct val="115000"/>
-              </a:lnSpc>
-            </a:pPr>
-            <a:r>
-              <a:rPr sz="1400" b="1">
-                <a:solidFill>
-                  <a:srgbClr val="D9A21B"/>
-                </a:solidFill>
-                <a:latin typeface="PingFang SC"/>
-              </a:rPr>
-              <a:t>更远 · 平台化</a:t>
-            </a:r>
-          </a:p>
-        </p:txBody>
-      </p:sp>
-      <p:sp>
-        <p:nvSpPr>
-          <p:cNvPr id="17" name="TextBox 16"/>
-          <p:cNvSpPr txBox="1"/>
-          <p:nvPr/>
-        </p:nvSpPr>
-        <p:spPr>
-          <a:xfrm>
-            <a:off x="8339327" y="2331720"/>
-            <a:ext cx="3200400" cy="3840480"/>
-          </a:xfrm>
-          <a:prstGeom prst="rect">
-            <a:avLst/>
-          </a:prstGeom>
-          <a:noFill/>
-        </p:spPr>
-        <p:txBody>
-          <a:bodyPr wrap="square" anchor="t" lIns="0" rIns="0" tIns="0" bIns="0">
-            <a:spAutoFit/>
-          </a:bodyPr>
-          <a:lstStyle/>
-          <a:p>
-            <a:pPr algn="l">
-              <a:lnSpc>
-                <a:spcPct val="130000"/>
-              </a:lnSpc>
-            </a:pPr>
-            <a:r>
-              <a:rPr sz="1150" b="0">
+          <p:cNvPr id="13" name="TextBox 12"/>
+          <p:cNvSpPr txBox="1"/>
+          <p:nvPr/>
+        </p:nvSpPr>
+        <p:spPr>
+          <a:xfrm>
+            <a:off x="8247888" y="1810512"/>
+            <a:ext cx="3163824" cy="365760"/>
+          </a:xfrm>
+          <a:prstGeom prst="rect">
+            <a:avLst/>
+          </a:prstGeom>
+          <a:noFill/>
+        </p:spPr>
+        <p:txBody>
+          <a:bodyPr wrap="square" anchor="t" lIns="0" rIns="0" tIns="0" bIns="0">
+            <a:spAutoFit/>
+          </a:bodyPr>
+          <a:lstStyle/>
+          <a:p>
+            <a:pPr algn="l">
+              <a:lnSpc>
+                <a:spcPct val="115000"/>
+              </a:lnSpc>
+            </a:pPr>
+            <a:r>
+              <a:rPr sz="1500" b="1">
+                <a:solidFill>
+                  <a:srgbClr val="ECECE6"/>
+                </a:solidFill>
+                <a:latin typeface="PingFang SC"/>
+              </a:rPr>
+              <a:t>ASIC：sky130 + OpenROAD</a:t>
+            </a:r>
+          </a:p>
+        </p:txBody>
+      </p:sp>
+      <p:sp>
+        <p:nvSpPr>
+          <p:cNvPr id="14" name="TextBox 13"/>
+          <p:cNvSpPr txBox="1"/>
+          <p:nvPr/>
+        </p:nvSpPr>
+        <p:spPr>
+          <a:xfrm>
+            <a:off x="8247888" y="2212848"/>
+            <a:ext cx="3163824" cy="3474720"/>
+          </a:xfrm>
+          <a:prstGeom prst="rect">
+            <a:avLst/>
+          </a:prstGeom>
+          <a:noFill/>
+        </p:spPr>
+        <p:txBody>
+          <a:bodyPr wrap="square" anchor="t" lIns="0" rIns="0" tIns="0" bIns="0">
+            <a:spAutoFit/>
+          </a:bodyPr>
+          <a:lstStyle/>
+          <a:p>
+            <a:pPr algn="l">
+              <a:lnSpc>
+                <a:spcPct val="115000"/>
+              </a:lnSpc>
+            </a:pPr>
+            <a:r>
+              <a:rPr sz="1300" b="0">
                 <a:solidFill>
                   <a:srgbClr val="A9A89F"/>
                 </a:solidFill>
                 <a:latin typeface="PingFang SC"/>
               </a:rPr>
-              <a:t>• 有板后：ILA/VIO 在板验证作为第六级</a:t>
-            </a:r>
-          </a:p>
-          <a:p>
-            <a:pPr algn="l">
-              <a:lnSpc>
-                <a:spcPct val="130000"/>
-              </a:lnSpc>
-            </a:pPr>
-            <a:r>
-              <a:rPr sz="1150" b="0">
+              <a:t>OpenROAD-flow-scripts 跑在独立容器里，队列目录耦合；指标变成标准单元数、面积 µm²、功耗、STA 关键路径（fa_1/ha_1 进位链）。</a:t>
+            </a:r>
+          </a:p>
+          <a:p>
+            <a:pPr algn="l">
+              <a:lnSpc>
+                <a:spcPct val="115000"/>
+              </a:lnSpc>
+            </a:pPr>
+            <a:r>
+              <a:rPr sz="1300" b="0">
                 <a:solidFill>
                   <a:srgbClr val="A9A89F"/>
                 </a:solidFill>
                 <a:latin typeface="PingFang SC"/>
               </a:rPr>
-              <a:t>• 开放 IR 规范（/schema 已导出），让外部生成器接入；设计记忆跨用户共享（可审计）</a:t>
-            </a:r>
-          </a:p>
-          <a:p>
-            <a:pPr algn="l">
-              <a:lnSpc>
-                <a:spcPct val="130000"/>
-              </a:lnSpc>
-            </a:pPr>
-            <a:r>
-              <a:rPr sz="1150" b="0">
+              <a:t/>
+            </a:r>
+          </a:p>
+          <a:p>
+            <a:pPr algn="l">
+              <a:lnSpc>
+                <a:spcPct val="115000"/>
+              </a:lnSpc>
+            </a:pPr>
+            <a:r>
+              <a:rPr sz="1300" b="0">
                 <a:solidFill>
                   <a:srgbClr val="A9A89F"/>
                 </a:solidFill>
                 <a:latin typeface="PingFang SC"/>
               </a:rPr>
-              <a:t>• 形式等价扩展到跨 IR（折叠 vs 展开同一滤波器）</a:t>
-            </a:r>
-          </a:p>
-          <a:p>
-            <a:pPr algn="l">
-              <a:lnSpc>
-                <a:spcPct val="130000"/>
-              </a:lnSpc>
-            </a:pPr>
-            <a:r>
-              <a:rPr sz="1150" b="0">
+              <a:t>综合后与布线后网表都用 sky130_fd_sc_hd 功能模型跑向量台；交付包含 GDS。</a:t>
+            </a:r>
+          </a:p>
+          <a:p>
+            <a:pPr algn="l">
+              <a:lnSpc>
+                <a:spcPct val="115000"/>
+              </a:lnSpc>
+            </a:pPr>
+            <a:r>
+              <a:rPr sz="1300" b="0">
                 <a:solidFill>
                   <a:srgbClr val="A9A89F"/>
                 </a:solidFill>
                 <a:latin typeface="PingFang SC"/>
               </a:rPr>
-              <a:t>• 从 SDF 时序仿真到门级功耗估计</a:t>
+              <a:t/>
+            </a:r>
+          </a:p>
+          <a:p>
+            <a:pPr algn="l">
+              <a:lnSpc>
+                <a:spcPct val="115000"/>
+              </a:lnSpc>
+            </a:pPr>
+            <a:r>
+              <a:rPr sz="1300" b="0">
+                <a:solidFill>
+                  <a:srgbClr val="34C759"/>
+                </a:solidFill>
+                <a:latin typeface="PingFang SC"/>
+              </a:rPr>
+              <a:t>首个实测：16 阶 FIR 207.8 MHz、1833 单元、22.2k µm²、7.4 mW，规划器自己从 3698 单元收敛到 1833。</a:t>
+            </a:r>
+          </a:p>
+        </p:txBody>
+      </p:sp>
+      <p:sp>
+        <p:nvSpPr>
+          <p:cNvPr id="15" name="TextBox 14"/>
+          <p:cNvSpPr txBox="1"/>
+          <p:nvPr/>
+        </p:nvSpPr>
+        <p:spPr>
+          <a:xfrm>
+            <a:off x="640080" y="6035040"/>
+            <a:ext cx="10972800" cy="457200"/>
+          </a:xfrm>
+          <a:prstGeom prst="rect">
+            <a:avLst/>
+          </a:prstGeom>
+          <a:noFill/>
+        </p:spPr>
+        <p:txBody>
+          <a:bodyPr wrap="square" anchor="t" lIns="0" rIns="0" tIns="0" bIns="0">
+            <a:spAutoFit/>
+          </a:bodyPr>
+          <a:lstStyle/>
+          <a:p>
+            <a:pPr algn="l">
+              <a:lnSpc>
+                <a:spcPct val="115000"/>
+              </a:lnSpc>
+            </a:pPr>
+            <a:r>
+              <a:rPr sz="1250" b="0">
+                <a:solidFill>
+                  <a:srgbClr val="A9A89F"/>
+                </a:solidFill>
+                <a:latin typeface="PingFang SC"/>
+              </a:rPr>
+              <a:t>同一轮还加了：decim / nco / iir 三个生成器（DDC = nco→decim→fir 一张图）、GP 代理模型排序候选、设计空间扫描卡、每次运行的变异分数、MCP 服务器。</a:t>
             </a:r>
           </a:p>
         </p:txBody>
@@ -12775,6 +12699,874 @@
         </p:nvSpPr>
         <p:spPr>
           <a:xfrm>
+            <a:off x="640080" y="411480"/>
+            <a:ext cx="7315200" cy="274320"/>
+          </a:xfrm>
+          <a:prstGeom prst="rect">
+            <a:avLst/>
+          </a:prstGeom>
+          <a:noFill/>
+        </p:spPr>
+        <p:txBody>
+          <a:bodyPr wrap="square" anchor="t" lIns="0" rIns="0" tIns="0" bIns="0">
+            <a:spAutoFit/>
+          </a:bodyPr>
+          <a:lstStyle/>
+          <a:p>
+            <a:pPr algn="l">
+              <a:lnSpc>
+                <a:spcPct val="115000"/>
+              </a:lnSpc>
+            </a:pPr>
+            <a:r>
+              <a:rPr sz="1200" b="1">
+                <a:solidFill>
+                  <a:srgbClr val="4A90E2"/>
+                </a:solidFill>
+                <a:latin typeface="Menlo"/>
+              </a:rPr>
+              <a:t>13 · 路线图</a:t>
+            </a:r>
+          </a:p>
+        </p:txBody>
+      </p:sp>
+      <p:sp>
+        <p:nvSpPr>
+          <p:cNvPr id="3" name="TextBox 2"/>
+          <p:cNvSpPr txBox="1"/>
+          <p:nvPr/>
+        </p:nvSpPr>
+        <p:spPr>
+          <a:xfrm>
+            <a:off x="640080" y="685800"/>
+            <a:ext cx="10515600" cy="731520"/>
+          </a:xfrm>
+          <a:prstGeom prst="rect">
+            <a:avLst/>
+          </a:prstGeom>
+          <a:noFill/>
+        </p:spPr>
+        <p:txBody>
+          <a:bodyPr wrap="square" anchor="t" lIns="0" rIns="0" tIns="0" bIns="0">
+            <a:spAutoFit/>
+          </a:bodyPr>
+          <a:lstStyle/>
+          <a:p>
+            <a:pPr algn="l">
+              <a:lnSpc>
+                <a:spcPct val="115000"/>
+              </a:lnSpc>
+            </a:pPr>
+            <a:r>
+              <a:rPr sz="3000" b="1">
+                <a:solidFill>
+                  <a:srgbClr val="ECECE6"/>
+                </a:solidFill>
+                <a:latin typeface="PingFang SC"/>
+              </a:rPr>
+              <a:t>路线图：本周做完的，和下一步</a:t>
+            </a:r>
+          </a:p>
+        </p:txBody>
+      </p:sp>
+      <p:sp>
+        <p:nvSpPr>
+          <p:cNvPr id="4" name="TextBox 3"/>
+          <p:cNvSpPr txBox="1"/>
+          <p:nvPr/>
+        </p:nvSpPr>
+        <p:spPr>
+          <a:xfrm>
+            <a:off x="11002975" y="6400800"/>
+            <a:ext cx="548640" cy="274320"/>
+          </a:xfrm>
+          <a:prstGeom prst="rect">
+            <a:avLst/>
+          </a:prstGeom>
+          <a:noFill/>
+        </p:spPr>
+        <p:txBody>
+          <a:bodyPr wrap="square" anchor="t" lIns="0" rIns="0" tIns="0" bIns="0">
+            <a:spAutoFit/>
+          </a:bodyPr>
+          <a:lstStyle/>
+          <a:p>
+            <a:pPr algn="r">
+              <a:lnSpc>
+                <a:spcPct val="115000"/>
+              </a:lnSpc>
+            </a:pPr>
+            <a:r>
+              <a:rPr sz="1000" b="0">
+                <a:solidFill>
+                  <a:srgbClr val="6F6E67"/>
+                </a:solidFill>
+                <a:latin typeface="Menlo"/>
+              </a:rPr>
+              <a:t>17</a:t>
+            </a:r>
+          </a:p>
+        </p:txBody>
+      </p:sp>
+      <p:sp>
+        <p:nvSpPr>
+          <p:cNvPr id="5" name="TextBox 4"/>
+          <p:cNvSpPr txBox="1"/>
+          <p:nvPr/>
+        </p:nvSpPr>
+        <p:spPr>
+          <a:xfrm>
+            <a:off x="640080" y="6400800"/>
+            <a:ext cx="2743200" cy="274320"/>
+          </a:xfrm>
+          <a:prstGeom prst="rect">
+            <a:avLst/>
+          </a:prstGeom>
+          <a:noFill/>
+        </p:spPr>
+        <p:txBody>
+          <a:bodyPr wrap="square" anchor="t" lIns="0" rIns="0" tIns="0" bIns="0">
+            <a:spAutoFit/>
+          </a:bodyPr>
+          <a:lstStyle/>
+          <a:p>
+            <a:pPr algn="l">
+              <a:lnSpc>
+                <a:spcPct val="115000"/>
+              </a:lnSpc>
+            </a:pPr>
+            <a:r>
+              <a:rPr sz="1000" b="0">
+                <a:solidFill>
+                  <a:srgbClr val="6F6E67"/>
+                </a:solidFill>
+                <a:latin typeface="Menlo"/>
+              </a:rPr>
+              <a:t>▣ silicon-agent</a:t>
+            </a:r>
+          </a:p>
+        </p:txBody>
+      </p:sp>
+      <p:sp>
+        <p:nvSpPr>
+          <p:cNvPr id="6" name="Rounded Rectangle 5"/>
+          <p:cNvSpPr/>
+          <p:nvPr/>
+        </p:nvSpPr>
+        <p:spPr>
+          <a:xfrm>
+            <a:off x="640080" y="1645920"/>
+            <a:ext cx="3566160" cy="4572000"/>
+          </a:xfrm>
+          <a:prstGeom prst="roundRect">
+            <a:avLst>
+              <a:gd name="adj" fmla="val 6000"/>
+            </a:avLst>
+          </a:prstGeom>
+          <a:solidFill>
+            <a:srgbClr val="1C1C1B"/>
+          </a:solidFill>
+          <a:ln w="9525">
+            <a:solidFill>
+              <a:srgbClr val="333331"/>
+            </a:solidFill>
+          </a:ln>
+          <a:effectLst/>
+        </p:spPr>
+        <p:style>
+          <a:lnRef idx="1">
+            <a:schemeClr val="accent1"/>
+          </a:lnRef>
+          <a:fillRef idx="3">
+            <a:schemeClr val="accent1"/>
+          </a:fillRef>
+          <a:effectRef idx="2">
+            <a:schemeClr val="accent1"/>
+          </a:effectRef>
+          <a:fontRef idx="minor">
+            <a:schemeClr val="lt1"/>
+          </a:fontRef>
+        </p:style>
+        <p:txBody>
+          <a:bodyPr rtlCol="0" anchor="ctr" lIns="0" rIns="0"/>
+          <a:lstStyle/>
+          <a:p>
+            <a:pPr algn="ctr"/>
+          </a:p>
+        </p:txBody>
+      </p:sp>
+      <p:sp>
+        <p:nvSpPr>
+          <p:cNvPr id="7" name="Rectangle 6"/>
+          <p:cNvSpPr/>
+          <p:nvPr/>
+        </p:nvSpPr>
+        <p:spPr>
+          <a:xfrm>
+            <a:off x="640080" y="1645920"/>
+            <a:ext cx="3566160" cy="73152"/>
+          </a:xfrm>
+          <a:prstGeom prst="rect">
+            <a:avLst/>
+          </a:prstGeom>
+          <a:solidFill>
+            <a:srgbClr val="34C759"/>
+          </a:solidFill>
+          <a:ln>
+            <a:noFill/>
+          </a:ln>
+          <a:effectLst/>
+        </p:spPr>
+        <p:style>
+          <a:lnRef idx="1">
+            <a:schemeClr val="accent1"/>
+          </a:lnRef>
+          <a:fillRef idx="3">
+            <a:schemeClr val="accent1"/>
+          </a:fillRef>
+          <a:effectRef idx="2">
+            <a:schemeClr val="accent1"/>
+          </a:effectRef>
+          <a:fontRef idx="minor">
+            <a:schemeClr val="lt1"/>
+          </a:fontRef>
+        </p:style>
+        <p:txBody>
+          <a:bodyPr rtlCol="0" anchor="ctr" lIns="0" rIns="0"/>
+          <a:lstStyle/>
+          <a:p>
+            <a:pPr algn="ctr"/>
+          </a:p>
+        </p:txBody>
+      </p:sp>
+      <p:sp>
+        <p:nvSpPr>
+          <p:cNvPr id="8" name="TextBox 7"/>
+          <p:cNvSpPr txBox="1"/>
+          <p:nvPr/>
+        </p:nvSpPr>
+        <p:spPr>
+          <a:xfrm>
+            <a:off x="841248" y="1874519"/>
+            <a:ext cx="3200400" cy="365760"/>
+          </a:xfrm>
+          <a:prstGeom prst="rect">
+            <a:avLst/>
+          </a:prstGeom>
+          <a:noFill/>
+        </p:spPr>
+        <p:txBody>
+          <a:bodyPr wrap="square" anchor="t" lIns="0" rIns="0" tIns="0" bIns="0">
+            <a:spAutoFit/>
+          </a:bodyPr>
+          <a:lstStyle/>
+          <a:p>
+            <a:pPr algn="l">
+              <a:lnSpc>
+                <a:spcPct val="115000"/>
+              </a:lnSpc>
+            </a:pPr>
+            <a:r>
+              <a:rPr sz="1400" b="1">
+                <a:solidFill>
+                  <a:srgbClr val="34C759"/>
+                </a:solidFill>
+                <a:latin typeface="PingFang SC"/>
+              </a:rPr>
+              <a:t>已完成</a:t>
+            </a:r>
+          </a:p>
+        </p:txBody>
+      </p:sp>
+      <p:sp>
+        <p:nvSpPr>
+          <p:cNvPr id="9" name="TextBox 8"/>
+          <p:cNvSpPr txBox="1"/>
+          <p:nvPr/>
+        </p:nvSpPr>
+        <p:spPr>
+          <a:xfrm>
+            <a:off x="841248" y="2331720"/>
+            <a:ext cx="3200400" cy="3840480"/>
+          </a:xfrm>
+          <a:prstGeom prst="rect">
+            <a:avLst/>
+          </a:prstGeom>
+          <a:noFill/>
+        </p:spPr>
+        <p:txBody>
+          <a:bodyPr wrap="square" anchor="t" lIns="0" rIns="0" tIns="0" bIns="0">
+            <a:spAutoFit/>
+          </a:bodyPr>
+          <a:lstStyle/>
+          <a:p>
+            <a:pPr algn="l">
+              <a:lnSpc>
+                <a:spcPct val="130000"/>
+              </a:lnSpc>
+            </a:pPr>
+            <a:r>
+              <a:rPr sz="1150" b="0">
+                <a:solidFill>
+                  <a:srgbClr val="A9A89F"/>
+                </a:solidFill>
+                <a:latin typeface="PingFang SC"/>
+              </a:rPr>
+              <a:t>✓ 6 种后端：ECP5 / Spartan-7 / iCE40 / Gowin / GateMate / sky130 ASIC</a:t>
+            </a:r>
+          </a:p>
+          <a:p>
+            <a:pPr algn="l">
+              <a:lnSpc>
+                <a:spcPct val="130000"/>
+              </a:lnSpc>
+            </a:pPr>
+            <a:r>
+              <a:rPr sz="1150" b="0">
+                <a:solidFill>
+                  <a:srgbClr val="A9A89F"/>
+                </a:solidFill>
+                <a:latin typeface="PingFang SC"/>
+              </a:rPr>
+              <a:t>✓ 10 类生成器 + 用户自带 RTL；DDC 级联一张图</a:t>
+            </a:r>
+          </a:p>
+          <a:p>
+            <a:pPr algn="l">
+              <a:lnSpc>
+                <a:spcPct val="130000"/>
+              </a:lnSpc>
+            </a:pPr>
+            <a:r>
+              <a:rPr sz="1150" b="0">
+                <a:solidFill>
+                  <a:srgbClr val="A9A89F"/>
+                </a:solidFill>
+                <a:latin typeface="PingFang SC"/>
+              </a:rPr>
+              <a:t>✓ 智能体改生成器：门禁（发射/仿真/形式等价/变异分数）+ A/B，人合并</a:t>
+            </a:r>
+          </a:p>
+          <a:p>
+            <a:pPr algn="l">
+              <a:lnSpc>
+                <a:spcPct val="130000"/>
+              </a:lnSpc>
+            </a:pPr>
+            <a:r>
+              <a:rPr sz="1150" b="0">
+                <a:solidFill>
+                  <a:srgbClr val="A9A89F"/>
+                </a:solidFill>
+                <a:latin typeface="PingFang SC"/>
+              </a:rPr>
+              <a:t>✓ GP 代理模型 + 设计空间扫描 + 每次运行变异分数</a:t>
+            </a:r>
+          </a:p>
+          <a:p>
+            <a:pPr algn="l">
+              <a:lnSpc>
+                <a:spcPct val="130000"/>
+              </a:lnSpc>
+            </a:pPr>
+            <a:r>
+              <a:rPr sz="1150" b="0">
+                <a:solidFill>
+                  <a:srgbClr val="A9A89F"/>
+                </a:solidFill>
+                <a:latin typeface="PingFang SC"/>
+              </a:rPr>
+              <a:t>✓ AGH 底座：快/深思/author 三种模式、账本、重启续接</a:t>
+            </a:r>
+          </a:p>
+          <a:p>
+            <a:pPr algn="l">
+              <a:lnSpc>
+                <a:spcPct val="130000"/>
+              </a:lnSpc>
+            </a:pPr>
+            <a:r>
+              <a:rPr sz="1150" b="0">
+                <a:solidFill>
+                  <a:srgbClr val="A9A89F"/>
+                </a:solidFill>
+                <a:latin typeface="PingFang SC"/>
+              </a:rPr>
+              <a:t>✓ MCP 服务器：Claude Code 直接调用</a:t>
+            </a:r>
+          </a:p>
+        </p:txBody>
+      </p:sp>
+      <p:sp>
+        <p:nvSpPr>
+          <p:cNvPr id="10" name="Rounded Rectangle 9"/>
+          <p:cNvSpPr/>
+          <p:nvPr/>
+        </p:nvSpPr>
+        <p:spPr>
+          <a:xfrm>
+            <a:off x="4389120" y="1645920"/>
+            <a:ext cx="3566160" cy="4572000"/>
+          </a:xfrm>
+          <a:prstGeom prst="roundRect">
+            <a:avLst>
+              <a:gd name="adj" fmla="val 6000"/>
+            </a:avLst>
+          </a:prstGeom>
+          <a:solidFill>
+            <a:srgbClr val="1C1C1B"/>
+          </a:solidFill>
+          <a:ln w="9525">
+            <a:solidFill>
+              <a:srgbClr val="333331"/>
+            </a:solidFill>
+          </a:ln>
+          <a:effectLst/>
+        </p:spPr>
+        <p:style>
+          <a:lnRef idx="1">
+            <a:schemeClr val="accent1"/>
+          </a:lnRef>
+          <a:fillRef idx="3">
+            <a:schemeClr val="accent1"/>
+          </a:fillRef>
+          <a:effectRef idx="2">
+            <a:schemeClr val="accent1"/>
+          </a:effectRef>
+          <a:fontRef idx="minor">
+            <a:schemeClr val="lt1"/>
+          </a:fontRef>
+        </p:style>
+        <p:txBody>
+          <a:bodyPr rtlCol="0" anchor="ctr" lIns="0" rIns="0"/>
+          <a:lstStyle/>
+          <a:p>
+            <a:pPr algn="ctr"/>
+          </a:p>
+        </p:txBody>
+      </p:sp>
+      <p:sp>
+        <p:nvSpPr>
+          <p:cNvPr id="11" name="Rectangle 10"/>
+          <p:cNvSpPr/>
+          <p:nvPr/>
+        </p:nvSpPr>
+        <p:spPr>
+          <a:xfrm>
+            <a:off x="4389120" y="1645920"/>
+            <a:ext cx="3566160" cy="73152"/>
+          </a:xfrm>
+          <a:prstGeom prst="rect">
+            <a:avLst/>
+          </a:prstGeom>
+          <a:solidFill>
+            <a:srgbClr val="4A90E2"/>
+          </a:solidFill>
+          <a:ln>
+            <a:noFill/>
+          </a:ln>
+          <a:effectLst/>
+        </p:spPr>
+        <p:style>
+          <a:lnRef idx="1">
+            <a:schemeClr val="accent1"/>
+          </a:lnRef>
+          <a:fillRef idx="3">
+            <a:schemeClr val="accent1"/>
+          </a:fillRef>
+          <a:effectRef idx="2">
+            <a:schemeClr val="accent1"/>
+          </a:effectRef>
+          <a:fontRef idx="minor">
+            <a:schemeClr val="lt1"/>
+          </a:fontRef>
+        </p:style>
+        <p:txBody>
+          <a:bodyPr rtlCol="0" anchor="ctr" lIns="0" rIns="0"/>
+          <a:lstStyle/>
+          <a:p>
+            <a:pPr algn="ctr"/>
+          </a:p>
+        </p:txBody>
+      </p:sp>
+      <p:sp>
+        <p:nvSpPr>
+          <p:cNvPr id="12" name="TextBox 11"/>
+          <p:cNvSpPr txBox="1"/>
+          <p:nvPr/>
+        </p:nvSpPr>
+        <p:spPr>
+          <a:xfrm>
+            <a:off x="4590288" y="1874519"/>
+            <a:ext cx="3200400" cy="365760"/>
+          </a:xfrm>
+          <a:prstGeom prst="rect">
+            <a:avLst/>
+          </a:prstGeom>
+          <a:noFill/>
+        </p:spPr>
+        <p:txBody>
+          <a:bodyPr wrap="square" anchor="t" lIns="0" rIns="0" tIns="0" bIns="0">
+            <a:spAutoFit/>
+          </a:bodyPr>
+          <a:lstStyle/>
+          <a:p>
+            <a:pPr algn="l">
+              <a:lnSpc>
+                <a:spcPct val="115000"/>
+              </a:lnSpc>
+            </a:pPr>
+            <a:r>
+              <a:rPr sz="1400" b="1">
+                <a:solidFill>
+                  <a:srgbClr val="4A90E2"/>
+                </a:solidFill>
+                <a:latin typeface="PingFang SC"/>
+              </a:rPr>
+              <a:t>下一步 · 扩大空间</a:t>
+            </a:r>
+          </a:p>
+        </p:txBody>
+      </p:sp>
+      <p:sp>
+        <p:nvSpPr>
+          <p:cNvPr id="13" name="TextBox 12"/>
+          <p:cNvSpPr txBox="1"/>
+          <p:nvPr/>
+        </p:nvSpPr>
+        <p:spPr>
+          <a:xfrm>
+            <a:off x="4590288" y="2331720"/>
+            <a:ext cx="3200400" cy="3840480"/>
+          </a:xfrm>
+          <a:prstGeom prst="rect">
+            <a:avLst/>
+          </a:prstGeom>
+          <a:noFill/>
+        </p:spPr>
+        <p:txBody>
+          <a:bodyPr wrap="square" anchor="t" lIns="0" rIns="0" tIns="0" bIns="0">
+            <a:spAutoFit/>
+          </a:bodyPr>
+          <a:lstStyle/>
+          <a:p>
+            <a:pPr algn="l">
+              <a:lnSpc>
+                <a:spcPct val="130000"/>
+              </a:lnSpc>
+            </a:pPr>
+            <a:r>
+              <a:rPr sz="1150" b="0">
+                <a:solidFill>
+                  <a:srgbClr val="A9A89F"/>
+                </a:solidFill>
+                <a:latin typeface="PingFang SC"/>
+              </a:rPr>
+              <a:t>• Artix-7 / UltraScale+：装上 Vivado 器件文件即启用</a:t>
+            </a:r>
+          </a:p>
+          <a:p>
+            <a:pPr algn="l">
+              <a:lnSpc>
+                <a:spcPct val="130000"/>
+              </a:lnSpc>
+            </a:pPr>
+            <a:r>
+              <a:rPr sz="1150" b="0">
+                <a:solidFill>
+                  <a:srgbClr val="A9A89F"/>
+                </a:solidFill>
+                <a:latin typeface="PingFang SC"/>
+              </a:rPr>
+              <a:t>• 让智能体写全新生成器：RTL 与参考模型分两个会话写、互相校验</a:t>
+            </a:r>
+          </a:p>
+          <a:p>
+            <a:pPr algn="l">
+              <a:lnSpc>
+                <a:spcPct val="130000"/>
+              </a:lnSpc>
+            </a:pPr>
+            <a:r>
+              <a:rPr sz="1150" b="0">
+                <a:solidFill>
+                  <a:srgbClr val="A9A89F"/>
+                </a:solidFill>
+                <a:latin typeface="PingFang SC"/>
+              </a:rPr>
+              <a:t>• 更多节点：CIC、池化、im2col+matmul 卷积层、CRC</a:t>
+            </a:r>
+          </a:p>
+          <a:p>
+            <a:pPr algn="l">
+              <a:lnSpc>
+                <a:spcPct val="130000"/>
+              </a:lnSpc>
+            </a:pPr>
+            <a:r>
+              <a:rPr sz="1150" b="0">
+                <a:solidFill>
+                  <a:srgbClr val="A9A89F"/>
+                </a:solidFill>
+                <a:latin typeface="PingFang SC"/>
+              </a:rPr>
+              <a:t>• 多模型规划器对照进每晚回归</a:t>
+            </a:r>
+          </a:p>
+        </p:txBody>
+      </p:sp>
+      <p:sp>
+        <p:nvSpPr>
+          <p:cNvPr id="14" name="Rounded Rectangle 13"/>
+          <p:cNvSpPr/>
+          <p:nvPr/>
+        </p:nvSpPr>
+        <p:spPr>
+          <a:xfrm>
+            <a:off x="8138159" y="1645920"/>
+            <a:ext cx="3566160" cy="4572000"/>
+          </a:xfrm>
+          <a:prstGeom prst="roundRect">
+            <a:avLst>
+              <a:gd name="adj" fmla="val 6000"/>
+            </a:avLst>
+          </a:prstGeom>
+          <a:solidFill>
+            <a:srgbClr val="1C1C1B"/>
+          </a:solidFill>
+          <a:ln w="9525">
+            <a:solidFill>
+              <a:srgbClr val="333331"/>
+            </a:solidFill>
+          </a:ln>
+          <a:effectLst/>
+        </p:spPr>
+        <p:style>
+          <a:lnRef idx="1">
+            <a:schemeClr val="accent1"/>
+          </a:lnRef>
+          <a:fillRef idx="3">
+            <a:schemeClr val="accent1"/>
+          </a:fillRef>
+          <a:effectRef idx="2">
+            <a:schemeClr val="accent1"/>
+          </a:effectRef>
+          <a:fontRef idx="minor">
+            <a:schemeClr val="lt1"/>
+          </a:fontRef>
+        </p:style>
+        <p:txBody>
+          <a:bodyPr rtlCol="0" anchor="ctr" lIns="0" rIns="0"/>
+          <a:lstStyle/>
+          <a:p>
+            <a:pPr algn="ctr"/>
+          </a:p>
+        </p:txBody>
+      </p:sp>
+      <p:sp>
+        <p:nvSpPr>
+          <p:cNvPr id="15" name="Rectangle 14"/>
+          <p:cNvSpPr/>
+          <p:nvPr/>
+        </p:nvSpPr>
+        <p:spPr>
+          <a:xfrm>
+            <a:off x="8138159" y="1645920"/>
+            <a:ext cx="3566160" cy="73152"/>
+          </a:xfrm>
+          <a:prstGeom prst="rect">
+            <a:avLst/>
+          </a:prstGeom>
+          <a:solidFill>
+            <a:srgbClr val="D9A21B"/>
+          </a:solidFill>
+          <a:ln>
+            <a:noFill/>
+          </a:ln>
+          <a:effectLst/>
+        </p:spPr>
+        <p:style>
+          <a:lnRef idx="1">
+            <a:schemeClr val="accent1"/>
+          </a:lnRef>
+          <a:fillRef idx="3">
+            <a:schemeClr val="accent1"/>
+          </a:fillRef>
+          <a:effectRef idx="2">
+            <a:schemeClr val="accent1"/>
+          </a:effectRef>
+          <a:fontRef idx="minor">
+            <a:schemeClr val="lt1"/>
+          </a:fontRef>
+        </p:style>
+        <p:txBody>
+          <a:bodyPr rtlCol="0" anchor="ctr" lIns="0" rIns="0"/>
+          <a:lstStyle/>
+          <a:p>
+            <a:pPr algn="ctr"/>
+          </a:p>
+        </p:txBody>
+      </p:sp>
+      <p:sp>
+        <p:nvSpPr>
+          <p:cNvPr id="16" name="TextBox 15"/>
+          <p:cNvSpPr txBox="1"/>
+          <p:nvPr/>
+        </p:nvSpPr>
+        <p:spPr>
+          <a:xfrm>
+            <a:off x="8339327" y="1874519"/>
+            <a:ext cx="3200400" cy="365760"/>
+          </a:xfrm>
+          <a:prstGeom prst="rect">
+            <a:avLst/>
+          </a:prstGeom>
+          <a:noFill/>
+        </p:spPr>
+        <p:txBody>
+          <a:bodyPr wrap="square" anchor="t" lIns="0" rIns="0" tIns="0" bIns="0">
+            <a:spAutoFit/>
+          </a:bodyPr>
+          <a:lstStyle/>
+          <a:p>
+            <a:pPr algn="l">
+              <a:lnSpc>
+                <a:spcPct val="115000"/>
+              </a:lnSpc>
+            </a:pPr>
+            <a:r>
+              <a:rPr sz="1400" b="1">
+                <a:solidFill>
+                  <a:srgbClr val="D9A21B"/>
+                </a:solidFill>
+                <a:latin typeface="PingFang SC"/>
+              </a:rPr>
+              <a:t>更远 · 平台化</a:t>
+            </a:r>
+          </a:p>
+        </p:txBody>
+      </p:sp>
+      <p:sp>
+        <p:nvSpPr>
+          <p:cNvPr id="17" name="TextBox 16"/>
+          <p:cNvSpPr txBox="1"/>
+          <p:nvPr/>
+        </p:nvSpPr>
+        <p:spPr>
+          <a:xfrm>
+            <a:off x="8339327" y="2331720"/>
+            <a:ext cx="3200400" cy="3840480"/>
+          </a:xfrm>
+          <a:prstGeom prst="rect">
+            <a:avLst/>
+          </a:prstGeom>
+          <a:noFill/>
+        </p:spPr>
+        <p:txBody>
+          <a:bodyPr wrap="square" anchor="t" lIns="0" rIns="0" tIns="0" bIns="0">
+            <a:spAutoFit/>
+          </a:bodyPr>
+          <a:lstStyle/>
+          <a:p>
+            <a:pPr algn="l">
+              <a:lnSpc>
+                <a:spcPct val="130000"/>
+              </a:lnSpc>
+            </a:pPr>
+            <a:r>
+              <a:rPr sz="1150" b="0">
+                <a:solidFill>
+                  <a:srgbClr val="A9A89F"/>
+                </a:solidFill>
+                <a:latin typeface="PingFang SC"/>
+              </a:rPr>
+              <a:t>• 有板后：ILA/VIO 在板验证作为第六级</a:t>
+            </a:r>
+          </a:p>
+          <a:p>
+            <a:pPr algn="l">
+              <a:lnSpc>
+                <a:spcPct val="130000"/>
+              </a:lnSpc>
+            </a:pPr>
+            <a:r>
+              <a:rPr sz="1150" b="0">
+                <a:solidFill>
+                  <a:srgbClr val="A9A89F"/>
+                </a:solidFill>
+                <a:latin typeface="PingFang SC"/>
+              </a:rPr>
+              <a:t>• 开放 IR 规范（/schema 已导出），让外部生成器接入；设计记忆跨用户共享（可审计）</a:t>
+            </a:r>
+          </a:p>
+          <a:p>
+            <a:pPr algn="l">
+              <a:lnSpc>
+                <a:spcPct val="130000"/>
+              </a:lnSpc>
+            </a:pPr>
+            <a:r>
+              <a:rPr sz="1150" b="0">
+                <a:solidFill>
+                  <a:srgbClr val="A9A89F"/>
+                </a:solidFill>
+                <a:latin typeface="PingFang SC"/>
+              </a:rPr>
+              <a:t>• 形式等价扩展到跨 IR（折叠 vs 展开同一滤波器）</a:t>
+            </a:r>
+          </a:p>
+          <a:p>
+            <a:pPr algn="l">
+              <a:lnSpc>
+                <a:spcPct val="130000"/>
+              </a:lnSpc>
+            </a:pPr>
+            <a:r>
+              <a:rPr sz="1150" b="0">
+                <a:solidFill>
+                  <a:srgbClr val="A9A89F"/>
+                </a:solidFill>
+                <a:latin typeface="PingFang SC"/>
+              </a:rPr>
+              <a:t>• 从 SDF 时序仿真到门级功耗估计</a:t>
+            </a:r>
+          </a:p>
+        </p:txBody>
+      </p:sp>
+    </p:spTree>
+  </p:cSld>
+  <p:clrMapOvr>
+    <a:masterClrMapping/>
+  </p:clrMapOvr>
+</p:sld>
+</file>
+
+<file path=ppt/slides/slide18.xml><?xml version="1.0" encoding="utf-8"?>
+<p:sld xmlns:a="http://schemas.openxmlformats.org/drawingml/2006/main" xmlns:p="http://schemas.openxmlformats.org/presentationml/2006/main" xmlns:r="http://schemas.openxmlformats.org/officeDocument/2006/relationships">
+  <p:cSld>
+    <p:bg>
+      <p:bgPr>
+        <a:solidFill>
+          <a:srgbClr val="0E0E0D"/>
+        </a:solidFill>
+        <a:effectLst/>
+      </p:bgPr>
+    </p:bg>
+    <p:spTree>
+      <p:nvGrpSpPr>
+        <p:cNvPr id="1" name=""/>
+        <p:cNvGrpSpPr/>
+        <p:nvPr/>
+      </p:nvGrpSpPr>
+      <p:grpSpPr/>
+      <p:sp>
+        <p:nvSpPr>
+          <p:cNvPr id="2" name="TextBox 1"/>
+          <p:cNvSpPr txBox="1"/>
+          <p:nvPr/>
+        </p:nvSpPr>
+        <p:spPr>
+          <a:xfrm>
             <a:off x="822960" y="1828800"/>
             <a:ext cx="10515600" cy="1097280"/>
           </a:xfrm>
@@ -12840,7 +13632,7 @@
                 </a:solidFill>
                 <a:latin typeface="PingFang SC"/>
               </a:rPr>
-              <a:t>• 7 类生成器（matmul、FIR、conv2d、FIR 级联、CORDIC、FFT、通用 IR 图）× 5 种器件，20+ 个真实任务达标，最高 319.5 MHz</a:t>
+              <a:t>• 10 类生成器 + 自带 RTL × 6 种后端（含 sky130 ASIC），真实器件上签核；最高 319.5 MHz</a:t>
             </a:r>
           </a:p>
           <a:p>
@@ -12856,7 +13648,7 @@
                 </a:solidFill>
                 <a:latin typeface="PingFang SC"/>
               </a:rPr>
-              <a:t>• 五级仿真阶梯 + 真实布局布线签核 + 3 种子中位数 Fmax + SymbiYosys 形式等价，没有一个估算数字进结论</a:t>
+              <a:t>• 五级仿真阶梯 + 形式等价 + 变异分数：没有一个估算数字进结论</a:t>
             </a:r>
           </a:p>
           <a:p>
@@ -12872,7 +13664,7 @@
                 </a:solidFill>
                 <a:latin typeface="PingFang SC"/>
               </a:rPr>
-              <a:t>• 自动验证的设计经验池；14 例回归每晚自动跑并告警；交付包含 AXI-Stream 包装与板级工程</a:t>
+              <a:t>• 智能体跑在 Agnes Harness 上，并且能在门禁下改自己的生成器——两个旋钮已经由它提出、实测、合并</a:t>
             </a:r>
           </a:p>
           <a:p>
@@ -12888,7 +13680,7 @@
                 </a:solidFill>
                 <a:latin typeface="PingFang SC"/>
               </a:rPr>
-              <a:t>• 3 天、约 9,610 行 Python/JS，38 次提交；已部署，笔记本是瘦客户端</a:t>
+              <a:t>• 每晚回归；交付包含 AXI-Stream 包装、板级工程、ASIC 的 GDS；MCP 服务器给别的智能体用</a:t>
             </a:r>
           </a:p>
         </p:txBody>
